--- a/exports/pptx/lessons/middle-module-13-indic-ecology/day-04-sacred-groves.pptx
+++ b/exports/pptx/lessons/middle-module-13-indic-ecology/day-04-sacred-groves.pptx
@@ -4926,7 +4926,701 @@
         </p:nvSpPr>
         <p:spPr>
           <a:xfrm>
-            <a:off x="634901" y="4679603"/>
+            <a:off x="406301" y="2254746"/>
+            <a:ext cx="8498026" cy="213271"/>
+          </a:xfrm>
+          <a:prstGeom prst="rect">
+            <a:avLst/>
+          </a:prstGeom>
+          <a:noFill/>
+          <a:ln/>
+        </p:spPr>
+        <p:txBody>
+          <a:bodyPr wrap="square" lIns="0" tIns="0" rIns="0" bIns="0" rtlCol="0" anchor="t"/>
+          <a:lstStyle/>
+          <a:p>
+            <a:pPr algn="l" indent="0" marL="0">
+              <a:lnSpc>
+                <a:spcPts val="1680"/>
+              </a:lnSpc>
+              <a:spcBef>
+                <a:spcPts val="300"/>
+              </a:spcBef>
+              <a:spcAft>
+                <a:spcPts val="300"/>
+              </a:spcAft>
+              <a:buNone/>
+            </a:pPr>
+            <a:r>
+              <a:rPr lang="en-US" sz="1200" i="1" dirty="0">
+                <a:solidFill>
+                  <a:srgbClr val="1C2833"/>
+                </a:solidFill>
+                <a:latin typeface="Arial" pitchFamily="34" charset="0"/>
+                <a:ea typeface="Arial" pitchFamily="34" charset="-122"/>
+                <a:cs typeface="Arial" pitchFamily="34" charset="-120"/>
+              </a:rPr>
+              <a:t>Each row: Region · Local name · Notes.</a:t>
+            </a:r>
+            <a:endParaRPr lang="en-US" sz="1200" dirty="0"/>
+          </a:p>
+        </p:txBody>
+      </p:sp>
+      <p:sp>
+        <p:nvSpPr>
+          <p:cNvPr id="7" name="Text 5"/>
+          <p:cNvSpPr/>
+          <p:nvPr/>
+        </p:nvSpPr>
+        <p:spPr>
+          <a:xfrm>
+            <a:off x="634901" y="2556867"/>
+            <a:ext cx="8102798" cy="1500783"/>
+          </a:xfrm>
+          <a:prstGeom prst="rect">
+            <a:avLst/>
+          </a:prstGeom>
+          <a:noFill/>
+          <a:ln/>
+        </p:spPr>
+        <p:txBody>
+          <a:bodyPr wrap="square" lIns="0" tIns="0" rIns="0" bIns="0" rtlCol="0" anchor="t"/>
+          <a:lstStyle/>
+          <a:p>
+            <a:pPr algn="l" marL="342900" indent="-342900">
+              <a:lnSpc>
+                <a:spcPts val="1620"/>
+              </a:lnSpc>
+              <a:spcAft>
+                <a:spcPts val="300"/>
+              </a:spcAft>
+              <a:buSzPct val="100000"/>
+              <a:buChar char="•"/>
+            </a:pPr>
+            <a:r>
+              <a:rPr lang="en-US" sz="1200" b="1" dirty="0">
+                <a:solidFill>
+                  <a:srgbClr val="1C2833"/>
+                </a:solidFill>
+                <a:latin typeface="Arial" pitchFamily="34" charset="0"/>
+                <a:ea typeface="Arial" pitchFamily="34" charset="-122"/>
+                <a:cs typeface="Arial" pitchFamily="34" charset="-120"/>
+              </a:rPr>
+              <a:t>Karnataka (Coorg)</a:t>
+            </a:r>
+            <a:pPr algn="l" indent="0" marL="0">
+              <a:lnSpc>
+                <a:spcPts val="1620"/>
+              </a:lnSpc>
+              <a:spcAft>
+                <a:spcPts val="300"/>
+              </a:spcAft>
+              <a:buNone/>
+            </a:pPr>
+            <a:r>
+              <a:rPr lang="en-US" sz="1200" dirty="0">
+                <a:solidFill>
+                  <a:srgbClr val="1C2833"/>
+                </a:solidFill>
+                <a:latin typeface="Arial" pitchFamily="34" charset="0"/>
+                <a:ea typeface="Arial" pitchFamily="34" charset="-122"/>
+                <a:cs typeface="Arial" pitchFamily="34" charset="-120"/>
+              </a:rPr>
+              <a:t> — </a:t>
+            </a:r>
+            <a:pPr algn="l" indent="0" marL="0">
+              <a:lnSpc>
+                <a:spcPts val="1620"/>
+              </a:lnSpc>
+              <a:spcAft>
+                <a:spcPts val="300"/>
+              </a:spcAft>
+              <a:buNone/>
+            </a:pPr>
+            <a:r>
+              <a:rPr lang="en-US" sz="1200" i="1" dirty="0">
+                <a:solidFill>
+                  <a:srgbClr val="1C2833"/>
+                </a:solidFill>
+                <a:latin typeface="Arial" pitchFamily="34" charset="0"/>
+                <a:ea typeface="Arial" pitchFamily="34" charset="-122"/>
+                <a:cs typeface="Arial" pitchFamily="34" charset="-120"/>
+              </a:rPr>
+              <a:t>devarakāḍu</a:t>
+            </a:r>
+            <a:pPr algn="l" indent="0" marL="0">
+              <a:lnSpc>
+                <a:spcPts val="1620"/>
+              </a:lnSpc>
+              <a:spcAft>
+                <a:spcPts val="300"/>
+              </a:spcAft>
+              <a:buNone/>
+            </a:pPr>
+            <a:r>
+              <a:rPr lang="en-US" sz="1200" dirty="0">
+                <a:solidFill>
+                  <a:srgbClr val="1C2833"/>
+                </a:solidFill>
+                <a:latin typeface="Arial" pitchFamily="34" charset="0"/>
+                <a:ea typeface="Arial" pitchFamily="34" charset="-122"/>
+                <a:cs typeface="Arial" pitchFamily="34" charset="-120"/>
+              </a:rPr>
+              <a:t> · ~1,200 documented groves; surveyed by Madhav Gadgil's team in the 1970s–90s.</a:t>
+            </a:r>
+            <a:endParaRPr lang="en-US" sz="1200" dirty="0"/>
+          </a:p>
+          <a:p>
+            <a:pPr algn="l" marL="342900" indent="-342900">
+              <a:lnSpc>
+                <a:spcPts val="1620"/>
+              </a:lnSpc>
+              <a:spcAft>
+                <a:spcPts val="300"/>
+              </a:spcAft>
+              <a:buSzPct val="100000"/>
+              <a:buChar char="•"/>
+            </a:pPr>
+            <a:r>
+              <a:rPr lang="en-US" sz="1200" b="1" dirty="0">
+                <a:solidFill>
+                  <a:srgbClr val="1C2833"/>
+                </a:solidFill>
+                <a:latin typeface="Arial" pitchFamily="34" charset="0"/>
+                <a:ea typeface="Arial" pitchFamily="34" charset="-122"/>
+                <a:cs typeface="Arial" pitchFamily="34" charset="-120"/>
+              </a:rPr>
+              <a:t>Kerala</a:t>
+            </a:r>
+            <a:pPr algn="l" indent="0" marL="0">
+              <a:lnSpc>
+                <a:spcPts val="1620"/>
+              </a:lnSpc>
+              <a:spcAft>
+                <a:spcPts val="300"/>
+              </a:spcAft>
+              <a:buNone/>
+            </a:pPr>
+            <a:r>
+              <a:rPr lang="en-US" sz="1200" dirty="0">
+                <a:solidFill>
+                  <a:srgbClr val="1C2833"/>
+                </a:solidFill>
+                <a:latin typeface="Arial" pitchFamily="34" charset="0"/>
+                <a:ea typeface="Arial" pitchFamily="34" charset="-122"/>
+                <a:cs typeface="Arial" pitchFamily="34" charset="-120"/>
+              </a:rPr>
+              <a:t> — </a:t>
+            </a:r>
+            <a:pPr algn="l" indent="0" marL="0">
+              <a:lnSpc>
+                <a:spcPts val="1620"/>
+              </a:lnSpc>
+              <a:spcAft>
+                <a:spcPts val="300"/>
+              </a:spcAft>
+              <a:buNone/>
+            </a:pPr>
+            <a:r>
+              <a:rPr lang="en-US" sz="1200" i="1" dirty="0">
+                <a:solidFill>
+                  <a:srgbClr val="1C2833"/>
+                </a:solidFill>
+                <a:latin typeface="Arial" pitchFamily="34" charset="0"/>
+                <a:ea typeface="Arial" pitchFamily="34" charset="-122"/>
+                <a:cs typeface="Arial" pitchFamily="34" charset="-120"/>
+              </a:rPr>
+              <a:t>kāvu</a:t>
+            </a:r>
+            <a:pPr algn="l" indent="0" marL="0">
+              <a:lnSpc>
+                <a:spcPts val="1620"/>
+              </a:lnSpc>
+              <a:spcAft>
+                <a:spcPts val="300"/>
+              </a:spcAft>
+              <a:buNone/>
+            </a:pPr>
+            <a:r>
+              <a:rPr lang="en-US" sz="1200" dirty="0">
+                <a:solidFill>
+                  <a:srgbClr val="1C2833"/>
+                </a:solidFill>
+                <a:latin typeface="Arial" pitchFamily="34" charset="0"/>
+                <a:ea typeface="Arial" pitchFamily="34" charset="-122"/>
+                <a:cs typeface="Arial" pitchFamily="34" charset="-120"/>
+              </a:rPr>
+              <a:t> · Often associated with snake deities (</a:t>
+            </a:r>
+            <a:pPr algn="l" indent="0" marL="0">
+              <a:lnSpc>
+                <a:spcPts val="1620"/>
+              </a:lnSpc>
+              <a:spcAft>
+                <a:spcPts val="300"/>
+              </a:spcAft>
+              <a:buNone/>
+            </a:pPr>
+            <a:r>
+              <a:rPr lang="en-US" sz="1200" i="1" dirty="0">
+                <a:solidFill>
+                  <a:srgbClr val="1C2833"/>
+                </a:solidFill>
+                <a:latin typeface="Arial" pitchFamily="34" charset="0"/>
+                <a:ea typeface="Arial" pitchFamily="34" charset="-122"/>
+                <a:cs typeface="Arial" pitchFamily="34" charset="-120"/>
+              </a:rPr>
+              <a:t>sarpa-kāvu</a:t>
+            </a:r>
+            <a:pPr algn="l" indent="0" marL="0">
+              <a:lnSpc>
+                <a:spcPts val="1620"/>
+              </a:lnSpc>
+              <a:spcAft>
+                <a:spcPts val="300"/>
+              </a:spcAft>
+              <a:buNone/>
+            </a:pPr>
+            <a:r>
+              <a:rPr lang="en-US" sz="1200" dirty="0">
+                <a:solidFill>
+                  <a:srgbClr val="1C2833"/>
+                </a:solidFill>
+                <a:latin typeface="Arial" pitchFamily="34" charset="0"/>
+                <a:ea typeface="Arial" pitchFamily="34" charset="-122"/>
+                <a:cs typeface="Arial" pitchFamily="34" charset="-120"/>
+              </a:rPr>
+              <a:t>).</a:t>
+            </a:r>
+            <a:endParaRPr lang="en-US" sz="1200" dirty="0"/>
+          </a:p>
+          <a:p>
+            <a:pPr algn="l" marL="342900" indent="-342900">
+              <a:lnSpc>
+                <a:spcPts val="1620"/>
+              </a:lnSpc>
+              <a:spcAft>
+                <a:spcPts val="300"/>
+              </a:spcAft>
+              <a:buSzPct val="100000"/>
+              <a:buChar char="•"/>
+            </a:pPr>
+            <a:r>
+              <a:rPr lang="en-US" sz="1200" b="1" dirty="0">
+                <a:solidFill>
+                  <a:srgbClr val="1C2833"/>
+                </a:solidFill>
+                <a:latin typeface="Arial" pitchFamily="34" charset="0"/>
+                <a:ea typeface="Arial" pitchFamily="34" charset="-122"/>
+                <a:cs typeface="Arial" pitchFamily="34" charset="-120"/>
+              </a:rPr>
+              <a:t>Maharashtra (Western Ghats)</a:t>
+            </a:r>
+            <a:pPr algn="l" indent="0" marL="0">
+              <a:lnSpc>
+                <a:spcPts val="1620"/>
+              </a:lnSpc>
+              <a:spcAft>
+                <a:spcPts val="300"/>
+              </a:spcAft>
+              <a:buNone/>
+            </a:pPr>
+            <a:r>
+              <a:rPr lang="en-US" sz="1200" dirty="0">
+                <a:solidFill>
+                  <a:srgbClr val="1C2833"/>
+                </a:solidFill>
+                <a:latin typeface="Arial" pitchFamily="34" charset="0"/>
+                <a:ea typeface="Arial" pitchFamily="34" charset="-122"/>
+                <a:cs typeface="Arial" pitchFamily="34" charset="-120"/>
+              </a:rPr>
+              <a:t> — </a:t>
+            </a:r>
+            <a:pPr algn="l" indent="0" marL="0">
+              <a:lnSpc>
+                <a:spcPts val="1620"/>
+              </a:lnSpc>
+              <a:spcAft>
+                <a:spcPts val="300"/>
+              </a:spcAft>
+              <a:buNone/>
+            </a:pPr>
+            <a:r>
+              <a:rPr lang="en-US" sz="1200" i="1" dirty="0">
+                <a:solidFill>
+                  <a:srgbClr val="1C2833"/>
+                </a:solidFill>
+                <a:latin typeface="Arial" pitchFamily="34" charset="0"/>
+                <a:ea typeface="Arial" pitchFamily="34" charset="-122"/>
+                <a:cs typeface="Arial" pitchFamily="34" charset="-120"/>
+              </a:rPr>
+              <a:t>devarāī</a:t>
+            </a:r>
+            <a:pPr algn="l" indent="0" marL="0">
+              <a:lnSpc>
+                <a:spcPts val="1620"/>
+              </a:lnSpc>
+              <a:spcAft>
+                <a:spcPts val="300"/>
+              </a:spcAft>
+              <a:buNone/>
+            </a:pPr>
+            <a:r>
+              <a:rPr lang="en-US" sz="1200" dirty="0">
+                <a:solidFill>
+                  <a:srgbClr val="1C2833"/>
+                </a:solidFill>
+                <a:latin typeface="Arial" pitchFamily="34" charset="0"/>
+                <a:ea typeface="Arial" pitchFamily="34" charset="-122"/>
+                <a:cs typeface="Arial" pitchFamily="34" charset="-120"/>
+              </a:rPr>
+              <a:t> · Surveyed by Gadgil &amp; Vartak in their 1976 paper.</a:t>
+            </a:r>
+            <a:endParaRPr lang="en-US" sz="1200" dirty="0"/>
+          </a:p>
+          <a:p>
+            <a:pPr algn="l" marL="342900" indent="-342900">
+              <a:lnSpc>
+                <a:spcPts val="1620"/>
+              </a:lnSpc>
+              <a:spcAft>
+                <a:spcPts val="300"/>
+              </a:spcAft>
+              <a:buSzPct val="100000"/>
+              <a:buChar char="•"/>
+            </a:pPr>
+            <a:r>
+              <a:rPr lang="en-US" sz="1200" b="1" dirty="0">
+                <a:solidFill>
+                  <a:srgbClr val="1C2833"/>
+                </a:solidFill>
+                <a:latin typeface="Arial" pitchFamily="34" charset="0"/>
+                <a:ea typeface="Arial" pitchFamily="34" charset="-122"/>
+                <a:cs typeface="Arial" pitchFamily="34" charset="-120"/>
+              </a:rPr>
+              <a:t>Jharkhand / Odisha / W. Bengal (tribal belt)</a:t>
+            </a:r>
+            <a:pPr algn="l" indent="0" marL="0">
+              <a:lnSpc>
+                <a:spcPts val="1620"/>
+              </a:lnSpc>
+              <a:spcAft>
+                <a:spcPts val="300"/>
+              </a:spcAft>
+              <a:buNone/>
+            </a:pPr>
+            <a:r>
+              <a:rPr lang="en-US" sz="1200" dirty="0">
+                <a:solidFill>
+                  <a:srgbClr val="1C2833"/>
+                </a:solidFill>
+                <a:latin typeface="Arial" pitchFamily="34" charset="0"/>
+                <a:ea typeface="Arial" pitchFamily="34" charset="-122"/>
+                <a:cs typeface="Arial" pitchFamily="34" charset="-120"/>
+              </a:rPr>
+              <a:t> — </a:t>
+            </a:r>
+            <a:pPr algn="l" indent="0" marL="0">
+              <a:lnSpc>
+                <a:spcPts val="1620"/>
+              </a:lnSpc>
+              <a:spcAft>
+                <a:spcPts val="300"/>
+              </a:spcAft>
+              <a:buNone/>
+            </a:pPr>
+            <a:r>
+              <a:rPr lang="en-US" sz="1200" i="1" dirty="0">
+                <a:solidFill>
+                  <a:srgbClr val="1C2833"/>
+                </a:solidFill>
+                <a:latin typeface="Arial" pitchFamily="34" charset="0"/>
+                <a:ea typeface="Arial" pitchFamily="34" charset="-122"/>
+                <a:cs typeface="Arial" pitchFamily="34" charset="-120"/>
+              </a:rPr>
+              <a:t>sarna</a:t>
+            </a:r>
+            <a:pPr algn="l" indent="0" marL="0">
+              <a:lnSpc>
+                <a:spcPts val="1620"/>
+              </a:lnSpc>
+              <a:spcAft>
+                <a:spcPts val="300"/>
+              </a:spcAft>
+              <a:buNone/>
+            </a:pPr>
+            <a:r>
+              <a:rPr lang="en-US" sz="1200" dirty="0">
+                <a:solidFill>
+                  <a:srgbClr val="1C2833"/>
+                </a:solidFill>
+                <a:latin typeface="Arial" pitchFamily="34" charset="0"/>
+                <a:ea typeface="Arial" pitchFamily="34" charset="-122"/>
+                <a:cs typeface="Arial" pitchFamily="34" charset="-120"/>
+              </a:rPr>
+              <a:t> · Centred on </a:t>
+            </a:r>
+            <a:pPr algn="l" indent="0" marL="0">
+              <a:lnSpc>
+                <a:spcPts val="1620"/>
+              </a:lnSpc>
+              <a:spcAft>
+                <a:spcPts val="300"/>
+              </a:spcAft>
+              <a:buNone/>
+            </a:pPr>
+            <a:r>
+              <a:rPr lang="en-US" sz="1200" i="1" dirty="0">
+                <a:solidFill>
+                  <a:srgbClr val="1C2833"/>
+                </a:solidFill>
+                <a:latin typeface="Arial" pitchFamily="34" charset="0"/>
+                <a:ea typeface="Arial" pitchFamily="34" charset="-122"/>
+                <a:cs typeface="Arial" pitchFamily="34" charset="-120"/>
+              </a:rPr>
+              <a:t>sal</a:t>
+            </a:r>
+            <a:pPr algn="l" indent="0" marL="0">
+              <a:lnSpc>
+                <a:spcPts val="1620"/>
+              </a:lnSpc>
+              <a:spcAft>
+                <a:spcPts val="300"/>
+              </a:spcAft>
+              <a:buNone/>
+            </a:pPr>
+            <a:r>
+              <a:rPr lang="en-US" sz="1200" dirty="0">
+                <a:solidFill>
+                  <a:srgbClr val="1C2833"/>
+                </a:solidFill>
+                <a:latin typeface="Arial" pitchFamily="34" charset="0"/>
+                <a:ea typeface="Arial" pitchFamily="34" charset="-122"/>
+                <a:cs typeface="Arial" pitchFamily="34" charset="-120"/>
+              </a:rPr>
+              <a:t> (</a:t>
+            </a:r>
+            <a:pPr algn="l" indent="0" marL="0">
+              <a:lnSpc>
+                <a:spcPts val="1620"/>
+              </a:lnSpc>
+              <a:spcAft>
+                <a:spcPts val="300"/>
+              </a:spcAft>
+              <a:buNone/>
+            </a:pPr>
+            <a:r>
+              <a:rPr lang="en-US" sz="1200" i="1" dirty="0">
+                <a:solidFill>
+                  <a:srgbClr val="1C2833"/>
+                </a:solidFill>
+                <a:latin typeface="Arial" pitchFamily="34" charset="0"/>
+                <a:ea typeface="Arial" pitchFamily="34" charset="-122"/>
+                <a:cs typeface="Arial" pitchFamily="34" charset="-120"/>
+              </a:rPr>
+              <a:t>Shorea robusta</a:t>
+            </a:r>
+            <a:pPr algn="l" indent="0" marL="0">
+              <a:lnSpc>
+                <a:spcPts val="1620"/>
+              </a:lnSpc>
+              <a:spcAft>
+                <a:spcPts val="300"/>
+              </a:spcAft>
+              <a:buNone/>
+            </a:pPr>
+            <a:r>
+              <a:rPr lang="en-US" sz="1200" dirty="0">
+                <a:solidFill>
+                  <a:srgbClr val="1C2833"/>
+                </a:solidFill>
+                <a:latin typeface="Arial" pitchFamily="34" charset="0"/>
+                <a:ea typeface="Arial" pitchFamily="34" charset="-122"/>
+                <a:cs typeface="Arial" pitchFamily="34" charset="-120"/>
+              </a:rPr>
+              <a:t>); tied to Adivasi worship.</a:t>
+            </a:r>
+            <a:endParaRPr lang="en-US" sz="1200" dirty="0"/>
+          </a:p>
+          <a:p>
+            <a:pPr algn="l" marL="342900" indent="-342900">
+              <a:lnSpc>
+                <a:spcPts val="1620"/>
+              </a:lnSpc>
+              <a:spcAft>
+                <a:spcPts val="300"/>
+              </a:spcAft>
+              <a:buSzPct val="100000"/>
+              <a:buChar char="•"/>
+            </a:pPr>
+            <a:r>
+              <a:rPr lang="en-US" sz="1200" b="1" dirty="0">
+                <a:solidFill>
+                  <a:srgbClr val="1C2833"/>
+                </a:solidFill>
+                <a:latin typeface="Arial" pitchFamily="34" charset="0"/>
+                <a:ea typeface="Arial" pitchFamily="34" charset="-122"/>
+                <a:cs typeface="Arial" pitchFamily="34" charset="-120"/>
+              </a:rPr>
+              <a:t>Rajasthan</a:t>
+            </a:r>
+            <a:pPr algn="l" indent="0" marL="0">
+              <a:lnSpc>
+                <a:spcPts val="1620"/>
+              </a:lnSpc>
+              <a:spcAft>
+                <a:spcPts val="300"/>
+              </a:spcAft>
+              <a:buNone/>
+            </a:pPr>
+            <a:r>
+              <a:rPr lang="en-US" sz="1200" dirty="0">
+                <a:solidFill>
+                  <a:srgbClr val="1C2833"/>
+                </a:solidFill>
+                <a:latin typeface="Arial" pitchFamily="34" charset="0"/>
+                <a:ea typeface="Arial" pitchFamily="34" charset="-122"/>
+                <a:cs typeface="Arial" pitchFamily="34" charset="-120"/>
+              </a:rPr>
+              <a:t> — </a:t>
+            </a:r>
+            <a:pPr algn="l" indent="0" marL="0">
+              <a:lnSpc>
+                <a:spcPts val="1620"/>
+              </a:lnSpc>
+              <a:spcAft>
+                <a:spcPts val="300"/>
+              </a:spcAft>
+              <a:buNone/>
+            </a:pPr>
+            <a:r>
+              <a:rPr lang="en-US" sz="1200" i="1" dirty="0">
+                <a:solidFill>
+                  <a:srgbClr val="1C2833"/>
+                </a:solidFill>
+                <a:latin typeface="Arial" pitchFamily="34" charset="0"/>
+                <a:ea typeface="Arial" pitchFamily="34" charset="-122"/>
+                <a:cs typeface="Arial" pitchFamily="34" charset="-120"/>
+              </a:rPr>
+              <a:t>orans</a:t>
+            </a:r>
+            <a:pPr algn="l" indent="0" marL="0">
+              <a:lnSpc>
+                <a:spcPts val="1620"/>
+              </a:lnSpc>
+              <a:spcAft>
+                <a:spcPts val="300"/>
+              </a:spcAft>
+              <a:buNone/>
+            </a:pPr>
+            <a:r>
+              <a:rPr lang="en-US" sz="1200" dirty="0">
+                <a:solidFill>
+                  <a:srgbClr val="1C2833"/>
+                </a:solidFill>
+                <a:latin typeface="Arial" pitchFamily="34" charset="0"/>
+                <a:ea typeface="Arial" pitchFamily="34" charset="-122"/>
+                <a:cs typeface="Arial" pitchFamily="34" charset="-120"/>
+              </a:rPr>
+              <a:t> · Often combined with grazing land for community livestock.</a:t>
+            </a:r>
+            <a:endParaRPr lang="en-US" sz="1200" dirty="0"/>
+          </a:p>
+          <a:p>
+            <a:pPr algn="l" marL="342900" indent="-342900">
+              <a:lnSpc>
+                <a:spcPts val="1620"/>
+              </a:lnSpc>
+              <a:spcAft>
+                <a:spcPts val="300"/>
+              </a:spcAft>
+              <a:buSzPct val="100000"/>
+              <a:buChar char="•"/>
+            </a:pPr>
+            <a:r>
+              <a:rPr lang="en-US" sz="1200" b="1" dirty="0">
+                <a:solidFill>
+                  <a:srgbClr val="1C2833"/>
+                </a:solidFill>
+                <a:latin typeface="Arial" pitchFamily="34" charset="0"/>
+                <a:ea typeface="Arial" pitchFamily="34" charset="-122"/>
+                <a:cs typeface="Arial" pitchFamily="34" charset="-120"/>
+              </a:rPr>
+              <a:t>Meghalaya (Khasi Hills)</a:t>
+            </a:r>
+            <a:pPr algn="l" indent="0" marL="0">
+              <a:lnSpc>
+                <a:spcPts val="1620"/>
+              </a:lnSpc>
+              <a:spcAft>
+                <a:spcPts val="300"/>
+              </a:spcAft>
+              <a:buNone/>
+            </a:pPr>
+            <a:r>
+              <a:rPr lang="en-US" sz="1200" dirty="0">
+                <a:solidFill>
+                  <a:srgbClr val="1C2833"/>
+                </a:solidFill>
+                <a:latin typeface="Arial" pitchFamily="34" charset="0"/>
+                <a:ea typeface="Arial" pitchFamily="34" charset="-122"/>
+                <a:cs typeface="Arial" pitchFamily="34" charset="-120"/>
+              </a:rPr>
+              <a:t> — </a:t>
+            </a:r>
+            <a:pPr algn="l" indent="0" marL="0">
+              <a:lnSpc>
+                <a:spcPts val="1620"/>
+              </a:lnSpc>
+              <a:spcAft>
+                <a:spcPts val="300"/>
+              </a:spcAft>
+              <a:buNone/>
+            </a:pPr>
+            <a:r>
+              <a:rPr lang="en-US" sz="1200" i="1" dirty="0">
+                <a:solidFill>
+                  <a:srgbClr val="1C2833"/>
+                </a:solidFill>
+                <a:latin typeface="Arial" pitchFamily="34" charset="0"/>
+                <a:ea typeface="Arial" pitchFamily="34" charset="-122"/>
+                <a:cs typeface="Arial" pitchFamily="34" charset="-120"/>
+              </a:rPr>
+              <a:t>law kyntang</a:t>
+            </a:r>
+            <a:pPr algn="l" indent="0" marL="0">
+              <a:lnSpc>
+                <a:spcPts val="1620"/>
+              </a:lnSpc>
+              <a:spcAft>
+                <a:spcPts val="300"/>
+              </a:spcAft>
+              <a:buNone/>
+            </a:pPr>
+            <a:r>
+              <a:rPr lang="en-US" sz="1200" dirty="0">
+                <a:solidFill>
+                  <a:srgbClr val="1C2833"/>
+                </a:solidFill>
+                <a:latin typeface="Arial" pitchFamily="34" charset="0"/>
+                <a:ea typeface="Arial" pitchFamily="34" charset="-122"/>
+                <a:cs typeface="Arial" pitchFamily="34" charset="-120"/>
+              </a:rPr>
+              <a:t> · Some of the largest and best-protected groves in India.</a:t>
+            </a:r>
+            <a:endParaRPr lang="en-US" sz="1200" dirty="0"/>
+          </a:p>
+        </p:txBody>
+      </p:sp>
+      <p:sp>
+        <p:nvSpPr>
+          <p:cNvPr id="8" name="Text 6"/>
+          <p:cNvSpPr/>
+          <p:nvPr/>
+        </p:nvSpPr>
+        <p:spPr>
+          <a:xfrm>
+            <a:off x="634901" y="4159151"/>
             <a:ext cx="8102798" cy="281880"/>
           </a:xfrm>
           <a:prstGeom prst="rect">
@@ -4986,13 +5680,13 @@
       </p:sp>
       <p:sp>
         <p:nvSpPr>
-          <p:cNvPr id="7" name="Text 5"/>
+          <p:cNvPr id="9" name="Text 7"/>
           <p:cNvSpPr/>
           <p:nvPr/>
         </p:nvSpPr>
         <p:spPr>
           <a:xfrm>
-            <a:off x="406301" y="5050334"/>
+            <a:off x="406301" y="4529882"/>
             <a:ext cx="8498026" cy="1066354"/>
           </a:xfrm>
           <a:prstGeom prst="rect">
@@ -5080,13 +5774,13 @@
       </p:sp>
       <p:sp>
         <p:nvSpPr>
-          <p:cNvPr id="8" name="Text 6"/>
+          <p:cNvPr id="10" name="Text 8"/>
           <p:cNvSpPr/>
           <p:nvPr/>
         </p:nvSpPr>
         <p:spPr>
           <a:xfrm>
-            <a:off x="634901" y="6205538"/>
+            <a:off x="634901" y="5685086"/>
             <a:ext cx="8102798" cy="693241"/>
           </a:xfrm>
           <a:prstGeom prst="rect">
@@ -5186,13 +5880,13 @@
       </p:sp>
       <p:sp>
         <p:nvSpPr>
-          <p:cNvPr id="9" name="Text 7"/>
+          <p:cNvPr id="11" name="Text 9"/>
           <p:cNvSpPr/>
           <p:nvPr/>
         </p:nvSpPr>
         <p:spPr>
           <a:xfrm>
-            <a:off x="634901" y="7000280"/>
+            <a:off x="634901" y="6479828"/>
             <a:ext cx="8102798" cy="898922"/>
           </a:xfrm>
           <a:prstGeom prst="rect">
@@ -5332,13 +6026,13 @@
       </p:sp>
       <p:sp>
         <p:nvSpPr>
-          <p:cNvPr id="10" name="Text 8"/>
+          <p:cNvPr id="12" name="Text 10"/>
           <p:cNvSpPr/>
           <p:nvPr/>
         </p:nvSpPr>
         <p:spPr>
           <a:xfrm>
-            <a:off x="406301" y="7988052"/>
+            <a:off x="406301" y="7467600"/>
             <a:ext cx="8498026" cy="639812"/>
           </a:xfrm>
           <a:prstGeom prst="rect">
@@ -5426,13 +6120,13 @@
       </p:sp>
       <p:sp>
         <p:nvSpPr>
-          <p:cNvPr id="11" name="Text 9"/>
+          <p:cNvPr id="13" name="Text 11"/>
           <p:cNvSpPr/>
           <p:nvPr/>
         </p:nvSpPr>
         <p:spPr>
           <a:xfrm>
-            <a:off x="406301" y="8780264"/>
+            <a:off x="406301" y="8259812"/>
             <a:ext cx="8498026" cy="213271"/>
           </a:xfrm>
           <a:prstGeom prst="rect">

--- a/exports/pptx/lessons/middle-module-13-indic-ecology/day-04-sacred-groves.pptx
+++ b/exports/pptx/lessons/middle-module-13-indic-ecology/day-04-sacred-groves.pptx
@@ -17,9 +17,19 @@
     <p:sldId id="265" r:id="rId11"/>
     <p:sldId id="266" r:id="rId12"/>
     <p:sldId id="267" r:id="rId13"/>
+    <p:sldId id="268" r:id="rId14"/>
+    <p:sldId id="269" r:id="rId15"/>
+    <p:sldId id="270" r:id="rId16"/>
+    <p:sldId id="271" r:id="rId17"/>
+    <p:sldId id="272" r:id="rId18"/>
+    <p:sldId id="273" r:id="rId19"/>
+    <p:sldId id="274" r:id="rId20"/>
+    <p:sldId id="275" r:id="rId21"/>
+    <p:sldId id="276" r:id="rId22"/>
+    <p:sldId id="277" r:id="rId23"/>
   </p:sldIdLst>
   <p:notesMasterIdLst>
-    <p:notesMasterId r:id="rId14"/>
+    <p:notesMasterId r:id="rId24"/>
   </p:notesMasterIdLst>
   <p:sldSz cx="9144000" cy="5143500"/>
   <p:notesSz cx="5143500" cy="9144000"/>
@@ -819,6 +829,622 @@
 </p:notes>
 </file>
 
+<file path=ppt/notesSlides/notesSlide13.xml><?xml version="1.0" encoding="utf-8"?>
+<p:notes xmlns:a="http://schemas.openxmlformats.org/drawingml/2006/main" xmlns:r="http://schemas.openxmlformats.org/officeDocument/2006/relationships" xmlns:p="http://schemas.openxmlformats.org/presentationml/2006/main">
+  <p:cSld>
+    <p:spTree>
+      <p:nvGrpSpPr>
+        <p:cNvPr id="1" name=""/>
+        <p:cNvGrpSpPr/>
+        <p:nvPr/>
+      </p:nvGrpSpPr>
+      <p:grpSpPr>
+        <a:xfrm>
+          <a:off x="0" y="0"/>
+          <a:ext cx="0" cy="0"/>
+          <a:chOff x="0" y="0"/>
+          <a:chExt cx="0" cy="0"/>
+        </a:xfrm>
+      </p:grpSpPr>
+      <p:sp>
+        <p:nvSpPr>
+          <p:cNvPr id="2" name="Slide Image Placeholder 1"/>
+          <p:cNvSpPr>
+            <a:spLocks noGrp="1" noRot="1" noChangeAspect="1"/>
+          </p:cNvSpPr>
+          <p:nvPr>
+            <p:ph type="sldImg"/>
+          </p:nvPr>
+        </p:nvSpPr>
+        <p:spPr/>
+      </p:sp>
+      <p:sp>
+        <p:nvSpPr>
+          <p:cNvPr id="3" name="Notes Placeholder 2"/>
+          <p:cNvSpPr>
+            <a:spLocks noGrp="1"/>
+          </p:cNvSpPr>
+          <p:nvPr>
+            <p:ph type="body" idx="1"/>
+          </p:nvPr>
+        </p:nvSpPr>
+        <p:spPr/>
+        <p:txBody>
+          <a:bodyPr/>
+          <a:lstStyle/>
+          <a:p>
+            <a:r>
+              <a:rPr lang="en-US" dirty="0"/>
+              <a:t/>
+            </a:r>
+            <a:endParaRPr lang="en-US" dirty="0"/>
+          </a:p>
+        </p:txBody>
+      </p:sp>
+      <p:sp>
+        <p:nvSpPr>
+          <p:cNvPr id="4" name="Slide Number Placeholder 3"/>
+          <p:cNvSpPr>
+            <a:spLocks noGrp="1"/>
+          </p:cNvSpPr>
+          <p:nvPr>
+            <p:ph type="sldNum" sz="quarter" idx="10"/>
+          </p:nvPr>
+        </p:nvSpPr>
+        <p:spPr/>
+        <p:txBody>
+          <a:bodyPr/>
+          <a:lstStyle/>
+          <a:p>
+            <a:fld id="{F7021451-1387-4CA6-816F-3879F97B5CBC}" type="slidenum">
+              <a:rPr lang="en-US"/>
+              <a:t>13</a:t>
+            </a:fld>
+            <a:endParaRPr lang="en-US"/>
+          </a:p>
+        </p:txBody>
+      </p:sp>
+    </p:spTree>
+    <p:extLst>
+      <p:ext uri="{BB962C8B-B14F-4D97-AF65-F5344CB8AC3E}">
+        <p14:creationId xmlns:p14="http://schemas.microsoft.com/office/powerpoint/2010/main" val="1024086991"/>
+      </p:ext>
+    </p:extLst>
+  </p:cSld>
+  <p:clrMapOvr>
+    <a:masterClrMapping/>
+  </p:clrMapOvr>
+</p:notes>
+</file>
+
+<file path=ppt/notesSlides/notesSlide14.xml><?xml version="1.0" encoding="utf-8"?>
+<p:notes xmlns:a="http://schemas.openxmlformats.org/drawingml/2006/main" xmlns:r="http://schemas.openxmlformats.org/officeDocument/2006/relationships" xmlns:p="http://schemas.openxmlformats.org/presentationml/2006/main">
+  <p:cSld>
+    <p:spTree>
+      <p:nvGrpSpPr>
+        <p:cNvPr id="1" name=""/>
+        <p:cNvGrpSpPr/>
+        <p:nvPr/>
+      </p:nvGrpSpPr>
+      <p:grpSpPr>
+        <a:xfrm>
+          <a:off x="0" y="0"/>
+          <a:ext cx="0" cy="0"/>
+          <a:chOff x="0" y="0"/>
+          <a:chExt cx="0" cy="0"/>
+        </a:xfrm>
+      </p:grpSpPr>
+      <p:sp>
+        <p:nvSpPr>
+          <p:cNvPr id="2" name="Slide Image Placeholder 1"/>
+          <p:cNvSpPr>
+            <a:spLocks noGrp="1" noRot="1" noChangeAspect="1"/>
+          </p:cNvSpPr>
+          <p:nvPr>
+            <p:ph type="sldImg"/>
+          </p:nvPr>
+        </p:nvSpPr>
+        <p:spPr/>
+      </p:sp>
+      <p:sp>
+        <p:nvSpPr>
+          <p:cNvPr id="3" name="Notes Placeholder 2"/>
+          <p:cNvSpPr>
+            <a:spLocks noGrp="1"/>
+          </p:cNvSpPr>
+          <p:nvPr>
+            <p:ph type="body" idx="1"/>
+          </p:nvPr>
+        </p:nvSpPr>
+        <p:spPr/>
+        <p:txBody>
+          <a:bodyPr/>
+          <a:lstStyle/>
+          <a:p>
+            <a:r>
+              <a:rPr lang="en-US" dirty="0"/>
+              <a:t/>
+            </a:r>
+            <a:endParaRPr lang="en-US" dirty="0"/>
+          </a:p>
+        </p:txBody>
+      </p:sp>
+      <p:sp>
+        <p:nvSpPr>
+          <p:cNvPr id="4" name="Slide Number Placeholder 3"/>
+          <p:cNvSpPr>
+            <a:spLocks noGrp="1"/>
+          </p:cNvSpPr>
+          <p:nvPr>
+            <p:ph type="sldNum" sz="quarter" idx="10"/>
+          </p:nvPr>
+        </p:nvSpPr>
+        <p:spPr/>
+        <p:txBody>
+          <a:bodyPr/>
+          <a:lstStyle/>
+          <a:p>
+            <a:fld id="{F7021451-1387-4CA6-816F-3879F97B5CBC}" type="slidenum">
+              <a:rPr lang="en-US"/>
+              <a:t>14</a:t>
+            </a:fld>
+            <a:endParaRPr lang="en-US"/>
+          </a:p>
+        </p:txBody>
+      </p:sp>
+    </p:spTree>
+    <p:extLst>
+      <p:ext uri="{BB962C8B-B14F-4D97-AF65-F5344CB8AC3E}">
+        <p14:creationId xmlns:p14="http://schemas.microsoft.com/office/powerpoint/2010/main" val="1024086991"/>
+      </p:ext>
+    </p:extLst>
+  </p:cSld>
+  <p:clrMapOvr>
+    <a:masterClrMapping/>
+  </p:clrMapOvr>
+</p:notes>
+</file>
+
+<file path=ppt/notesSlides/notesSlide15.xml><?xml version="1.0" encoding="utf-8"?>
+<p:notes xmlns:a="http://schemas.openxmlformats.org/drawingml/2006/main" xmlns:r="http://schemas.openxmlformats.org/officeDocument/2006/relationships" xmlns:p="http://schemas.openxmlformats.org/presentationml/2006/main">
+  <p:cSld>
+    <p:spTree>
+      <p:nvGrpSpPr>
+        <p:cNvPr id="1" name=""/>
+        <p:cNvGrpSpPr/>
+        <p:nvPr/>
+      </p:nvGrpSpPr>
+      <p:grpSpPr>
+        <a:xfrm>
+          <a:off x="0" y="0"/>
+          <a:ext cx="0" cy="0"/>
+          <a:chOff x="0" y="0"/>
+          <a:chExt cx="0" cy="0"/>
+        </a:xfrm>
+      </p:grpSpPr>
+      <p:sp>
+        <p:nvSpPr>
+          <p:cNvPr id="2" name="Slide Image Placeholder 1"/>
+          <p:cNvSpPr>
+            <a:spLocks noGrp="1" noRot="1" noChangeAspect="1"/>
+          </p:cNvSpPr>
+          <p:nvPr>
+            <p:ph type="sldImg"/>
+          </p:nvPr>
+        </p:nvSpPr>
+        <p:spPr/>
+      </p:sp>
+      <p:sp>
+        <p:nvSpPr>
+          <p:cNvPr id="3" name="Notes Placeholder 2"/>
+          <p:cNvSpPr>
+            <a:spLocks noGrp="1"/>
+          </p:cNvSpPr>
+          <p:nvPr>
+            <p:ph type="body" idx="1"/>
+          </p:nvPr>
+        </p:nvSpPr>
+        <p:spPr/>
+        <p:txBody>
+          <a:bodyPr/>
+          <a:lstStyle/>
+          <a:p>
+            <a:r>
+              <a:rPr lang="en-US" dirty="0"/>
+              <a:t/>
+            </a:r>
+            <a:endParaRPr lang="en-US" dirty="0"/>
+          </a:p>
+        </p:txBody>
+      </p:sp>
+      <p:sp>
+        <p:nvSpPr>
+          <p:cNvPr id="4" name="Slide Number Placeholder 3"/>
+          <p:cNvSpPr>
+            <a:spLocks noGrp="1"/>
+          </p:cNvSpPr>
+          <p:nvPr>
+            <p:ph type="sldNum" sz="quarter" idx="10"/>
+          </p:nvPr>
+        </p:nvSpPr>
+        <p:spPr/>
+        <p:txBody>
+          <a:bodyPr/>
+          <a:lstStyle/>
+          <a:p>
+            <a:fld id="{F7021451-1387-4CA6-816F-3879F97B5CBC}" type="slidenum">
+              <a:rPr lang="en-US"/>
+              <a:t>15</a:t>
+            </a:fld>
+            <a:endParaRPr lang="en-US"/>
+          </a:p>
+        </p:txBody>
+      </p:sp>
+    </p:spTree>
+    <p:extLst>
+      <p:ext uri="{BB962C8B-B14F-4D97-AF65-F5344CB8AC3E}">
+        <p14:creationId xmlns:p14="http://schemas.microsoft.com/office/powerpoint/2010/main" val="1024086991"/>
+      </p:ext>
+    </p:extLst>
+  </p:cSld>
+  <p:clrMapOvr>
+    <a:masterClrMapping/>
+  </p:clrMapOvr>
+</p:notes>
+</file>
+
+<file path=ppt/notesSlides/notesSlide16.xml><?xml version="1.0" encoding="utf-8"?>
+<p:notes xmlns:a="http://schemas.openxmlformats.org/drawingml/2006/main" xmlns:r="http://schemas.openxmlformats.org/officeDocument/2006/relationships" xmlns:p="http://schemas.openxmlformats.org/presentationml/2006/main">
+  <p:cSld>
+    <p:spTree>
+      <p:nvGrpSpPr>
+        <p:cNvPr id="1" name=""/>
+        <p:cNvGrpSpPr/>
+        <p:nvPr/>
+      </p:nvGrpSpPr>
+      <p:grpSpPr>
+        <a:xfrm>
+          <a:off x="0" y="0"/>
+          <a:ext cx="0" cy="0"/>
+          <a:chOff x="0" y="0"/>
+          <a:chExt cx="0" cy="0"/>
+        </a:xfrm>
+      </p:grpSpPr>
+      <p:sp>
+        <p:nvSpPr>
+          <p:cNvPr id="2" name="Slide Image Placeholder 1"/>
+          <p:cNvSpPr>
+            <a:spLocks noGrp="1" noRot="1" noChangeAspect="1"/>
+          </p:cNvSpPr>
+          <p:nvPr>
+            <p:ph type="sldImg"/>
+          </p:nvPr>
+        </p:nvSpPr>
+        <p:spPr/>
+      </p:sp>
+      <p:sp>
+        <p:nvSpPr>
+          <p:cNvPr id="3" name="Notes Placeholder 2"/>
+          <p:cNvSpPr>
+            <a:spLocks noGrp="1"/>
+          </p:cNvSpPr>
+          <p:nvPr>
+            <p:ph type="body" idx="1"/>
+          </p:nvPr>
+        </p:nvSpPr>
+        <p:spPr/>
+        <p:txBody>
+          <a:bodyPr/>
+          <a:lstStyle/>
+          <a:p>
+            <a:r>
+              <a:rPr lang="en-US" dirty="0"/>
+              <a:t/>
+            </a:r>
+            <a:endParaRPr lang="en-US" dirty="0"/>
+          </a:p>
+        </p:txBody>
+      </p:sp>
+      <p:sp>
+        <p:nvSpPr>
+          <p:cNvPr id="4" name="Slide Number Placeholder 3"/>
+          <p:cNvSpPr>
+            <a:spLocks noGrp="1"/>
+          </p:cNvSpPr>
+          <p:nvPr>
+            <p:ph type="sldNum" sz="quarter" idx="10"/>
+          </p:nvPr>
+        </p:nvSpPr>
+        <p:spPr/>
+        <p:txBody>
+          <a:bodyPr/>
+          <a:lstStyle/>
+          <a:p>
+            <a:fld id="{F7021451-1387-4CA6-816F-3879F97B5CBC}" type="slidenum">
+              <a:rPr lang="en-US"/>
+              <a:t>16</a:t>
+            </a:fld>
+            <a:endParaRPr lang="en-US"/>
+          </a:p>
+        </p:txBody>
+      </p:sp>
+    </p:spTree>
+    <p:extLst>
+      <p:ext uri="{BB962C8B-B14F-4D97-AF65-F5344CB8AC3E}">
+        <p14:creationId xmlns:p14="http://schemas.microsoft.com/office/powerpoint/2010/main" val="1024086991"/>
+      </p:ext>
+    </p:extLst>
+  </p:cSld>
+  <p:clrMapOvr>
+    <a:masterClrMapping/>
+  </p:clrMapOvr>
+</p:notes>
+</file>
+
+<file path=ppt/notesSlides/notesSlide17.xml><?xml version="1.0" encoding="utf-8"?>
+<p:notes xmlns:a="http://schemas.openxmlformats.org/drawingml/2006/main" xmlns:r="http://schemas.openxmlformats.org/officeDocument/2006/relationships" xmlns:p="http://schemas.openxmlformats.org/presentationml/2006/main">
+  <p:cSld>
+    <p:spTree>
+      <p:nvGrpSpPr>
+        <p:cNvPr id="1" name=""/>
+        <p:cNvGrpSpPr/>
+        <p:nvPr/>
+      </p:nvGrpSpPr>
+      <p:grpSpPr>
+        <a:xfrm>
+          <a:off x="0" y="0"/>
+          <a:ext cx="0" cy="0"/>
+          <a:chOff x="0" y="0"/>
+          <a:chExt cx="0" cy="0"/>
+        </a:xfrm>
+      </p:grpSpPr>
+      <p:sp>
+        <p:nvSpPr>
+          <p:cNvPr id="2" name="Slide Image Placeholder 1"/>
+          <p:cNvSpPr>
+            <a:spLocks noGrp="1" noRot="1" noChangeAspect="1"/>
+          </p:cNvSpPr>
+          <p:nvPr>
+            <p:ph type="sldImg"/>
+          </p:nvPr>
+        </p:nvSpPr>
+        <p:spPr/>
+      </p:sp>
+      <p:sp>
+        <p:nvSpPr>
+          <p:cNvPr id="3" name="Notes Placeholder 2"/>
+          <p:cNvSpPr>
+            <a:spLocks noGrp="1"/>
+          </p:cNvSpPr>
+          <p:nvPr>
+            <p:ph type="body" idx="1"/>
+          </p:nvPr>
+        </p:nvSpPr>
+        <p:spPr/>
+        <p:txBody>
+          <a:bodyPr/>
+          <a:lstStyle/>
+          <a:p>
+            <a:r>
+              <a:rPr lang="en-US" dirty="0"/>
+              <a:t/>
+            </a:r>
+            <a:endParaRPr lang="en-US" dirty="0"/>
+          </a:p>
+        </p:txBody>
+      </p:sp>
+      <p:sp>
+        <p:nvSpPr>
+          <p:cNvPr id="4" name="Slide Number Placeholder 3"/>
+          <p:cNvSpPr>
+            <a:spLocks noGrp="1"/>
+          </p:cNvSpPr>
+          <p:nvPr>
+            <p:ph type="sldNum" sz="quarter" idx="10"/>
+          </p:nvPr>
+        </p:nvSpPr>
+        <p:spPr/>
+        <p:txBody>
+          <a:bodyPr/>
+          <a:lstStyle/>
+          <a:p>
+            <a:fld id="{F7021451-1387-4CA6-816F-3879F97B5CBC}" type="slidenum">
+              <a:rPr lang="en-US"/>
+              <a:t>17</a:t>
+            </a:fld>
+            <a:endParaRPr lang="en-US"/>
+          </a:p>
+        </p:txBody>
+      </p:sp>
+    </p:spTree>
+    <p:extLst>
+      <p:ext uri="{BB962C8B-B14F-4D97-AF65-F5344CB8AC3E}">
+        <p14:creationId xmlns:p14="http://schemas.microsoft.com/office/powerpoint/2010/main" val="1024086991"/>
+      </p:ext>
+    </p:extLst>
+  </p:cSld>
+  <p:clrMapOvr>
+    <a:masterClrMapping/>
+  </p:clrMapOvr>
+</p:notes>
+</file>
+
+<file path=ppt/notesSlides/notesSlide18.xml><?xml version="1.0" encoding="utf-8"?>
+<p:notes xmlns:a="http://schemas.openxmlformats.org/drawingml/2006/main" xmlns:r="http://schemas.openxmlformats.org/officeDocument/2006/relationships" xmlns:p="http://schemas.openxmlformats.org/presentationml/2006/main">
+  <p:cSld>
+    <p:spTree>
+      <p:nvGrpSpPr>
+        <p:cNvPr id="1" name=""/>
+        <p:cNvGrpSpPr/>
+        <p:nvPr/>
+      </p:nvGrpSpPr>
+      <p:grpSpPr>
+        <a:xfrm>
+          <a:off x="0" y="0"/>
+          <a:ext cx="0" cy="0"/>
+          <a:chOff x="0" y="0"/>
+          <a:chExt cx="0" cy="0"/>
+        </a:xfrm>
+      </p:grpSpPr>
+      <p:sp>
+        <p:nvSpPr>
+          <p:cNvPr id="2" name="Slide Image Placeholder 1"/>
+          <p:cNvSpPr>
+            <a:spLocks noGrp="1" noRot="1" noChangeAspect="1"/>
+          </p:cNvSpPr>
+          <p:nvPr>
+            <p:ph type="sldImg"/>
+          </p:nvPr>
+        </p:nvSpPr>
+        <p:spPr/>
+      </p:sp>
+      <p:sp>
+        <p:nvSpPr>
+          <p:cNvPr id="3" name="Notes Placeholder 2"/>
+          <p:cNvSpPr>
+            <a:spLocks noGrp="1"/>
+          </p:cNvSpPr>
+          <p:nvPr>
+            <p:ph type="body" idx="1"/>
+          </p:nvPr>
+        </p:nvSpPr>
+        <p:spPr/>
+        <p:txBody>
+          <a:bodyPr/>
+          <a:lstStyle/>
+          <a:p>
+            <a:r>
+              <a:rPr lang="en-US" dirty="0"/>
+              <a:t/>
+            </a:r>
+            <a:endParaRPr lang="en-US" dirty="0"/>
+          </a:p>
+        </p:txBody>
+      </p:sp>
+      <p:sp>
+        <p:nvSpPr>
+          <p:cNvPr id="4" name="Slide Number Placeholder 3"/>
+          <p:cNvSpPr>
+            <a:spLocks noGrp="1"/>
+          </p:cNvSpPr>
+          <p:nvPr>
+            <p:ph type="sldNum" sz="quarter" idx="10"/>
+          </p:nvPr>
+        </p:nvSpPr>
+        <p:spPr/>
+        <p:txBody>
+          <a:bodyPr/>
+          <a:lstStyle/>
+          <a:p>
+            <a:fld id="{F7021451-1387-4CA6-816F-3879F97B5CBC}" type="slidenum">
+              <a:rPr lang="en-US"/>
+              <a:t>18</a:t>
+            </a:fld>
+            <a:endParaRPr lang="en-US"/>
+          </a:p>
+        </p:txBody>
+      </p:sp>
+    </p:spTree>
+    <p:extLst>
+      <p:ext uri="{BB962C8B-B14F-4D97-AF65-F5344CB8AC3E}">
+        <p14:creationId xmlns:p14="http://schemas.microsoft.com/office/powerpoint/2010/main" val="1024086991"/>
+      </p:ext>
+    </p:extLst>
+  </p:cSld>
+  <p:clrMapOvr>
+    <a:masterClrMapping/>
+  </p:clrMapOvr>
+</p:notes>
+</file>
+
+<file path=ppt/notesSlides/notesSlide19.xml><?xml version="1.0" encoding="utf-8"?>
+<p:notes xmlns:a="http://schemas.openxmlformats.org/drawingml/2006/main" xmlns:r="http://schemas.openxmlformats.org/officeDocument/2006/relationships" xmlns:p="http://schemas.openxmlformats.org/presentationml/2006/main">
+  <p:cSld>
+    <p:spTree>
+      <p:nvGrpSpPr>
+        <p:cNvPr id="1" name=""/>
+        <p:cNvGrpSpPr/>
+        <p:nvPr/>
+      </p:nvGrpSpPr>
+      <p:grpSpPr>
+        <a:xfrm>
+          <a:off x="0" y="0"/>
+          <a:ext cx="0" cy="0"/>
+          <a:chOff x="0" y="0"/>
+          <a:chExt cx="0" cy="0"/>
+        </a:xfrm>
+      </p:grpSpPr>
+      <p:sp>
+        <p:nvSpPr>
+          <p:cNvPr id="2" name="Slide Image Placeholder 1"/>
+          <p:cNvSpPr>
+            <a:spLocks noGrp="1" noRot="1" noChangeAspect="1"/>
+          </p:cNvSpPr>
+          <p:nvPr>
+            <p:ph type="sldImg"/>
+          </p:nvPr>
+        </p:nvSpPr>
+        <p:spPr/>
+      </p:sp>
+      <p:sp>
+        <p:nvSpPr>
+          <p:cNvPr id="3" name="Notes Placeholder 2"/>
+          <p:cNvSpPr>
+            <a:spLocks noGrp="1"/>
+          </p:cNvSpPr>
+          <p:nvPr>
+            <p:ph type="body" idx="1"/>
+          </p:nvPr>
+        </p:nvSpPr>
+        <p:spPr/>
+        <p:txBody>
+          <a:bodyPr/>
+          <a:lstStyle/>
+          <a:p>
+            <a:r>
+              <a:rPr lang="en-US" dirty="0"/>
+              <a:t/>
+            </a:r>
+            <a:endParaRPr lang="en-US" dirty="0"/>
+          </a:p>
+        </p:txBody>
+      </p:sp>
+      <p:sp>
+        <p:nvSpPr>
+          <p:cNvPr id="4" name="Slide Number Placeholder 3"/>
+          <p:cNvSpPr>
+            <a:spLocks noGrp="1"/>
+          </p:cNvSpPr>
+          <p:nvPr>
+            <p:ph type="sldNum" sz="quarter" idx="10"/>
+          </p:nvPr>
+        </p:nvSpPr>
+        <p:spPr/>
+        <p:txBody>
+          <a:bodyPr/>
+          <a:lstStyle/>
+          <a:p>
+            <a:fld id="{F7021451-1387-4CA6-816F-3879F97B5CBC}" type="slidenum">
+              <a:rPr lang="en-US"/>
+              <a:t>19</a:t>
+            </a:fld>
+            <a:endParaRPr lang="en-US"/>
+          </a:p>
+        </p:txBody>
+      </p:sp>
+    </p:spTree>
+    <p:extLst>
+      <p:ext uri="{BB962C8B-B14F-4D97-AF65-F5344CB8AC3E}">
+        <p14:creationId xmlns:p14="http://schemas.microsoft.com/office/powerpoint/2010/main" val="1024086991"/>
+      </p:ext>
+    </p:extLst>
+  </p:cSld>
+  <p:clrMapOvr>
+    <a:masterClrMapping/>
+  </p:clrMapOvr>
+</p:notes>
+</file>
+
 <file path=ppt/notesSlides/notesSlide2.xml><?xml version="1.0" encoding="utf-8"?>
 <p:notes xmlns:a="http://schemas.openxmlformats.org/drawingml/2006/main" xmlns:r="http://schemas.openxmlformats.org/officeDocument/2006/relationships" xmlns:p="http://schemas.openxmlformats.org/presentationml/2006/main">
   <p:cSld>
@@ -889,6 +1515,270 @@
             <a:fld id="{F7021451-1387-4CA6-816F-3879F97B5CBC}" type="slidenum">
               <a:rPr lang="en-US"/>
               <a:t>2</a:t>
+            </a:fld>
+            <a:endParaRPr lang="en-US"/>
+          </a:p>
+        </p:txBody>
+      </p:sp>
+    </p:spTree>
+    <p:extLst>
+      <p:ext uri="{BB962C8B-B14F-4D97-AF65-F5344CB8AC3E}">
+        <p14:creationId xmlns:p14="http://schemas.microsoft.com/office/powerpoint/2010/main" val="1024086991"/>
+      </p:ext>
+    </p:extLst>
+  </p:cSld>
+  <p:clrMapOvr>
+    <a:masterClrMapping/>
+  </p:clrMapOvr>
+</p:notes>
+</file>
+
+<file path=ppt/notesSlides/notesSlide20.xml><?xml version="1.0" encoding="utf-8"?>
+<p:notes xmlns:a="http://schemas.openxmlformats.org/drawingml/2006/main" xmlns:r="http://schemas.openxmlformats.org/officeDocument/2006/relationships" xmlns:p="http://schemas.openxmlformats.org/presentationml/2006/main">
+  <p:cSld>
+    <p:spTree>
+      <p:nvGrpSpPr>
+        <p:cNvPr id="1" name=""/>
+        <p:cNvGrpSpPr/>
+        <p:nvPr/>
+      </p:nvGrpSpPr>
+      <p:grpSpPr>
+        <a:xfrm>
+          <a:off x="0" y="0"/>
+          <a:ext cx="0" cy="0"/>
+          <a:chOff x="0" y="0"/>
+          <a:chExt cx="0" cy="0"/>
+        </a:xfrm>
+      </p:grpSpPr>
+      <p:sp>
+        <p:nvSpPr>
+          <p:cNvPr id="2" name="Slide Image Placeholder 1"/>
+          <p:cNvSpPr>
+            <a:spLocks noGrp="1" noRot="1" noChangeAspect="1"/>
+          </p:cNvSpPr>
+          <p:nvPr>
+            <p:ph type="sldImg"/>
+          </p:nvPr>
+        </p:nvSpPr>
+        <p:spPr/>
+      </p:sp>
+      <p:sp>
+        <p:nvSpPr>
+          <p:cNvPr id="3" name="Notes Placeholder 2"/>
+          <p:cNvSpPr>
+            <a:spLocks noGrp="1"/>
+          </p:cNvSpPr>
+          <p:nvPr>
+            <p:ph type="body" idx="1"/>
+          </p:nvPr>
+        </p:nvSpPr>
+        <p:spPr/>
+        <p:txBody>
+          <a:bodyPr/>
+          <a:lstStyle/>
+          <a:p>
+            <a:r>
+              <a:rPr lang="en-US" dirty="0"/>
+              <a:t/>
+            </a:r>
+            <a:endParaRPr lang="en-US" dirty="0"/>
+          </a:p>
+        </p:txBody>
+      </p:sp>
+      <p:sp>
+        <p:nvSpPr>
+          <p:cNvPr id="4" name="Slide Number Placeholder 3"/>
+          <p:cNvSpPr>
+            <a:spLocks noGrp="1"/>
+          </p:cNvSpPr>
+          <p:nvPr>
+            <p:ph type="sldNum" sz="quarter" idx="10"/>
+          </p:nvPr>
+        </p:nvSpPr>
+        <p:spPr/>
+        <p:txBody>
+          <a:bodyPr/>
+          <a:lstStyle/>
+          <a:p>
+            <a:fld id="{F7021451-1387-4CA6-816F-3879F97B5CBC}" type="slidenum">
+              <a:rPr lang="en-US"/>
+              <a:t>20</a:t>
+            </a:fld>
+            <a:endParaRPr lang="en-US"/>
+          </a:p>
+        </p:txBody>
+      </p:sp>
+    </p:spTree>
+    <p:extLst>
+      <p:ext uri="{BB962C8B-B14F-4D97-AF65-F5344CB8AC3E}">
+        <p14:creationId xmlns:p14="http://schemas.microsoft.com/office/powerpoint/2010/main" val="1024086991"/>
+      </p:ext>
+    </p:extLst>
+  </p:cSld>
+  <p:clrMapOvr>
+    <a:masterClrMapping/>
+  </p:clrMapOvr>
+</p:notes>
+</file>
+
+<file path=ppt/notesSlides/notesSlide21.xml><?xml version="1.0" encoding="utf-8"?>
+<p:notes xmlns:a="http://schemas.openxmlformats.org/drawingml/2006/main" xmlns:r="http://schemas.openxmlformats.org/officeDocument/2006/relationships" xmlns:p="http://schemas.openxmlformats.org/presentationml/2006/main">
+  <p:cSld>
+    <p:spTree>
+      <p:nvGrpSpPr>
+        <p:cNvPr id="1" name=""/>
+        <p:cNvGrpSpPr/>
+        <p:nvPr/>
+      </p:nvGrpSpPr>
+      <p:grpSpPr>
+        <a:xfrm>
+          <a:off x="0" y="0"/>
+          <a:ext cx="0" cy="0"/>
+          <a:chOff x="0" y="0"/>
+          <a:chExt cx="0" cy="0"/>
+        </a:xfrm>
+      </p:grpSpPr>
+      <p:sp>
+        <p:nvSpPr>
+          <p:cNvPr id="2" name="Slide Image Placeholder 1"/>
+          <p:cNvSpPr>
+            <a:spLocks noGrp="1" noRot="1" noChangeAspect="1"/>
+          </p:cNvSpPr>
+          <p:nvPr>
+            <p:ph type="sldImg"/>
+          </p:nvPr>
+        </p:nvSpPr>
+        <p:spPr/>
+      </p:sp>
+      <p:sp>
+        <p:nvSpPr>
+          <p:cNvPr id="3" name="Notes Placeholder 2"/>
+          <p:cNvSpPr>
+            <a:spLocks noGrp="1"/>
+          </p:cNvSpPr>
+          <p:nvPr>
+            <p:ph type="body" idx="1"/>
+          </p:nvPr>
+        </p:nvSpPr>
+        <p:spPr/>
+        <p:txBody>
+          <a:bodyPr/>
+          <a:lstStyle/>
+          <a:p>
+            <a:r>
+              <a:rPr lang="en-US" dirty="0"/>
+              <a:t/>
+            </a:r>
+            <a:endParaRPr lang="en-US" dirty="0"/>
+          </a:p>
+        </p:txBody>
+      </p:sp>
+      <p:sp>
+        <p:nvSpPr>
+          <p:cNvPr id="4" name="Slide Number Placeholder 3"/>
+          <p:cNvSpPr>
+            <a:spLocks noGrp="1"/>
+          </p:cNvSpPr>
+          <p:nvPr>
+            <p:ph type="sldNum" sz="quarter" idx="10"/>
+          </p:nvPr>
+        </p:nvSpPr>
+        <p:spPr/>
+        <p:txBody>
+          <a:bodyPr/>
+          <a:lstStyle/>
+          <a:p>
+            <a:fld id="{F7021451-1387-4CA6-816F-3879F97B5CBC}" type="slidenum">
+              <a:rPr lang="en-US"/>
+              <a:t>21</a:t>
+            </a:fld>
+            <a:endParaRPr lang="en-US"/>
+          </a:p>
+        </p:txBody>
+      </p:sp>
+    </p:spTree>
+    <p:extLst>
+      <p:ext uri="{BB962C8B-B14F-4D97-AF65-F5344CB8AC3E}">
+        <p14:creationId xmlns:p14="http://schemas.microsoft.com/office/powerpoint/2010/main" val="1024086991"/>
+      </p:ext>
+    </p:extLst>
+  </p:cSld>
+  <p:clrMapOvr>
+    <a:masterClrMapping/>
+  </p:clrMapOvr>
+</p:notes>
+</file>
+
+<file path=ppt/notesSlides/notesSlide22.xml><?xml version="1.0" encoding="utf-8"?>
+<p:notes xmlns:a="http://schemas.openxmlformats.org/drawingml/2006/main" xmlns:r="http://schemas.openxmlformats.org/officeDocument/2006/relationships" xmlns:p="http://schemas.openxmlformats.org/presentationml/2006/main">
+  <p:cSld>
+    <p:spTree>
+      <p:nvGrpSpPr>
+        <p:cNvPr id="1" name=""/>
+        <p:cNvGrpSpPr/>
+        <p:nvPr/>
+      </p:nvGrpSpPr>
+      <p:grpSpPr>
+        <a:xfrm>
+          <a:off x="0" y="0"/>
+          <a:ext cx="0" cy="0"/>
+          <a:chOff x="0" y="0"/>
+          <a:chExt cx="0" cy="0"/>
+        </a:xfrm>
+      </p:grpSpPr>
+      <p:sp>
+        <p:nvSpPr>
+          <p:cNvPr id="2" name="Slide Image Placeholder 1"/>
+          <p:cNvSpPr>
+            <a:spLocks noGrp="1" noRot="1" noChangeAspect="1"/>
+          </p:cNvSpPr>
+          <p:nvPr>
+            <p:ph type="sldImg"/>
+          </p:nvPr>
+        </p:nvSpPr>
+        <p:spPr/>
+      </p:sp>
+      <p:sp>
+        <p:nvSpPr>
+          <p:cNvPr id="3" name="Notes Placeholder 2"/>
+          <p:cNvSpPr>
+            <a:spLocks noGrp="1"/>
+          </p:cNvSpPr>
+          <p:nvPr>
+            <p:ph type="body" idx="1"/>
+          </p:nvPr>
+        </p:nvSpPr>
+        <p:spPr/>
+        <p:txBody>
+          <a:bodyPr/>
+          <a:lstStyle/>
+          <a:p>
+            <a:r>
+              <a:rPr lang="en-US" dirty="0"/>
+              <a:t/>
+            </a:r>
+            <a:endParaRPr lang="en-US" dirty="0"/>
+          </a:p>
+        </p:txBody>
+      </p:sp>
+      <p:sp>
+        <p:nvSpPr>
+          <p:cNvPr id="4" name="Slide Number Placeholder 3"/>
+          <p:cNvSpPr>
+            <a:spLocks noGrp="1"/>
+          </p:cNvSpPr>
+          <p:nvPr>
+            <p:ph type="sldNum" sz="quarter" idx="10"/>
+          </p:nvPr>
+        </p:nvSpPr>
+        <p:spPr/>
+        <p:txBody>
+          <a:bodyPr/>
+          <a:lstStyle/>
+          <a:p>
+            <a:fld id="{F7021451-1387-4CA6-816F-3879F97B5CBC}" type="slidenum">
+              <a:rPr lang="en-US"/>
+              <a:t>22</a:t>
             </a:fld>
             <a:endParaRPr lang="en-US"/>
           </a:p>
@@ -2100,194 +2990,6 @@
         </p:nvSpPr>
         <p:spPr>
           <a:xfrm>
-            <a:off x="406301" y="1574453"/>
-            <a:ext cx="8498026" cy="274290"/>
-          </a:xfrm>
-          <a:prstGeom prst="rect">
-            <a:avLst/>
-          </a:prstGeom>
-          <a:noFill/>
-          <a:ln/>
-        </p:spPr>
-        <p:txBody>
-          <a:bodyPr wrap="square" lIns="0" tIns="0" rIns="0" bIns="0" rtlCol="0" anchor="t"/>
-          <a:lstStyle/>
-          <a:p>
-            <a:pPr algn="l" indent="0" marL="0">
-              <a:lnSpc>
-                <a:spcPts val="2160"/>
-              </a:lnSpc>
-              <a:spcBef>
-                <a:spcPts val="600"/>
-              </a:spcBef>
-              <a:spcAft>
-                <a:spcPts val="800"/>
-              </a:spcAft>
-              <a:buNone/>
-            </a:pPr>
-            <a:r>
-              <a:rPr lang="en-US" sz="1800" b="1" dirty="0">
-                <a:solidFill>
-                  <a:srgbClr val="FE4447"/>
-                </a:solidFill>
-                <a:latin typeface="Georgia" pitchFamily="34" charset="0"/>
-                <a:ea typeface="Georgia" pitchFamily="34" charset="-122"/>
-                <a:cs typeface="Georgia" pitchFamily="34" charset="-120"/>
-              </a:rPr>
-              <a:t>Learning objective</a:t>
-            </a:r>
-            <a:endParaRPr lang="en-US" sz="1800" dirty="0"/>
-          </a:p>
-        </p:txBody>
-      </p:sp>
-      <p:sp>
-        <p:nvSpPr>
-          <p:cNvPr id="6" name="Text 4"/>
-          <p:cNvSpPr/>
-          <p:nvPr/>
-        </p:nvSpPr>
-        <p:spPr>
-          <a:xfrm>
-            <a:off x="406301" y="1988344"/>
-            <a:ext cx="8498026" cy="426541"/>
-          </a:xfrm>
-          <a:prstGeom prst="rect">
-            <a:avLst/>
-          </a:prstGeom>
-          <a:noFill/>
-          <a:ln/>
-        </p:spPr>
-        <p:txBody>
-          <a:bodyPr wrap="square" lIns="0" tIns="0" rIns="0" bIns="0" rtlCol="0" anchor="t"/>
-          <a:lstStyle/>
-          <a:p>
-            <a:pPr algn="l" indent="0" marL="0">
-              <a:lnSpc>
-                <a:spcPts val="1680"/>
-              </a:lnSpc>
-              <a:spcBef>
-                <a:spcPts val="300"/>
-              </a:spcBef>
-              <a:spcAft>
-                <a:spcPts val="300"/>
-              </a:spcAft>
-              <a:buNone/>
-            </a:pPr>
-            <a:r>
-              <a:rPr lang="en-US" sz="1200" dirty="0">
-                <a:solidFill>
-                  <a:srgbClr val="1C2833"/>
-                </a:solidFill>
-                <a:latin typeface="Arial" pitchFamily="34" charset="0"/>
-                <a:ea typeface="Arial" pitchFamily="34" charset="-122"/>
-                <a:cs typeface="Arial" pitchFamily="34" charset="-120"/>
-              </a:rPr>
-              <a:t>Students explain what a sacred grove is (community-protected forest fragment) using two regional terms — </a:t>
-            </a:r>
-            <a:pPr algn="l" indent="0" marL="0">
-              <a:lnSpc>
-                <a:spcPts val="1680"/>
-              </a:lnSpc>
-              <a:spcBef>
-                <a:spcPts val="300"/>
-              </a:spcBef>
-              <a:spcAft>
-                <a:spcPts val="300"/>
-              </a:spcAft>
-              <a:buNone/>
-            </a:pPr>
-            <a:r>
-              <a:rPr lang="en-US" sz="1200" i="1" dirty="0">
-                <a:solidFill>
-                  <a:srgbClr val="1C2833"/>
-                </a:solidFill>
-                <a:latin typeface="Arial" pitchFamily="34" charset="0"/>
-                <a:ea typeface="Arial" pitchFamily="34" charset="-122"/>
-                <a:cs typeface="Arial" pitchFamily="34" charset="-120"/>
-              </a:rPr>
-              <a:t>devarakāḍu</a:t>
-            </a:r>
-            <a:pPr algn="l" indent="0" marL="0">
-              <a:lnSpc>
-                <a:spcPts val="1680"/>
-              </a:lnSpc>
-              <a:spcBef>
-                <a:spcPts val="300"/>
-              </a:spcBef>
-              <a:spcAft>
-                <a:spcPts val="300"/>
-              </a:spcAft>
-              <a:buNone/>
-            </a:pPr>
-            <a:r>
-              <a:rPr lang="en-US" sz="1200" dirty="0">
-                <a:solidFill>
-                  <a:srgbClr val="1C2833"/>
-                </a:solidFill>
-                <a:latin typeface="Arial" pitchFamily="34" charset="0"/>
-                <a:ea typeface="Arial" pitchFamily="34" charset="-122"/>
-                <a:cs typeface="Arial" pitchFamily="34" charset="-120"/>
-              </a:rPr>
-              <a:t> (Karnataka) and </a:t>
-            </a:r>
-            <a:pPr algn="l" indent="0" marL="0">
-              <a:lnSpc>
-                <a:spcPts val="1680"/>
-              </a:lnSpc>
-              <a:spcBef>
-                <a:spcPts val="300"/>
-              </a:spcBef>
-              <a:spcAft>
-                <a:spcPts val="300"/>
-              </a:spcAft>
-              <a:buNone/>
-            </a:pPr>
-            <a:r>
-              <a:rPr lang="en-US" sz="1200" i="1" dirty="0">
-                <a:solidFill>
-                  <a:srgbClr val="1C2833"/>
-                </a:solidFill>
-                <a:latin typeface="Arial" pitchFamily="34" charset="0"/>
-                <a:ea typeface="Arial" pitchFamily="34" charset="-122"/>
-                <a:cs typeface="Arial" pitchFamily="34" charset="-120"/>
-              </a:rPr>
-              <a:t>sarna</a:t>
-            </a:r>
-            <a:pPr algn="l" indent="0" marL="0">
-              <a:lnSpc>
-                <a:spcPts val="1680"/>
-              </a:lnSpc>
-              <a:spcBef>
-                <a:spcPts val="300"/>
-              </a:spcBef>
-              <a:spcAft>
-                <a:spcPts val="300"/>
-              </a:spcAft>
-              <a:buNone/>
-            </a:pPr>
-            <a:r>
-              <a:rPr lang="en-US" sz="1200" dirty="0">
-                <a:solidFill>
-                  <a:srgbClr val="1C2833"/>
-                </a:solidFill>
-                <a:latin typeface="Arial" pitchFamily="34" charset="0"/>
-                <a:ea typeface="Arial" pitchFamily="34" charset="-122"/>
-                <a:cs typeface="Arial" pitchFamily="34" charset="-120"/>
-              </a:rPr>
-              <a:t> (tribal Eastern India) — and identify the ecological function of these groves as biodiversity reserves.</a:t>
-            </a:r>
-            <a:endParaRPr lang="en-US" sz="1200" dirty="0"/>
-          </a:p>
-        </p:txBody>
-      </p:sp>
-      <p:sp>
-        <p:nvSpPr>
-          <p:cNvPr id="7" name="Text 5"/>
-          <p:cNvSpPr/>
-          <p:nvPr/>
-        </p:nvSpPr>
-        <p:spPr>
-          <a:xfrm>
             <a:off x="406301" y="4434929"/>
             <a:ext cx="8498026" cy="213271"/>
           </a:xfrm>
@@ -2432,7 +3134,7 @@
                 <a:ea typeface="Georgia" pitchFamily="34" charset="-122"/>
                 <a:cs typeface="Georgia" pitchFamily="34" charset="-120"/>
               </a:rPr>
-              <a:t>Differentiation</a:t>
+              <a:t>Core (20 min) (cont.)</a:t>
             </a:r>
             <a:endParaRPr lang="en-US" sz="1800" dirty="0"/>
           </a:p>
@@ -2447,7 +3149,7 @@
         <p:spPr>
           <a:xfrm>
             <a:off x="634901" y="883593"/>
-            <a:ext cx="8102798" cy="937022"/>
+            <a:ext cx="8102798" cy="693241"/>
           </a:xfrm>
           <a:prstGeom prst="rect">
             <a:avLst/>
@@ -2478,7 +3180,7 @@
                 <a:ea typeface="Arial" pitchFamily="34" charset="-122"/>
                 <a:cs typeface="Arial" pitchFamily="34" charset="-120"/>
               </a:rPr>
-              <a:t>One tier up:</a:t>
+              <a:t>The mechanism, plainly stated.</a:t>
             </a:r>
             <a:pPr algn="l" indent="0" marL="0">
               <a:lnSpc>
@@ -2498,31 +3200,27 @@
                 <a:ea typeface="Arial" pitchFamily="34" charset="-122"/>
                 <a:cs typeface="Arial" pitchFamily="34" charset="-120"/>
               </a:rPr>
-              <a:t> Find one news story from the last 5 years about a sacred grove being threatened (a road, a mine, a township). Summarise in a paragraph. We'll add it to Day 7's discussion.</a:t>
-            </a:r>
-            <a:endParaRPr lang="en-US" sz="1200" dirty="0"/>
-          </a:p>
-          <a:p>
-            <a:pPr algn="l" marL="342900" indent="-342900">
-              <a:lnSpc>
-                <a:spcPts val="1620"/>
-              </a:lnSpc>
-              <a:spcAft>
-                <a:spcPts val="300"/>
-              </a:spcAft>
-              <a:buSzPct val="100000"/>
-              <a:buChar char="•"/>
-            </a:pPr>
-            <a:r>
-              <a:rPr lang="en-US" sz="1200" b="1" dirty="0">
-                <a:solidFill>
-                  <a:srgbClr val="1C2833"/>
-                </a:solidFill>
-                <a:latin typeface="Arial" pitchFamily="34" charset="0"/>
-                <a:ea typeface="Arial" pitchFamily="34" charset="-122"/>
-                <a:cs typeface="Arial" pitchFamily="34" charset="-120"/>
-              </a:rPr>
-              <a:t>One tier down:</a:t>
+              <a:t> When a community treats a patch of forest as sacred, the patch survives. When the community stops, the patch goes the way of any unprotected land — into agriculture or development. Sacred groves are a </a:t>
+            </a:r>
+            <a:pPr algn="l" indent="0" marL="0">
+              <a:lnSpc>
+                <a:spcPts val="1620"/>
+              </a:lnSpc>
+              <a:spcAft>
+                <a:spcPts val="300"/>
+              </a:spcAft>
+              <a:buNone/>
+            </a:pPr>
+            <a:r>
+              <a:rPr lang="en-US" sz="1200" i="1" dirty="0">
+                <a:solidFill>
+                  <a:srgbClr val="1C2833"/>
+                </a:solidFill>
+                <a:latin typeface="Arial" pitchFamily="34" charset="0"/>
+                <a:ea typeface="Arial" pitchFamily="34" charset="-122"/>
+                <a:cs typeface="Arial" pitchFamily="34" charset="-120"/>
+              </a:rPr>
+              <a:t>social</a:t>
             </a:r>
             <a:pPr algn="l" indent="0" marL="0">
               <a:lnSpc>
@@ -2542,87 +3240,7 @@
                 <a:ea typeface="Arial" pitchFamily="34" charset="-122"/>
                 <a:cs typeface="Arial" pitchFamily="34" charset="-120"/>
               </a:rPr>
-              <a:t> Just remember two regional names (</a:t>
-            </a:r>
-            <a:pPr algn="l" indent="0" marL="0">
-              <a:lnSpc>
-                <a:spcPts val="1620"/>
-              </a:lnSpc>
-              <a:spcAft>
-                <a:spcPts val="300"/>
-              </a:spcAft>
-              <a:buNone/>
-            </a:pPr>
-            <a:r>
-              <a:rPr lang="en-US" sz="1200" i="1" dirty="0">
-                <a:solidFill>
-                  <a:srgbClr val="1C2833"/>
-                </a:solidFill>
-                <a:latin typeface="Arial" pitchFamily="34" charset="0"/>
-                <a:ea typeface="Arial" pitchFamily="34" charset="-122"/>
-                <a:cs typeface="Arial" pitchFamily="34" charset="-120"/>
-              </a:rPr>
-              <a:t>devarakāḍu</a:t>
-            </a:r>
-            <a:pPr algn="l" indent="0" marL="0">
-              <a:lnSpc>
-                <a:spcPts val="1620"/>
-              </a:lnSpc>
-              <a:spcAft>
-                <a:spcPts val="300"/>
-              </a:spcAft>
-              <a:buNone/>
-            </a:pPr>
-            <a:r>
-              <a:rPr lang="en-US" sz="1200" dirty="0">
-                <a:solidFill>
-                  <a:srgbClr val="1C2833"/>
-                </a:solidFill>
-                <a:latin typeface="Arial" pitchFamily="34" charset="0"/>
-                <a:ea typeface="Arial" pitchFamily="34" charset="-122"/>
-                <a:cs typeface="Arial" pitchFamily="34" charset="-120"/>
-              </a:rPr>
-              <a:t> and </a:t>
-            </a:r>
-            <a:pPr algn="l" indent="0" marL="0">
-              <a:lnSpc>
-                <a:spcPts val="1620"/>
-              </a:lnSpc>
-              <a:spcAft>
-                <a:spcPts val="300"/>
-              </a:spcAft>
-              <a:buNone/>
-            </a:pPr>
-            <a:r>
-              <a:rPr lang="en-US" sz="1200" i="1" dirty="0">
-                <a:solidFill>
-                  <a:srgbClr val="1C2833"/>
-                </a:solidFill>
-                <a:latin typeface="Arial" pitchFamily="34" charset="0"/>
-                <a:ea typeface="Arial" pitchFamily="34" charset="-122"/>
-                <a:cs typeface="Arial" pitchFamily="34" charset="-120"/>
-              </a:rPr>
-              <a:t>sarna</a:t>
-            </a:r>
-            <a:pPr algn="l" indent="0" marL="0">
-              <a:lnSpc>
-                <a:spcPts val="1620"/>
-              </a:lnSpc>
-              <a:spcAft>
-                <a:spcPts val="300"/>
-              </a:spcAft>
-              <a:buNone/>
-            </a:pPr>
-            <a:r>
-              <a:rPr lang="en-US" sz="1200" dirty="0">
-                <a:solidFill>
-                  <a:srgbClr val="1C2833"/>
-                </a:solidFill>
-                <a:latin typeface="Arial" pitchFamily="34" charset="0"/>
-                <a:ea typeface="Arial" pitchFamily="34" charset="-122"/>
-                <a:cs typeface="Arial" pitchFamily="34" charset="-120"/>
-              </a:rPr>
-              <a:t>) and one fact: sacred groves preserve species the surrounding land has lost.</a:t>
+              <a:t> protection technology, not a biological accident.</a:t>
             </a:r>
             <a:endParaRPr lang="en-US" sz="1200" dirty="0"/>
           </a:p>
@@ -2780,7 +3398,7 @@
                 <a:ea typeface="Georgia" pitchFamily="34" charset="-122"/>
                 <a:cs typeface="Georgia" pitchFamily="34" charset="-120"/>
               </a:rPr>
-              <a:t>Teacher notes</a:t>
+              <a:t>Core (20 min) (cont.)</a:t>
             </a:r>
             <a:endParaRPr lang="en-US" sz="1800" dirty="0"/>
           </a:p>
@@ -2794,8 +3412,8 @@
         </p:nvSpPr>
         <p:spPr>
           <a:xfrm>
-            <a:off x="406301" y="870942"/>
-            <a:ext cx="8498026" cy="1492895"/>
+            <a:off x="634901" y="883593"/>
+            <a:ext cx="8102798" cy="898922"/>
           </a:xfrm>
           <a:prstGeom prst="rect">
             <a:avLst/>
@@ -2807,13 +3425,31 @@
           <a:bodyPr wrap="square" lIns="0" tIns="0" rIns="0" bIns="0" rtlCol="0" anchor="t"/>
           <a:lstStyle/>
           <a:p>
-            <a:pPr algn="l" indent="0" marL="0">
-              <a:lnSpc>
-                <a:spcPts val="1680"/>
-              </a:lnSpc>
-              <a:spcBef>
-                <a:spcPts val="300"/>
-              </a:spcBef>
+            <a:pPr algn="l" marL="342900" indent="-342900">
+              <a:lnSpc>
+                <a:spcPts val="1620"/>
+              </a:lnSpc>
+              <a:spcAft>
+                <a:spcPts val="300"/>
+              </a:spcAft>
+              <a:buSzPct val="100000"/>
+              <a:buChar char="•"/>
+            </a:pPr>
+            <a:r>
+              <a:rPr lang="en-US" sz="1200" b="1" dirty="0">
+                <a:solidFill>
+                  <a:srgbClr val="1C2833"/>
+                </a:solidFill>
+                <a:latin typeface="Arial" pitchFamily="34" charset="0"/>
+                <a:ea typeface="Arial" pitchFamily="34" charset="-122"/>
+                <a:cs typeface="Arial" pitchFamily="34" charset="-120"/>
+              </a:rPr>
+              <a:t>Modern parallel.</a:t>
+            </a:r>
+            <a:pPr algn="l" indent="0" marL="0">
+              <a:lnSpc>
+                <a:spcPts val="1620"/>
+              </a:lnSpc>
               <a:spcAft>
                 <a:spcPts val="300"/>
               </a:spcAft>
@@ -2828,15 +3464,12 @@
                 <a:ea typeface="Arial" pitchFamily="34" charset="-122"/>
                 <a:cs typeface="Arial" pitchFamily="34" charset="-120"/>
               </a:rPr>
-              <a:t>– Some students will challenge: </a:t>
-            </a:r>
-            <a:pPr algn="l" indent="0" marL="0">
-              <a:lnSpc>
-                <a:spcPts val="1680"/>
-              </a:lnSpc>
-              <a:spcBef>
-                <a:spcPts val="300"/>
-              </a:spcBef>
+              <a:t> Modern ecology has a name for this same phenomenon: "community-managed conservation areas" or "biocultural refugia." The UN's Convention on Biological Diversity recognises Indigenous and Community Conserved Areas (ICCAs). The Indic </a:t>
+            </a:r>
+            <a:pPr algn="l" indent="0" marL="0">
+              <a:lnSpc>
+                <a:spcPts val="1620"/>
+              </a:lnSpc>
               <a:spcAft>
                 <a:spcPts val="300"/>
               </a:spcAft>
@@ -2851,15 +3484,12 @@
                 <a:ea typeface="Arial" pitchFamily="34" charset="-122"/>
                 <a:cs typeface="Arial" pitchFamily="34" charset="-120"/>
               </a:rPr>
-              <a:t>"That's superstition. Why should we protect a forest because of a goddess?"</a:t>
-            </a:r>
-            <a:pPr algn="l" indent="0" marL="0">
-              <a:lnSpc>
-                <a:spcPts val="1680"/>
-              </a:lnSpc>
-              <a:spcBef>
-                <a:spcPts val="300"/>
-              </a:spcBef>
+              <a:t>devarakāḍu</a:t>
+            </a:r>
+            <a:pPr algn="l" indent="0" marL="0">
+              <a:lnSpc>
+                <a:spcPts val="1620"/>
+              </a:lnSpc>
               <a:spcAft>
                 <a:spcPts val="300"/>
               </a:spcAft>
@@ -2874,15 +3504,12 @@
                 <a:ea typeface="Arial" pitchFamily="34" charset="-122"/>
                 <a:cs typeface="Arial" pitchFamily="34" charset="-120"/>
               </a:rPr>
-              <a:t> — affirm the question. Answer: it doesn't matter </a:t>
-            </a:r>
-            <a:pPr algn="l" indent="0" marL="0">
-              <a:lnSpc>
-                <a:spcPts val="1680"/>
-              </a:lnSpc>
-              <a:spcBef>
-                <a:spcPts val="300"/>
-              </a:spcBef>
+              <a:t> and the </a:t>
+            </a:r>
+            <a:pPr algn="l" indent="0" marL="0">
+              <a:lnSpc>
+                <a:spcPts val="1620"/>
+              </a:lnSpc>
               <a:spcAft>
                 <a:spcPts val="300"/>
               </a:spcAft>
@@ -2897,15 +3524,12 @@
                 <a:ea typeface="Arial" pitchFamily="34" charset="-122"/>
                 <a:cs typeface="Arial" pitchFamily="34" charset="-120"/>
               </a:rPr>
-              <a:t>why</a:t>
-            </a:r>
-            <a:pPr algn="l" indent="0" marL="0">
-              <a:lnSpc>
-                <a:spcPts val="1680"/>
-              </a:lnSpc>
-              <a:spcBef>
-                <a:spcPts val="300"/>
-              </a:spcBef>
+              <a:t>sarna</a:t>
+            </a:r>
+            <a:pPr algn="l" indent="0" marL="0">
+              <a:lnSpc>
+                <a:spcPts val="1620"/>
+              </a:lnSpc>
               <a:spcAft>
                 <a:spcPts val="300"/>
               </a:spcAft>
@@ -2920,53 +3544,7 @@
                 <a:ea typeface="Arial" pitchFamily="34" charset="-122"/>
                 <a:cs typeface="Arial" pitchFamily="34" charset="-120"/>
               </a:rPr>
-              <a:t> a community protects a forest; what matters is that it gets protected. The Indic tradition used the language of the sacred. Modern conservation uses the language of "ecosystem services." Both are descriptions of the same protective behaviour. – The Coorg </a:t>
-            </a:r>
-            <a:pPr algn="l" indent="0" marL="0">
-              <a:lnSpc>
-                <a:spcPts val="1680"/>
-              </a:lnSpc>
-              <a:spcBef>
-                <a:spcPts val="300"/>
-              </a:spcBef>
-              <a:spcAft>
-                <a:spcPts val="300"/>
-              </a:spcAft>
-              <a:buNone/>
-            </a:pPr>
-            <a:r>
-              <a:rPr lang="en-US" sz="1200" i="1" dirty="0">
-                <a:solidFill>
-                  <a:srgbClr val="1C2833"/>
-                </a:solidFill>
-                <a:latin typeface="Arial" pitchFamily="34" charset="0"/>
-                <a:ea typeface="Arial" pitchFamily="34" charset="-122"/>
-                <a:cs typeface="Arial" pitchFamily="34" charset="-120"/>
-              </a:rPr>
-              <a:t>devarakāḍu</a:t>
-            </a:r>
-            <a:pPr algn="l" indent="0" marL="0">
-              <a:lnSpc>
-                <a:spcPts val="1680"/>
-              </a:lnSpc>
-              <a:spcBef>
-                <a:spcPts val="300"/>
-              </a:spcBef>
-              <a:spcAft>
-                <a:spcPts val="300"/>
-              </a:spcAft>
-              <a:buNone/>
-            </a:pPr>
-            <a:r>
-              <a:rPr lang="en-US" sz="1200" dirty="0">
-                <a:solidFill>
-                  <a:srgbClr val="1C2833"/>
-                </a:solidFill>
-                <a:latin typeface="Arial" pitchFamily="34" charset="0"/>
-                <a:ea typeface="Arial" pitchFamily="34" charset="-122"/>
-                <a:cs typeface="Arial" pitchFamily="34" charset="-120"/>
-              </a:rPr>
-              <a:t> network is well-documented; the figure of ~1,200 groves is from Gadgil's published surveys. If you want a source, Gadgil &amp; Subash Chandran (1991) is a more recent count. – Don't romanticise sacred groves as universally protected. Many have been encroached, paved over, or turned into commercial temples. The protection is real where it is sustained; it is not magical.</a:t>
+              <a:t> are some of the oldest documented examples of what global conservation policy now formally recommends.</a:t>
             </a:r>
             <a:endParaRPr lang="en-US" sz="1200" dirty="0"/>
           </a:p>
@@ -3124,7 +3702,7 @@
                 <a:ea typeface="Georgia" pitchFamily="34" charset="-122"/>
                 <a:cs typeface="Georgia" pitchFamily="34" charset="-120"/>
               </a:rPr>
-              <a:t>Citation(s) used in this lesson</a:t>
+              <a:t>Core (20 min) (cont.)</a:t>
             </a:r>
             <a:endParaRPr lang="en-US" sz="1800" dirty="0"/>
           </a:p>
@@ -3138,8 +3716,8 @@
         </p:nvSpPr>
         <p:spPr>
           <a:xfrm>
-            <a:off x="634901" y="883593"/>
-            <a:ext cx="8102798" cy="487561"/>
+            <a:off x="406301" y="870942"/>
+            <a:ext cx="8498026" cy="639812"/>
           </a:xfrm>
           <a:prstGeom prst="rect">
             <a:avLst/>
@@ -3151,31 +3729,13 @@
           <a:bodyPr wrap="square" lIns="0" tIns="0" rIns="0" bIns="0" rtlCol="0" anchor="t"/>
           <a:lstStyle/>
           <a:p>
-            <a:pPr algn="l" marL="342900" indent="-342900">
-              <a:lnSpc>
-                <a:spcPts val="1620"/>
-              </a:lnSpc>
-              <a:spcAft>
-                <a:spcPts val="300"/>
-              </a:spcAft>
-              <a:buSzPct val="100000"/>
-              <a:buChar char="•"/>
-            </a:pPr>
-            <a:r>
-              <a:rPr lang="en-US" sz="1200" b="1" dirty="0">
-                <a:solidFill>
-                  <a:srgbClr val="1C2833"/>
-                </a:solidFill>
-                <a:latin typeface="Arial" pitchFamily="34" charset="0"/>
-                <a:ea typeface="Arial" pitchFamily="34" charset="-122"/>
-                <a:cs typeface="Arial" pitchFamily="34" charset="-120"/>
-              </a:rPr>
-              <a:t>Gadgil, M. &amp; Vartak, V. D.</a:t>
-            </a:r>
-            <a:pPr algn="l" indent="0" marL="0">
-              <a:lnSpc>
-                <a:spcPts val="1620"/>
-              </a:lnSpc>
+            <a:pPr algn="l" indent="0" marL="0">
+              <a:lnSpc>
+                <a:spcPts val="1680"/>
+              </a:lnSpc>
+              <a:spcBef>
+                <a:spcPts val="300"/>
+              </a:spcBef>
               <a:spcAft>
                 <a:spcPts val="300"/>
               </a:spcAft>
@@ -3190,12 +3750,15 @@
                 <a:ea typeface="Arial" pitchFamily="34" charset="-122"/>
                 <a:cs typeface="Arial" pitchFamily="34" charset="-120"/>
               </a:rPr>
-              <a:t> (1976). "The Sacred Groves of Western Ghats in India." </a:t>
-            </a:r>
-            <a:pPr algn="l" indent="0" marL="0">
-              <a:lnSpc>
-                <a:spcPts val="1620"/>
-              </a:lnSpc>
+              <a:t>Frame this carefully: </a:t>
+            </a:r>
+            <a:pPr algn="l" indent="0" marL="0">
+              <a:lnSpc>
+                <a:spcPts val="1680"/>
+              </a:lnSpc>
+              <a:spcBef>
+                <a:spcPts val="300"/>
+              </a:spcBef>
               <a:spcAft>
                 <a:spcPts val="300"/>
               </a:spcAft>
@@ -3210,12 +3773,15 @@
                 <a:ea typeface="Arial" pitchFamily="34" charset="-122"/>
                 <a:cs typeface="Arial" pitchFamily="34" charset="-120"/>
               </a:rPr>
-              <a:t>Economic Botany</a:t>
-            </a:r>
-            <a:pPr algn="l" indent="0" marL="0">
-              <a:lnSpc>
-                <a:spcPts val="1620"/>
-              </a:lnSpc>
+              <a:t>we are not saying "ancient Indians invented modern conservation."</a:t>
+            </a:r>
+            <a:pPr algn="l" indent="0" marL="0">
+              <a:lnSpc>
+                <a:spcPts val="1680"/>
+              </a:lnSpc>
+              <a:spcBef>
+                <a:spcPts val="300"/>
+              </a:spcBef>
               <a:spcAft>
                 <a:spcPts val="300"/>
               </a:spcAft>
@@ -3230,7 +3796,7 @@
                 <a:ea typeface="Arial" pitchFamily="34" charset="-122"/>
                 <a:cs typeface="Arial" pitchFamily="34" charset="-120"/>
               </a:rPr>
-              <a:t> 30(2): 152–160. — Paraphrased in the handout.</a:t>
+              <a:t> We are saying multiple cultures, including the Indic tradition, arrived at similar protective practices for similar reasons. The recognition is mutual, not a claim to priority.</a:t>
             </a:r>
             <a:endParaRPr lang="en-US" sz="1200" dirty="0"/>
           </a:p>
@@ -3244,8 +3810,8 @@
         </p:nvSpPr>
         <p:spPr>
           <a:xfrm>
-            <a:off x="406301" y="1460004"/>
-            <a:ext cx="8498026" cy="222796"/>
+            <a:off x="406301" y="4434929"/>
+            <a:ext cx="8498026" cy="213271"/>
           </a:xfrm>
           <a:prstGeom prst="rect">
             <a:avLst/>
@@ -3278,8 +3844,143 @@
                 <a:ea typeface="Arial" pitchFamily="34" charset="-122"/>
                 <a:cs typeface="Arial" pitchFamily="34" charset="-120"/>
               </a:rPr>
-              <a:t>– See </a:t>
-            </a:r>
+              <a:t>Middle ·  · IKS Curriculum</a:t>
+            </a:r>
+            <a:endParaRPr lang="en-US" sz="1200" dirty="0"/>
+          </a:p>
+        </p:txBody>
+      </p:sp>
+    </p:spTree>
+  </p:cSld>
+  <p:clrMapOvr>
+    <a:masterClrMapping/>
+  </p:clrMapOvr>
+</p:sld>
+</file>
+
+<file path=ppt/slides/slide13.xml><?xml version="1.0" encoding="utf-8"?>
+<p:sld xmlns:a="http://schemas.openxmlformats.org/drawingml/2006/main" xmlns:r="http://schemas.openxmlformats.org/officeDocument/2006/relationships" xmlns:p="http://schemas.openxmlformats.org/presentationml/2006/main">
+  <p:cSld name="Slide 13">
+    <p:bg>
+      <p:bgPr>
+        <a:solidFill>
+          <a:srgbClr val="FFFFFF"/>
+        </a:solidFill>
+      </p:bgPr>
+    </p:bg>
+    <p:spTree>
+      <p:nvGrpSpPr>
+        <p:cNvPr id="1" name=""/>
+        <p:cNvGrpSpPr/>
+        <p:nvPr/>
+      </p:nvGrpSpPr>
+      <p:grpSpPr>
+        <a:xfrm>
+          <a:off x="0" y="0"/>
+          <a:ext cx="0" cy="0"/>
+          <a:chOff x="0" y="0"/>
+          <a:chExt cx="0" cy="0"/>
+        </a:xfrm>
+      </p:grpSpPr>
+      <p:sp>
+        <p:nvSpPr>
+          <p:cNvPr id="2" name="Text 0"/>
+          <p:cNvSpPr/>
+          <p:nvPr/>
+        </p:nvSpPr>
+        <p:spPr>
+          <a:xfrm>
+            <a:off x="0" y="0"/>
+            <a:ext cx="9144000" cy="101501"/>
+          </a:xfrm>
+          <a:prstGeom prst="rect">
+            <a:avLst/>
+          </a:prstGeom>
+          <a:solidFill>
+            <a:srgbClr val="277884"/>
+          </a:solidFill>
+          <a:ln/>
+        </p:spPr>
+        <p:txBody>
+          <a:bodyPr wrap="square" rtlCol="0" anchor="ctr"/>
+          <a:lstStyle/>
+          <a:p>
+            <a:pPr indent="0" marL="0">
+              <a:buNone/>
+            </a:pPr>
+            <a:endParaRPr lang="en-US" dirty="0"/>
+          </a:p>
+        </p:txBody>
+      </p:sp>
+      <p:sp>
+        <p:nvSpPr>
+          <p:cNvPr id="3" name="Text 1"/>
+          <p:cNvSpPr/>
+          <p:nvPr/>
+        </p:nvSpPr>
+        <p:spPr>
+          <a:xfrm>
+            <a:off x="406301" y="457051"/>
+            <a:ext cx="8498026" cy="274290"/>
+          </a:xfrm>
+          <a:prstGeom prst="rect">
+            <a:avLst/>
+          </a:prstGeom>
+          <a:noFill/>
+          <a:ln/>
+        </p:spPr>
+        <p:txBody>
+          <a:bodyPr wrap="square" lIns="0" tIns="0" rIns="0" bIns="0" rtlCol="0" anchor="t"/>
+          <a:lstStyle/>
+          <a:p>
+            <a:pPr algn="l" indent="0" marL="0">
+              <a:lnSpc>
+                <a:spcPts val="2160"/>
+              </a:lnSpc>
+              <a:spcBef>
+                <a:spcPts val="600"/>
+              </a:spcBef>
+              <a:spcAft>
+                <a:spcPts val="800"/>
+              </a:spcAft>
+              <a:buNone/>
+            </a:pPr>
+            <a:r>
+              <a:rPr lang="en-US" sz="1800" b="1" dirty="0">
+                <a:solidFill>
+                  <a:srgbClr val="FE4447"/>
+                </a:solidFill>
+                <a:latin typeface="Georgia" pitchFamily="34" charset="0"/>
+                <a:ea typeface="Georgia" pitchFamily="34" charset="-122"/>
+                <a:cs typeface="Georgia" pitchFamily="34" charset="-120"/>
+              </a:rPr>
+              <a:t>Activity (15 min) — Sacred Grove Mapping</a:t>
+            </a:r>
+            <a:endParaRPr lang="en-US" sz="1800" dirty="0"/>
+          </a:p>
+        </p:txBody>
+      </p:sp>
+      <p:sp>
+        <p:nvSpPr>
+          <p:cNvPr id="4" name="Text 2"/>
+          <p:cNvSpPr/>
+          <p:nvPr/>
+        </p:nvSpPr>
+        <p:spPr>
+          <a:xfrm>
+            <a:off x="406301" y="870942"/>
+            <a:ext cx="8498026" cy="222796"/>
+          </a:xfrm>
+          <a:prstGeom prst="rect">
+            <a:avLst/>
+          </a:prstGeom>
+          <a:noFill/>
+          <a:ln/>
+        </p:spPr>
+        <p:txBody>
+          <a:bodyPr wrap="square" lIns="0" tIns="0" rIns="0" bIns="0" rtlCol="0" anchor="t"/>
+          <a:lstStyle/>
+          <a:p>
             <a:pPr algn="l" indent="0" marL="0">
               <a:lnSpc>
                 <a:spcPts val="1680"/>
@@ -3301,7 +4002,7 @@
                 <a:ea typeface="Arial" pitchFamily="34" charset="-122"/>
                 <a:cs typeface="Arial" pitchFamily="34" charset="-120"/>
               </a:rPr>
-              <a:t>sources.md</a:t>
+              <a:t>(See </a:t>
             </a:r>
             <a:pPr algn="l" indent="0" marL="0">
               <a:lnSpc>
@@ -3324,7 +4025,30 @@
                 <a:ea typeface="Arial" pitchFamily="34" charset="-122"/>
                 <a:cs typeface="Arial" pitchFamily="34" charset="-120"/>
               </a:rPr>
-              <a:t> for the full reference and the Chapple &amp; Tucker (2000) anthology if you need teacher background.</a:t>
+              <a:t>activities/activity-01-sacred-grove-mapping.md</a:t>
+            </a:r>
+            <a:pPr algn="l" indent="0" marL="0">
+              <a:lnSpc>
+                <a:spcPts val="1680"/>
+              </a:lnSpc>
+              <a:spcBef>
+                <a:spcPts val="300"/>
+              </a:spcBef>
+              <a:spcAft>
+                <a:spcPts val="300"/>
+              </a:spcAft>
+              <a:buNone/>
+            </a:pPr>
+            <a:r>
+              <a:rPr lang="en-US" sz="1200" dirty="0">
+                <a:solidFill>
+                  <a:srgbClr val="1C2833"/>
+                </a:solidFill>
+                <a:latin typeface="Arial" pitchFamily="34" charset="0"/>
+                <a:ea typeface="Arial" pitchFamily="34" charset="-122"/>
+                <a:cs typeface="Arial" pitchFamily="34" charset="-120"/>
+              </a:rPr>
+              <a:t> for the full sheet.)</a:t>
             </a:r>
             <a:endParaRPr lang="en-US" sz="1200" dirty="0"/>
           </a:p>
@@ -3332,7 +4056,2147 @@
       </p:sp>
       <p:sp>
         <p:nvSpPr>
+          <p:cNvPr id="5" name="Text 3"/>
+          <p:cNvSpPr/>
+          <p:nvPr/>
+        </p:nvSpPr>
+        <p:spPr>
+          <a:xfrm>
+            <a:off x="406301" y="4434929"/>
+            <a:ext cx="8498026" cy="213271"/>
+          </a:xfrm>
+          <a:prstGeom prst="rect">
+            <a:avLst/>
+          </a:prstGeom>
+          <a:noFill/>
+          <a:ln/>
+        </p:spPr>
+        <p:txBody>
+          <a:bodyPr wrap="square" lIns="0" tIns="0" rIns="0" bIns="0" rtlCol="0" anchor="t"/>
+          <a:lstStyle/>
+          <a:p>
+            <a:pPr algn="l" indent="0" marL="0">
+              <a:lnSpc>
+                <a:spcPts val="1680"/>
+              </a:lnSpc>
+              <a:spcBef>
+                <a:spcPts val="300"/>
+              </a:spcBef>
+              <a:spcAft>
+                <a:spcPts val="300"/>
+              </a:spcAft>
+              <a:buNone/>
+            </a:pPr>
+            <a:r>
+              <a:rPr lang="en-US" sz="1200" dirty="0">
+                <a:solidFill>
+                  <a:srgbClr val="1C2833"/>
+                </a:solidFill>
+                <a:latin typeface="Arial" pitchFamily="34" charset="0"/>
+                <a:ea typeface="Arial" pitchFamily="34" charset="-122"/>
+                <a:cs typeface="Arial" pitchFamily="34" charset="-120"/>
+              </a:rPr>
+              <a:t>Middle ·  · IKS Curriculum</a:t>
+            </a:r>
+            <a:endParaRPr lang="en-US" sz="1200" dirty="0"/>
+          </a:p>
+        </p:txBody>
+      </p:sp>
+    </p:spTree>
+  </p:cSld>
+  <p:clrMapOvr>
+    <a:masterClrMapping/>
+  </p:clrMapOvr>
+</p:sld>
+</file>
+
+<file path=ppt/slides/slide14.xml><?xml version="1.0" encoding="utf-8"?>
+<p:sld xmlns:a="http://schemas.openxmlformats.org/drawingml/2006/main" xmlns:r="http://schemas.openxmlformats.org/officeDocument/2006/relationships" xmlns:p="http://schemas.openxmlformats.org/presentationml/2006/main">
+  <p:cSld name="Slide 14">
+    <p:bg>
+      <p:bgPr>
+        <a:solidFill>
+          <a:srgbClr val="FFFFFF"/>
+        </a:solidFill>
+      </p:bgPr>
+    </p:bg>
+    <p:spTree>
+      <p:nvGrpSpPr>
+        <p:cNvPr id="1" name=""/>
+        <p:cNvGrpSpPr/>
+        <p:nvPr/>
+      </p:nvGrpSpPr>
+      <p:grpSpPr>
+        <a:xfrm>
+          <a:off x="0" y="0"/>
+          <a:ext cx="0" cy="0"/>
+          <a:chOff x="0" y="0"/>
+          <a:chExt cx="0" cy="0"/>
+        </a:xfrm>
+      </p:grpSpPr>
+      <p:sp>
+        <p:nvSpPr>
+          <p:cNvPr id="2" name="Text 0"/>
+          <p:cNvSpPr/>
+          <p:nvPr/>
+        </p:nvSpPr>
+        <p:spPr>
+          <a:xfrm>
+            <a:off x="0" y="0"/>
+            <a:ext cx="9144000" cy="101501"/>
+          </a:xfrm>
+          <a:prstGeom prst="rect">
+            <a:avLst/>
+          </a:prstGeom>
+          <a:solidFill>
+            <a:srgbClr val="277884"/>
+          </a:solidFill>
+          <a:ln/>
+        </p:spPr>
+        <p:txBody>
+          <a:bodyPr wrap="square" rtlCol="0" anchor="ctr"/>
+          <a:lstStyle/>
+          <a:p>
+            <a:pPr indent="0" marL="0">
+              <a:buNone/>
+            </a:pPr>
+            <a:endParaRPr lang="en-US" dirty="0"/>
+          </a:p>
+        </p:txBody>
+      </p:sp>
+      <p:sp>
+        <p:nvSpPr>
+          <p:cNvPr id="3" name="Text 1"/>
+          <p:cNvSpPr/>
+          <p:nvPr/>
+        </p:nvSpPr>
+        <p:spPr>
+          <a:xfrm>
+            <a:off x="406301" y="457051"/>
+            <a:ext cx="8498026" cy="274290"/>
+          </a:xfrm>
+          <a:prstGeom prst="rect">
+            <a:avLst/>
+          </a:prstGeom>
+          <a:noFill/>
+          <a:ln/>
+        </p:spPr>
+        <p:txBody>
+          <a:bodyPr wrap="square" lIns="0" tIns="0" rIns="0" bIns="0" rtlCol="0" anchor="t"/>
+          <a:lstStyle/>
+          <a:p>
+            <a:pPr algn="l" indent="0" marL="0">
+              <a:lnSpc>
+                <a:spcPts val="2160"/>
+              </a:lnSpc>
+              <a:spcBef>
+                <a:spcPts val="600"/>
+              </a:spcBef>
+              <a:spcAft>
+                <a:spcPts val="800"/>
+              </a:spcAft>
+              <a:buNone/>
+            </a:pPr>
+            <a:r>
+              <a:rPr lang="en-US" sz="1800" b="1" dirty="0">
+                <a:solidFill>
+                  <a:srgbClr val="FE4447"/>
+                </a:solidFill>
+                <a:latin typeface="Georgia" pitchFamily="34" charset="0"/>
+                <a:ea typeface="Georgia" pitchFamily="34" charset="-122"/>
+                <a:cs typeface="Georgia" pitchFamily="34" charset="-120"/>
+              </a:rPr>
+              <a:t>Activity (15 min) — Sacred Grove Mapping (cont.)</a:t>
+            </a:r>
+            <a:endParaRPr lang="en-US" sz="1800" dirty="0"/>
+          </a:p>
+        </p:txBody>
+      </p:sp>
+      <p:sp>
+        <p:nvSpPr>
+          <p:cNvPr id="4" name="Text 2"/>
+          <p:cNvSpPr/>
+          <p:nvPr/>
+        </p:nvSpPr>
+        <p:spPr>
+          <a:xfrm>
+            <a:off x="406301" y="870942"/>
+            <a:ext cx="8498026" cy="213271"/>
+          </a:xfrm>
+          <a:prstGeom prst="rect">
+            <a:avLst/>
+          </a:prstGeom>
+          <a:noFill/>
+          <a:ln/>
+        </p:spPr>
+        <p:txBody>
+          <a:bodyPr wrap="square" lIns="0" tIns="0" rIns="0" bIns="0" rtlCol="0" anchor="t"/>
+          <a:lstStyle/>
+          <a:p>
+            <a:pPr algn="l" indent="0" marL="0">
+              <a:lnSpc>
+                <a:spcPts val="1680"/>
+              </a:lnSpc>
+              <a:spcBef>
+                <a:spcPts val="300"/>
+              </a:spcBef>
+              <a:spcAft>
+                <a:spcPts val="300"/>
+              </a:spcAft>
+              <a:buNone/>
+            </a:pPr>
+            <a:r>
+              <a:rPr lang="en-US" sz="1200" dirty="0">
+                <a:solidFill>
+                  <a:srgbClr val="1C2833"/>
+                </a:solidFill>
+                <a:latin typeface="Arial" pitchFamily="34" charset="0"/>
+                <a:ea typeface="Arial" pitchFamily="34" charset="-122"/>
+                <a:cs typeface="Arial" pitchFamily="34" charset="-120"/>
+              </a:rPr>
+              <a:t>In groups of 4:</a:t>
+            </a:r>
+            <a:endParaRPr lang="en-US" sz="1200" dirty="0"/>
+          </a:p>
+        </p:txBody>
+      </p:sp>
+      <p:sp>
+        <p:nvSpPr>
+          <p:cNvPr id="5" name="Text 3"/>
+          <p:cNvSpPr/>
+          <p:nvPr/>
+        </p:nvSpPr>
+        <p:spPr>
+          <a:xfrm>
+            <a:off x="634901" y="1173063"/>
+            <a:ext cx="8102798" cy="1013222"/>
+          </a:xfrm>
+          <a:prstGeom prst="rect">
+            <a:avLst/>
+          </a:prstGeom>
+          <a:noFill/>
+          <a:ln/>
+        </p:spPr>
+        <p:txBody>
+          <a:bodyPr wrap="square" lIns="0" tIns="0" rIns="0" bIns="0" rtlCol="0" anchor="t"/>
+          <a:lstStyle/>
+          <a:p>
+            <a:pPr algn="l" marL="342900" indent="-342900">
+              <a:lnSpc>
+                <a:spcPts val="1620"/>
+              </a:lnSpc>
+              <a:spcAft>
+                <a:spcPts val="300"/>
+              </a:spcAft>
+              <a:buSzPct val="100000"/>
+              <a:buChar char="•"/>
+            </a:pPr>
+            <a:r>
+              <a:rPr lang="en-US" sz="1200" dirty="0">
+                <a:solidFill>
+                  <a:srgbClr val="1C2833"/>
+                </a:solidFill>
+                <a:latin typeface="Arial" pitchFamily="34" charset="0"/>
+                <a:ea typeface="Arial" pitchFamily="34" charset="-122"/>
+                <a:cs typeface="Arial" pitchFamily="34" charset="-120"/>
+              </a:rPr>
+              <a:t>One student looks up your state's sacred-grove tradition (Coorg / Kerala / Jharkhand / etc.). One paragraph.</a:t>
+            </a:r>
+            <a:endParaRPr lang="en-US" sz="1200" dirty="0"/>
+          </a:p>
+          <a:p>
+            <a:pPr algn="l" marL="342900" indent="-342900">
+              <a:lnSpc>
+                <a:spcPts val="1620"/>
+              </a:lnSpc>
+              <a:spcAft>
+                <a:spcPts val="300"/>
+              </a:spcAft>
+              <a:buSzPct val="100000"/>
+              <a:buChar char="•"/>
+            </a:pPr>
+            <a:r>
+              <a:rPr lang="en-US" sz="1200" dirty="0">
+                <a:solidFill>
+                  <a:srgbClr val="1C2833"/>
+                </a:solidFill>
+                <a:latin typeface="Arial" pitchFamily="34" charset="0"/>
+                <a:ea typeface="Arial" pitchFamily="34" charset="-122"/>
+                <a:cs typeface="Arial" pitchFamily="34" charset="-120"/>
+              </a:rPr>
+              <a:t>One student lists three species you would expect to find in a 200-year-old undisturbed forest patch in your bio-region.</a:t>
+            </a:r>
+            <a:endParaRPr lang="en-US" sz="1200" dirty="0"/>
+          </a:p>
+          <a:p>
+            <a:pPr algn="l" marL="342900" indent="-342900">
+              <a:lnSpc>
+                <a:spcPts val="1620"/>
+              </a:lnSpc>
+              <a:spcAft>
+                <a:spcPts val="300"/>
+              </a:spcAft>
+              <a:buSzPct val="100000"/>
+              <a:buChar char="•"/>
+            </a:pPr>
+            <a:r>
+              <a:rPr lang="en-US" sz="1200" dirty="0">
+                <a:solidFill>
+                  <a:srgbClr val="1C2833"/>
+                </a:solidFill>
+                <a:latin typeface="Arial" pitchFamily="34" charset="0"/>
+                <a:ea typeface="Arial" pitchFamily="34" charset="-122"/>
+                <a:cs typeface="Arial" pitchFamily="34" charset="-120"/>
+              </a:rPr>
+              <a:t>One student draws what a "school sacred grove" could look like — even a 10-tree patch in a campus corner.</a:t>
+            </a:r>
+            <a:endParaRPr lang="en-US" sz="1200" dirty="0"/>
+          </a:p>
+          <a:p>
+            <a:pPr algn="l" marL="342900" indent="-342900">
+              <a:lnSpc>
+                <a:spcPts val="1620"/>
+              </a:lnSpc>
+              <a:spcAft>
+                <a:spcPts val="300"/>
+              </a:spcAft>
+              <a:buSzPct val="100000"/>
+              <a:buChar char="•"/>
+            </a:pPr>
+            <a:r>
+              <a:rPr lang="en-US" sz="1200" dirty="0">
+                <a:solidFill>
+                  <a:srgbClr val="1C2833"/>
+                </a:solidFill>
+                <a:latin typeface="Arial" pitchFamily="34" charset="0"/>
+                <a:ea typeface="Arial" pitchFamily="34" charset="-122"/>
+                <a:cs typeface="Arial" pitchFamily="34" charset="-120"/>
+              </a:rPr>
+              <a:t>One student writes a one-sentence rule the group would adopt to keep their imaginary grove protected.</a:t>
+            </a:r>
+            <a:endParaRPr lang="en-US" sz="1200" dirty="0"/>
+          </a:p>
+        </p:txBody>
+      </p:sp>
+      <p:sp>
+        <p:nvSpPr>
           <p:cNvPr id="6" name="Text 4"/>
+          <p:cNvSpPr/>
+          <p:nvPr/>
+        </p:nvSpPr>
+        <p:spPr>
+          <a:xfrm>
+            <a:off x="406301" y="4434929"/>
+            <a:ext cx="8498026" cy="213271"/>
+          </a:xfrm>
+          <a:prstGeom prst="rect">
+            <a:avLst/>
+          </a:prstGeom>
+          <a:noFill/>
+          <a:ln/>
+        </p:spPr>
+        <p:txBody>
+          <a:bodyPr wrap="square" lIns="0" tIns="0" rIns="0" bIns="0" rtlCol="0" anchor="t"/>
+          <a:lstStyle/>
+          <a:p>
+            <a:pPr algn="l" indent="0" marL="0">
+              <a:lnSpc>
+                <a:spcPts val="1680"/>
+              </a:lnSpc>
+              <a:spcBef>
+                <a:spcPts val="300"/>
+              </a:spcBef>
+              <a:spcAft>
+                <a:spcPts val="300"/>
+              </a:spcAft>
+              <a:buNone/>
+            </a:pPr>
+            <a:r>
+              <a:rPr lang="en-US" sz="1200" dirty="0">
+                <a:solidFill>
+                  <a:srgbClr val="1C2833"/>
+                </a:solidFill>
+                <a:latin typeface="Arial" pitchFamily="34" charset="0"/>
+                <a:ea typeface="Arial" pitchFamily="34" charset="-122"/>
+                <a:cs typeface="Arial" pitchFamily="34" charset="-120"/>
+              </a:rPr>
+              <a:t>Middle ·  · IKS Curriculum</a:t>
+            </a:r>
+            <a:endParaRPr lang="en-US" sz="1200" dirty="0"/>
+          </a:p>
+        </p:txBody>
+      </p:sp>
+    </p:spTree>
+  </p:cSld>
+  <p:clrMapOvr>
+    <a:masterClrMapping/>
+  </p:clrMapOvr>
+</p:sld>
+</file>
+
+<file path=ppt/slides/slide15.xml><?xml version="1.0" encoding="utf-8"?>
+<p:sld xmlns:a="http://schemas.openxmlformats.org/drawingml/2006/main" xmlns:r="http://schemas.openxmlformats.org/officeDocument/2006/relationships" xmlns:p="http://schemas.openxmlformats.org/presentationml/2006/main">
+  <p:cSld name="Slide 15">
+    <p:bg>
+      <p:bgPr>
+        <a:solidFill>
+          <a:srgbClr val="FFFFFF"/>
+        </a:solidFill>
+      </p:bgPr>
+    </p:bg>
+    <p:spTree>
+      <p:nvGrpSpPr>
+        <p:cNvPr id="1" name=""/>
+        <p:cNvGrpSpPr/>
+        <p:nvPr/>
+      </p:nvGrpSpPr>
+      <p:grpSpPr>
+        <a:xfrm>
+          <a:off x="0" y="0"/>
+          <a:ext cx="0" cy="0"/>
+          <a:chOff x="0" y="0"/>
+          <a:chExt cx="0" cy="0"/>
+        </a:xfrm>
+      </p:grpSpPr>
+      <p:sp>
+        <p:nvSpPr>
+          <p:cNvPr id="2" name="Text 0"/>
+          <p:cNvSpPr/>
+          <p:nvPr/>
+        </p:nvSpPr>
+        <p:spPr>
+          <a:xfrm>
+            <a:off x="0" y="0"/>
+            <a:ext cx="9144000" cy="101501"/>
+          </a:xfrm>
+          <a:prstGeom prst="rect">
+            <a:avLst/>
+          </a:prstGeom>
+          <a:solidFill>
+            <a:srgbClr val="277884"/>
+          </a:solidFill>
+          <a:ln/>
+        </p:spPr>
+        <p:txBody>
+          <a:bodyPr wrap="square" rtlCol="0" anchor="ctr"/>
+          <a:lstStyle/>
+          <a:p>
+            <a:pPr indent="0" marL="0">
+              <a:buNone/>
+            </a:pPr>
+            <a:endParaRPr lang="en-US" dirty="0"/>
+          </a:p>
+        </p:txBody>
+      </p:sp>
+      <p:sp>
+        <p:nvSpPr>
+          <p:cNvPr id="3" name="Text 1"/>
+          <p:cNvSpPr/>
+          <p:nvPr/>
+        </p:nvSpPr>
+        <p:spPr>
+          <a:xfrm>
+            <a:off x="406301" y="457051"/>
+            <a:ext cx="8498026" cy="274290"/>
+          </a:xfrm>
+          <a:prstGeom prst="rect">
+            <a:avLst/>
+          </a:prstGeom>
+          <a:noFill/>
+          <a:ln/>
+        </p:spPr>
+        <p:txBody>
+          <a:bodyPr wrap="square" lIns="0" tIns="0" rIns="0" bIns="0" rtlCol="0" anchor="t"/>
+          <a:lstStyle/>
+          <a:p>
+            <a:pPr algn="l" indent="0" marL="0">
+              <a:lnSpc>
+                <a:spcPts val="2160"/>
+              </a:lnSpc>
+              <a:spcBef>
+                <a:spcPts val="600"/>
+              </a:spcBef>
+              <a:spcAft>
+                <a:spcPts val="800"/>
+              </a:spcAft>
+              <a:buNone/>
+            </a:pPr>
+            <a:r>
+              <a:rPr lang="en-US" sz="1800" b="1" dirty="0">
+                <a:solidFill>
+                  <a:srgbClr val="FE4447"/>
+                </a:solidFill>
+                <a:latin typeface="Georgia" pitchFamily="34" charset="0"/>
+                <a:ea typeface="Georgia" pitchFamily="34" charset="-122"/>
+                <a:cs typeface="Georgia" pitchFamily="34" charset="-120"/>
+              </a:rPr>
+              <a:t>Activity (15 min) — Sacred Grove Mapping (cont.)</a:t>
+            </a:r>
+            <a:endParaRPr lang="en-US" sz="1800" dirty="0"/>
+          </a:p>
+        </p:txBody>
+      </p:sp>
+      <p:sp>
+        <p:nvSpPr>
+          <p:cNvPr id="4" name="Text 2"/>
+          <p:cNvSpPr/>
+          <p:nvPr/>
+        </p:nvSpPr>
+        <p:spPr>
+          <a:xfrm>
+            <a:off x="406301" y="870942"/>
+            <a:ext cx="8498026" cy="213271"/>
+          </a:xfrm>
+          <a:prstGeom prst="rect">
+            <a:avLst/>
+          </a:prstGeom>
+          <a:noFill/>
+          <a:ln/>
+        </p:spPr>
+        <p:txBody>
+          <a:bodyPr wrap="square" lIns="0" tIns="0" rIns="0" bIns="0" rtlCol="0" anchor="t"/>
+          <a:lstStyle/>
+          <a:p>
+            <a:pPr algn="l" indent="0" marL="0">
+              <a:lnSpc>
+                <a:spcPts val="1680"/>
+              </a:lnSpc>
+              <a:spcBef>
+                <a:spcPts val="300"/>
+              </a:spcBef>
+              <a:spcAft>
+                <a:spcPts val="300"/>
+              </a:spcAft>
+              <a:buNone/>
+            </a:pPr>
+            <a:r>
+              <a:rPr lang="en-US" sz="1200" dirty="0">
+                <a:solidFill>
+                  <a:srgbClr val="1C2833"/>
+                </a:solidFill>
+                <a:latin typeface="Arial" pitchFamily="34" charset="0"/>
+                <a:ea typeface="Arial" pitchFamily="34" charset="-122"/>
+                <a:cs typeface="Arial" pitchFamily="34" charset="-120"/>
+              </a:rPr>
+              <a:t>Groups present in 30 seconds each.</a:t>
+            </a:r>
+            <a:endParaRPr lang="en-US" sz="1200" dirty="0"/>
+          </a:p>
+        </p:txBody>
+      </p:sp>
+      <p:sp>
+        <p:nvSpPr>
+          <p:cNvPr id="5" name="Text 3"/>
+          <p:cNvSpPr/>
+          <p:nvPr/>
+        </p:nvSpPr>
+        <p:spPr>
+          <a:xfrm>
+            <a:off x="406301" y="4434929"/>
+            <a:ext cx="8498026" cy="213271"/>
+          </a:xfrm>
+          <a:prstGeom prst="rect">
+            <a:avLst/>
+          </a:prstGeom>
+          <a:noFill/>
+          <a:ln/>
+        </p:spPr>
+        <p:txBody>
+          <a:bodyPr wrap="square" lIns="0" tIns="0" rIns="0" bIns="0" rtlCol="0" anchor="t"/>
+          <a:lstStyle/>
+          <a:p>
+            <a:pPr algn="l" indent="0" marL="0">
+              <a:lnSpc>
+                <a:spcPts val="1680"/>
+              </a:lnSpc>
+              <a:spcBef>
+                <a:spcPts val="300"/>
+              </a:spcBef>
+              <a:spcAft>
+                <a:spcPts val="300"/>
+              </a:spcAft>
+              <a:buNone/>
+            </a:pPr>
+            <a:r>
+              <a:rPr lang="en-US" sz="1200" dirty="0">
+                <a:solidFill>
+                  <a:srgbClr val="1C2833"/>
+                </a:solidFill>
+                <a:latin typeface="Arial" pitchFamily="34" charset="0"/>
+                <a:ea typeface="Arial" pitchFamily="34" charset="-122"/>
+                <a:cs typeface="Arial" pitchFamily="34" charset="-120"/>
+              </a:rPr>
+              <a:t>Middle ·  · IKS Curriculum</a:t>
+            </a:r>
+            <a:endParaRPr lang="en-US" sz="1200" dirty="0"/>
+          </a:p>
+        </p:txBody>
+      </p:sp>
+    </p:spTree>
+  </p:cSld>
+  <p:clrMapOvr>
+    <a:masterClrMapping/>
+  </p:clrMapOvr>
+</p:sld>
+</file>
+
+<file path=ppt/slides/slide16.xml><?xml version="1.0" encoding="utf-8"?>
+<p:sld xmlns:a="http://schemas.openxmlformats.org/drawingml/2006/main" xmlns:r="http://schemas.openxmlformats.org/officeDocument/2006/relationships" xmlns:p="http://schemas.openxmlformats.org/presentationml/2006/main">
+  <p:cSld name="Slide 16">
+    <p:bg>
+      <p:bgPr>
+        <a:solidFill>
+          <a:srgbClr val="FFFFFF"/>
+        </a:solidFill>
+      </p:bgPr>
+    </p:bg>
+    <p:spTree>
+      <p:nvGrpSpPr>
+        <p:cNvPr id="1" name=""/>
+        <p:cNvGrpSpPr/>
+        <p:nvPr/>
+      </p:nvGrpSpPr>
+      <p:grpSpPr>
+        <a:xfrm>
+          <a:off x="0" y="0"/>
+          <a:ext cx="0" cy="0"/>
+          <a:chOff x="0" y="0"/>
+          <a:chExt cx="0" cy="0"/>
+        </a:xfrm>
+      </p:grpSpPr>
+      <p:sp>
+        <p:nvSpPr>
+          <p:cNvPr id="2" name="Text 0"/>
+          <p:cNvSpPr/>
+          <p:nvPr/>
+        </p:nvSpPr>
+        <p:spPr>
+          <a:xfrm>
+            <a:off x="0" y="0"/>
+            <a:ext cx="9144000" cy="101501"/>
+          </a:xfrm>
+          <a:prstGeom prst="rect">
+            <a:avLst/>
+          </a:prstGeom>
+          <a:solidFill>
+            <a:srgbClr val="277884"/>
+          </a:solidFill>
+          <a:ln/>
+        </p:spPr>
+        <p:txBody>
+          <a:bodyPr wrap="square" rtlCol="0" anchor="ctr"/>
+          <a:lstStyle/>
+          <a:p>
+            <a:pPr indent="0" marL="0">
+              <a:buNone/>
+            </a:pPr>
+            <a:endParaRPr lang="en-US" dirty="0"/>
+          </a:p>
+        </p:txBody>
+      </p:sp>
+      <p:sp>
+        <p:nvSpPr>
+          <p:cNvPr id="3" name="Text 1"/>
+          <p:cNvSpPr/>
+          <p:nvPr/>
+        </p:nvSpPr>
+        <p:spPr>
+          <a:xfrm>
+            <a:off x="406301" y="457051"/>
+            <a:ext cx="8498026" cy="274290"/>
+          </a:xfrm>
+          <a:prstGeom prst="rect">
+            <a:avLst/>
+          </a:prstGeom>
+          <a:noFill/>
+          <a:ln/>
+        </p:spPr>
+        <p:txBody>
+          <a:bodyPr wrap="square" lIns="0" tIns="0" rIns="0" bIns="0" rtlCol="0" anchor="t"/>
+          <a:lstStyle/>
+          <a:p>
+            <a:pPr algn="l" indent="0" marL="0">
+              <a:lnSpc>
+                <a:spcPts val="2160"/>
+              </a:lnSpc>
+              <a:spcBef>
+                <a:spcPts val="600"/>
+              </a:spcBef>
+              <a:spcAft>
+                <a:spcPts val="800"/>
+              </a:spcAft>
+              <a:buNone/>
+            </a:pPr>
+            <a:r>
+              <a:rPr lang="en-US" sz="1800" b="1" dirty="0">
+                <a:solidFill>
+                  <a:srgbClr val="FE4447"/>
+                </a:solidFill>
+                <a:latin typeface="Georgia" pitchFamily="34" charset="0"/>
+                <a:ea typeface="Georgia" pitchFamily="34" charset="-122"/>
+                <a:cs typeface="Georgia" pitchFamily="34" charset="-120"/>
+              </a:rPr>
+              <a:t>Wrap-up (5 min)</a:t>
+            </a:r>
+            <a:endParaRPr lang="en-US" sz="1800" dirty="0"/>
+          </a:p>
+        </p:txBody>
+      </p:sp>
+      <p:sp>
+        <p:nvSpPr>
+          <p:cNvPr id="4" name="Text 2"/>
+          <p:cNvSpPr/>
+          <p:nvPr/>
+        </p:nvSpPr>
+        <p:spPr>
+          <a:xfrm>
+            <a:off x="634901" y="883593"/>
+            <a:ext cx="8102798" cy="937022"/>
+          </a:xfrm>
+          <a:prstGeom prst="rect">
+            <a:avLst/>
+          </a:prstGeom>
+          <a:noFill/>
+          <a:ln/>
+        </p:spPr>
+        <p:txBody>
+          <a:bodyPr wrap="square" lIns="0" tIns="0" rIns="0" bIns="0" rtlCol="0" anchor="t"/>
+          <a:lstStyle/>
+          <a:p>
+            <a:pPr algn="l" marL="342900" indent="-342900">
+              <a:lnSpc>
+                <a:spcPts val="1620"/>
+              </a:lnSpc>
+              <a:spcAft>
+                <a:spcPts val="300"/>
+              </a:spcAft>
+              <a:buSzPct val="100000"/>
+              <a:buChar char="•"/>
+            </a:pPr>
+            <a:r>
+              <a:rPr lang="en-US" sz="1200" b="1" dirty="0">
+                <a:solidFill>
+                  <a:srgbClr val="1C2833"/>
+                </a:solidFill>
+                <a:latin typeface="Arial" pitchFamily="34" charset="0"/>
+                <a:ea typeface="Arial" pitchFamily="34" charset="-122"/>
+                <a:cs typeface="Arial" pitchFamily="34" charset="-120"/>
+              </a:rPr>
+              <a:t>Daily prompt.</a:t>
+            </a:r>
+            <a:pPr algn="l" indent="0" marL="0">
+              <a:lnSpc>
+                <a:spcPts val="1620"/>
+              </a:lnSpc>
+              <a:spcAft>
+                <a:spcPts val="300"/>
+              </a:spcAft>
+              <a:buNone/>
+            </a:pPr>
+            <a:r>
+              <a:rPr lang="en-US" sz="1200" dirty="0">
+                <a:solidFill>
+                  <a:srgbClr val="1C2833"/>
+                </a:solidFill>
+                <a:latin typeface="Arial" pitchFamily="34" charset="0"/>
+                <a:ea typeface="Arial" pitchFamily="34" charset="-122"/>
+                <a:cs typeface="Arial" pitchFamily="34" charset="-120"/>
+              </a:rPr>
+              <a:t> </a:t>
+            </a:r>
+            <a:pPr algn="l" indent="0" marL="0">
+              <a:lnSpc>
+                <a:spcPts val="1620"/>
+              </a:lnSpc>
+              <a:spcAft>
+                <a:spcPts val="300"/>
+              </a:spcAft>
+              <a:buNone/>
+            </a:pPr>
+            <a:r>
+              <a:rPr lang="en-US" sz="1200" i="1" dirty="0">
+                <a:solidFill>
+                  <a:srgbClr val="1C2833"/>
+                </a:solidFill>
+                <a:latin typeface="Arial" pitchFamily="34" charset="0"/>
+                <a:ea typeface="Arial" pitchFamily="34" charset="-122"/>
+                <a:cs typeface="Arial" pitchFamily="34" charset="-120"/>
+              </a:rPr>
+              <a:t>"Do you know of any patch of land near you — even a small one — that has been protected for unusual reasons?"</a:t>
+            </a:r>
+            <a:pPr algn="l" indent="0" marL="0">
+              <a:lnSpc>
+                <a:spcPts val="1620"/>
+              </a:lnSpc>
+              <a:spcAft>
+                <a:spcPts val="300"/>
+              </a:spcAft>
+              <a:buNone/>
+            </a:pPr>
+            <a:r>
+              <a:rPr lang="en-US" sz="1200" dirty="0">
+                <a:solidFill>
+                  <a:srgbClr val="1C2833"/>
+                </a:solidFill>
+                <a:latin typeface="Arial" pitchFamily="34" charset="0"/>
+                <a:ea typeface="Arial" pitchFamily="34" charset="-122"/>
+                <a:cs typeface="Arial" pitchFamily="34" charset="-120"/>
+              </a:rPr>
+              <a:t> (A graveyard. A shrine. A temple compound. A lawyer's office's overgrown corner.) Each of these may function as an accidental biodiversity refuge.</a:t>
+            </a:r>
+            <a:endParaRPr lang="en-US" sz="1200" dirty="0"/>
+          </a:p>
+          <a:p>
+            <a:pPr algn="l" marL="342900" indent="-342900">
+              <a:lnSpc>
+                <a:spcPts val="1620"/>
+              </a:lnSpc>
+              <a:spcAft>
+                <a:spcPts val="300"/>
+              </a:spcAft>
+              <a:buSzPct val="100000"/>
+              <a:buChar char="•"/>
+            </a:pPr>
+            <a:r>
+              <a:rPr lang="en-US" sz="1200" dirty="0">
+                <a:solidFill>
+                  <a:srgbClr val="1C2833"/>
+                </a:solidFill>
+                <a:latin typeface="Arial" pitchFamily="34" charset="0"/>
+                <a:ea typeface="Arial" pitchFamily="34" charset="-122"/>
+                <a:cs typeface="Arial" pitchFamily="34" charset="-120"/>
+              </a:rPr>
+              <a:t>Preview Day 5: </a:t>
+            </a:r>
+            <a:pPr algn="l" indent="0" marL="0">
+              <a:lnSpc>
+                <a:spcPts val="1620"/>
+              </a:lnSpc>
+              <a:spcAft>
+                <a:spcPts val="300"/>
+              </a:spcAft>
+              <a:buNone/>
+            </a:pPr>
+            <a:r>
+              <a:rPr lang="en-US" sz="1200" i="1" dirty="0">
+                <a:solidFill>
+                  <a:srgbClr val="1C2833"/>
+                </a:solidFill>
+                <a:latin typeface="Arial" pitchFamily="34" charset="0"/>
+                <a:ea typeface="Arial" pitchFamily="34" charset="-122"/>
+                <a:cs typeface="Arial" pitchFamily="34" charset="-120"/>
+              </a:rPr>
+              <a:t>"Tomorrow we read the Bhagavad Gītā on why giving back is built into the ecological cycle."</a:t>
+            </a:r>
+            <a:endParaRPr lang="en-US" sz="1200" dirty="0"/>
+          </a:p>
+        </p:txBody>
+      </p:sp>
+      <p:sp>
+        <p:nvSpPr>
+          <p:cNvPr id="5" name="Text 3"/>
+          <p:cNvSpPr/>
+          <p:nvPr/>
+        </p:nvSpPr>
+        <p:spPr>
+          <a:xfrm>
+            <a:off x="406301" y="4434929"/>
+            <a:ext cx="8498026" cy="213271"/>
+          </a:xfrm>
+          <a:prstGeom prst="rect">
+            <a:avLst/>
+          </a:prstGeom>
+          <a:noFill/>
+          <a:ln/>
+        </p:spPr>
+        <p:txBody>
+          <a:bodyPr wrap="square" lIns="0" tIns="0" rIns="0" bIns="0" rtlCol="0" anchor="t"/>
+          <a:lstStyle/>
+          <a:p>
+            <a:pPr algn="l" indent="0" marL="0">
+              <a:lnSpc>
+                <a:spcPts val="1680"/>
+              </a:lnSpc>
+              <a:spcBef>
+                <a:spcPts val="300"/>
+              </a:spcBef>
+              <a:spcAft>
+                <a:spcPts val="300"/>
+              </a:spcAft>
+              <a:buNone/>
+            </a:pPr>
+            <a:r>
+              <a:rPr lang="en-US" sz="1200" dirty="0">
+                <a:solidFill>
+                  <a:srgbClr val="1C2833"/>
+                </a:solidFill>
+                <a:latin typeface="Arial" pitchFamily="34" charset="0"/>
+                <a:ea typeface="Arial" pitchFamily="34" charset="-122"/>
+                <a:cs typeface="Arial" pitchFamily="34" charset="-120"/>
+              </a:rPr>
+              <a:t>Middle ·  · IKS Curriculum</a:t>
+            </a:r>
+            <a:endParaRPr lang="en-US" sz="1200" dirty="0"/>
+          </a:p>
+        </p:txBody>
+      </p:sp>
+    </p:spTree>
+  </p:cSld>
+  <p:clrMapOvr>
+    <a:masterClrMapping/>
+  </p:clrMapOvr>
+</p:sld>
+</file>
+
+<file path=ppt/slides/slide17.xml><?xml version="1.0" encoding="utf-8"?>
+<p:sld xmlns:a="http://schemas.openxmlformats.org/drawingml/2006/main" xmlns:r="http://schemas.openxmlformats.org/officeDocument/2006/relationships" xmlns:p="http://schemas.openxmlformats.org/presentationml/2006/main">
+  <p:cSld name="Slide 17">
+    <p:bg>
+      <p:bgPr>
+        <a:solidFill>
+          <a:srgbClr val="FFFFFF"/>
+        </a:solidFill>
+      </p:bgPr>
+    </p:bg>
+    <p:spTree>
+      <p:nvGrpSpPr>
+        <p:cNvPr id="1" name=""/>
+        <p:cNvGrpSpPr/>
+        <p:nvPr/>
+      </p:nvGrpSpPr>
+      <p:grpSpPr>
+        <a:xfrm>
+          <a:off x="0" y="0"/>
+          <a:ext cx="0" cy="0"/>
+          <a:chOff x="0" y="0"/>
+          <a:chExt cx="0" cy="0"/>
+        </a:xfrm>
+      </p:grpSpPr>
+      <p:sp>
+        <p:nvSpPr>
+          <p:cNvPr id="2" name="Text 0"/>
+          <p:cNvSpPr/>
+          <p:nvPr/>
+        </p:nvSpPr>
+        <p:spPr>
+          <a:xfrm>
+            <a:off x="0" y="0"/>
+            <a:ext cx="9144000" cy="101501"/>
+          </a:xfrm>
+          <a:prstGeom prst="rect">
+            <a:avLst/>
+          </a:prstGeom>
+          <a:solidFill>
+            <a:srgbClr val="277884"/>
+          </a:solidFill>
+          <a:ln/>
+        </p:spPr>
+        <p:txBody>
+          <a:bodyPr wrap="square" rtlCol="0" anchor="ctr"/>
+          <a:lstStyle/>
+          <a:p>
+            <a:pPr indent="0" marL="0">
+              <a:buNone/>
+            </a:pPr>
+            <a:endParaRPr lang="en-US" dirty="0"/>
+          </a:p>
+        </p:txBody>
+      </p:sp>
+      <p:sp>
+        <p:nvSpPr>
+          <p:cNvPr id="3" name="Text 1"/>
+          <p:cNvSpPr/>
+          <p:nvPr/>
+        </p:nvSpPr>
+        <p:spPr>
+          <a:xfrm>
+            <a:off x="406301" y="457051"/>
+            <a:ext cx="8498026" cy="274290"/>
+          </a:xfrm>
+          <a:prstGeom prst="rect">
+            <a:avLst/>
+          </a:prstGeom>
+          <a:noFill/>
+          <a:ln/>
+        </p:spPr>
+        <p:txBody>
+          <a:bodyPr wrap="square" lIns="0" tIns="0" rIns="0" bIns="0" rtlCol="0" anchor="t"/>
+          <a:lstStyle/>
+          <a:p>
+            <a:pPr algn="l" indent="0" marL="0">
+              <a:lnSpc>
+                <a:spcPts val="2160"/>
+              </a:lnSpc>
+              <a:spcBef>
+                <a:spcPts val="600"/>
+              </a:spcBef>
+              <a:spcAft>
+                <a:spcPts val="800"/>
+              </a:spcAft>
+              <a:buNone/>
+            </a:pPr>
+            <a:r>
+              <a:rPr lang="en-US" sz="1800" b="1" dirty="0">
+                <a:solidFill>
+                  <a:srgbClr val="FE4447"/>
+                </a:solidFill>
+                <a:latin typeface="Georgia" pitchFamily="34" charset="0"/>
+                <a:ea typeface="Georgia" pitchFamily="34" charset="-122"/>
+                <a:cs typeface="Georgia" pitchFamily="34" charset="-120"/>
+              </a:rPr>
+              <a:t>Student-facing content</a:t>
+            </a:r>
+            <a:endParaRPr lang="en-US" sz="1800" dirty="0"/>
+          </a:p>
+        </p:txBody>
+      </p:sp>
+      <p:sp>
+        <p:nvSpPr>
+          <p:cNvPr id="4" name="Text 2"/>
+          <p:cNvSpPr/>
+          <p:nvPr/>
+        </p:nvSpPr>
+        <p:spPr>
+          <a:xfrm>
+            <a:off x="406301" y="883593"/>
+            <a:ext cx="8331398" cy="3419475"/>
+          </a:xfrm>
+          <a:prstGeom prst="rect">
+            <a:avLst/>
+          </a:prstGeom>
+          <a:solidFill>
+            <a:srgbClr val="F4F8F9"/>
+          </a:solidFill>
+          <a:ln/>
+        </p:spPr>
+        <p:txBody>
+          <a:bodyPr wrap="square" rtlCol="0" anchor="ctr"/>
+          <a:lstStyle/>
+          <a:p>
+            <a:pPr indent="0" marL="0">
+              <a:buNone/>
+            </a:pPr>
+            <a:endParaRPr lang="en-US" dirty="0"/>
+          </a:p>
+        </p:txBody>
+      </p:sp>
+      <p:sp>
+        <p:nvSpPr>
+          <p:cNvPr id="5" name="Shape 3"/>
+          <p:cNvSpPr/>
+          <p:nvPr/>
+        </p:nvSpPr>
+        <p:spPr>
+          <a:xfrm>
+            <a:off x="434876" y="883593"/>
+            <a:ext cx="0" cy="3419475"/>
+          </a:xfrm>
+          <a:prstGeom prst="line">
+            <a:avLst/>
+          </a:prstGeom>
+          <a:noFill/>
+          <a:ln w="57150">
+            <a:solidFill>
+              <a:srgbClr val="FE4447"/>
+            </a:solidFill>
+            <a:prstDash val="solid"/>
+          </a:ln>
+        </p:spPr>
+      </p:sp>
+      <p:sp>
+        <p:nvSpPr>
+          <p:cNvPr id="6" name="Text 4"/>
+          <p:cNvSpPr/>
+          <p:nvPr/>
+        </p:nvSpPr>
+        <p:spPr>
+          <a:xfrm>
+            <a:off x="692051" y="1074093"/>
+            <a:ext cx="7973389" cy="461963"/>
+          </a:xfrm>
+          <a:prstGeom prst="rect">
+            <a:avLst/>
+          </a:prstGeom>
+          <a:noFill/>
+          <a:ln/>
+        </p:spPr>
+        <p:txBody>
+          <a:bodyPr wrap="square" lIns="0" tIns="0" rIns="0" bIns="0" rtlCol="0" anchor="t"/>
+          <a:lstStyle/>
+          <a:p>
+            <a:pPr algn="l" indent="0" marL="0">
+              <a:lnSpc>
+                <a:spcPts val="1820"/>
+              </a:lnSpc>
+              <a:spcBef>
+                <a:spcPts val="300"/>
+              </a:spcBef>
+              <a:spcAft>
+                <a:spcPts val="300"/>
+              </a:spcAft>
+              <a:buNone/>
+            </a:pPr>
+            <a:r>
+              <a:rPr lang="en-US" sz="1300" b="1" i="1" dirty="0">
+                <a:solidFill>
+                  <a:srgbClr val="1C2833"/>
+                </a:solidFill>
+                <a:latin typeface="Georgia" pitchFamily="34" charset="0"/>
+                <a:ea typeface="Georgia" pitchFamily="34" charset="-122"/>
+                <a:cs typeface="Georgia" pitchFamily="34" charset="-120"/>
+              </a:rPr>
+              <a:t>Sacred groves</a:t>
+            </a:r>
+            <a:pPr algn="l" indent="0" marL="0">
+              <a:lnSpc>
+                <a:spcPts val="1820"/>
+              </a:lnSpc>
+              <a:spcBef>
+                <a:spcPts val="300"/>
+              </a:spcBef>
+              <a:spcAft>
+                <a:spcPts val="300"/>
+              </a:spcAft>
+              <a:buNone/>
+            </a:pPr>
+            <a:r>
+              <a:rPr lang="en-US" sz="1300" dirty="0">
+                <a:solidFill>
+                  <a:srgbClr val="1C2833"/>
+                </a:solidFill>
+                <a:latin typeface="Georgia" pitchFamily="34" charset="0"/>
+                <a:ea typeface="Georgia" pitchFamily="34" charset="-122"/>
+                <a:cs typeface="Georgia" pitchFamily="34" charset="-120"/>
+              </a:rPr>
+              <a:t> are patches of forest that survived because a community treated them as religious — and that religious status meant rules against cutting and hunting.</a:t>
+            </a:r>
+            <a:endParaRPr lang="en-US" sz="1300" dirty="0"/>
+          </a:p>
+        </p:txBody>
+      </p:sp>
+      <p:sp>
+        <p:nvSpPr>
+          <p:cNvPr id="7" name="Text 5"/>
+          <p:cNvSpPr/>
+          <p:nvPr/>
+        </p:nvSpPr>
+        <p:spPr>
+          <a:xfrm>
+            <a:off x="692051" y="1574155"/>
+            <a:ext cx="7973389" cy="230981"/>
+          </a:xfrm>
+          <a:prstGeom prst="rect">
+            <a:avLst/>
+          </a:prstGeom>
+          <a:noFill/>
+          <a:ln/>
+        </p:spPr>
+        <p:txBody>
+          <a:bodyPr wrap="square" lIns="0" tIns="0" rIns="0" bIns="0" rtlCol="0" anchor="t"/>
+          <a:lstStyle/>
+          <a:p>
+            <a:pPr algn="l" indent="0" marL="0">
+              <a:lnSpc>
+                <a:spcPts val="1820"/>
+              </a:lnSpc>
+              <a:spcBef>
+                <a:spcPts val="300"/>
+              </a:spcBef>
+              <a:spcAft>
+                <a:spcPts val="300"/>
+              </a:spcAft>
+              <a:buNone/>
+            </a:pPr>
+            <a:r>
+              <a:rPr lang="en-US" sz="1300" i="1" dirty="0">
+                <a:solidFill>
+                  <a:srgbClr val="1C2833"/>
+                </a:solidFill>
+                <a:latin typeface="Georgia" pitchFamily="34" charset="0"/>
+                <a:ea typeface="Georgia" pitchFamily="34" charset="-122"/>
+                <a:cs typeface="Georgia" pitchFamily="34" charset="-120"/>
+              </a:rPr>
+              <a:t>Local names you should know:</a:t>
+            </a:r>
+            <a:endParaRPr lang="en-US" sz="1300" dirty="0"/>
+          </a:p>
+        </p:txBody>
+      </p:sp>
+      <p:sp>
+        <p:nvSpPr>
+          <p:cNvPr id="8" name="Text 6"/>
+          <p:cNvSpPr/>
+          <p:nvPr/>
+        </p:nvSpPr>
+        <p:spPr>
+          <a:xfrm>
+            <a:off x="692051" y="1843236"/>
+            <a:ext cx="7973389" cy="230981"/>
+          </a:xfrm>
+          <a:prstGeom prst="rect">
+            <a:avLst/>
+          </a:prstGeom>
+          <a:noFill/>
+          <a:ln/>
+        </p:spPr>
+        <p:txBody>
+          <a:bodyPr wrap="square" lIns="0" tIns="0" rIns="0" bIns="0" rtlCol="0" anchor="t"/>
+          <a:lstStyle/>
+          <a:p>
+            <a:pPr algn="l" indent="0" marL="0">
+              <a:lnSpc>
+                <a:spcPts val="1820"/>
+              </a:lnSpc>
+              <a:spcBef>
+                <a:spcPts val="300"/>
+              </a:spcBef>
+              <a:spcAft>
+                <a:spcPts val="300"/>
+              </a:spcAft>
+              <a:buNone/>
+            </a:pPr>
+            <a:r>
+              <a:rPr lang="en-US" sz="1300" i="1" dirty="0">
+                <a:solidFill>
+                  <a:srgbClr val="1C2833"/>
+                </a:solidFill>
+                <a:latin typeface="Georgia" pitchFamily="34" charset="0"/>
+                <a:ea typeface="Georgia" pitchFamily="34" charset="-122"/>
+                <a:cs typeface="Georgia" pitchFamily="34" charset="-120"/>
+              </a:rPr>
+              <a:t>devarakāḍu</a:t>
+            </a:r>
+            <a:pPr algn="l" indent="0" marL="0">
+              <a:lnSpc>
+                <a:spcPts val="1820"/>
+              </a:lnSpc>
+              <a:spcBef>
+                <a:spcPts val="300"/>
+              </a:spcBef>
+              <a:spcAft>
+                <a:spcPts val="300"/>
+              </a:spcAft>
+              <a:buNone/>
+            </a:pPr>
+            <a:r>
+              <a:rPr lang="en-US" sz="1300" dirty="0">
+                <a:solidFill>
+                  <a:srgbClr val="1C2833"/>
+                </a:solidFill>
+                <a:latin typeface="Georgia" pitchFamily="34" charset="0"/>
+                <a:ea typeface="Georgia" pitchFamily="34" charset="-122"/>
+                <a:cs typeface="Georgia" pitchFamily="34" charset="-120"/>
+              </a:rPr>
+              <a:t> — Karnataka</a:t>
+            </a:r>
+            <a:endParaRPr lang="en-US" sz="1300" dirty="0"/>
+          </a:p>
+        </p:txBody>
+      </p:sp>
+      <p:sp>
+        <p:nvSpPr>
+          <p:cNvPr id="9" name="Text 7"/>
+          <p:cNvSpPr/>
+          <p:nvPr/>
+        </p:nvSpPr>
+        <p:spPr>
+          <a:xfrm>
+            <a:off x="692051" y="2112318"/>
+            <a:ext cx="7973389" cy="230981"/>
+          </a:xfrm>
+          <a:prstGeom prst="rect">
+            <a:avLst/>
+          </a:prstGeom>
+          <a:noFill/>
+          <a:ln/>
+        </p:spPr>
+        <p:txBody>
+          <a:bodyPr wrap="square" lIns="0" tIns="0" rIns="0" bIns="0" rtlCol="0" anchor="t"/>
+          <a:lstStyle/>
+          <a:p>
+            <a:pPr algn="l" indent="0" marL="0">
+              <a:lnSpc>
+                <a:spcPts val="1820"/>
+              </a:lnSpc>
+              <a:spcBef>
+                <a:spcPts val="300"/>
+              </a:spcBef>
+              <a:spcAft>
+                <a:spcPts val="300"/>
+              </a:spcAft>
+              <a:buNone/>
+            </a:pPr>
+            <a:r>
+              <a:rPr lang="en-US" sz="1300" i="1" dirty="0">
+                <a:solidFill>
+                  <a:srgbClr val="1C2833"/>
+                </a:solidFill>
+                <a:latin typeface="Georgia" pitchFamily="34" charset="0"/>
+                <a:ea typeface="Georgia" pitchFamily="34" charset="-122"/>
+                <a:cs typeface="Georgia" pitchFamily="34" charset="-120"/>
+              </a:rPr>
+              <a:t>sarna</a:t>
+            </a:r>
+            <a:pPr algn="l" indent="0" marL="0">
+              <a:lnSpc>
+                <a:spcPts val="1820"/>
+              </a:lnSpc>
+              <a:spcBef>
+                <a:spcPts val="300"/>
+              </a:spcBef>
+              <a:spcAft>
+                <a:spcPts val="300"/>
+              </a:spcAft>
+              <a:buNone/>
+            </a:pPr>
+            <a:r>
+              <a:rPr lang="en-US" sz="1300" dirty="0">
+                <a:solidFill>
+                  <a:srgbClr val="1C2833"/>
+                </a:solidFill>
+                <a:latin typeface="Georgia" pitchFamily="34" charset="0"/>
+                <a:ea typeface="Georgia" pitchFamily="34" charset="-122"/>
+                <a:cs typeface="Georgia" pitchFamily="34" charset="-120"/>
+              </a:rPr>
+              <a:t> — Adivasi belt (Jharkhand, etc.)</a:t>
+            </a:r>
+            <a:endParaRPr lang="en-US" sz="1300" dirty="0"/>
+          </a:p>
+        </p:txBody>
+      </p:sp>
+      <p:sp>
+        <p:nvSpPr>
+          <p:cNvPr id="10" name="Text 8"/>
+          <p:cNvSpPr/>
+          <p:nvPr/>
+        </p:nvSpPr>
+        <p:spPr>
+          <a:xfrm>
+            <a:off x="692051" y="2381399"/>
+            <a:ext cx="7973389" cy="230981"/>
+          </a:xfrm>
+          <a:prstGeom prst="rect">
+            <a:avLst/>
+          </a:prstGeom>
+          <a:noFill/>
+          <a:ln/>
+        </p:spPr>
+        <p:txBody>
+          <a:bodyPr wrap="square" lIns="0" tIns="0" rIns="0" bIns="0" rtlCol="0" anchor="t"/>
+          <a:lstStyle/>
+          <a:p>
+            <a:pPr algn="l" indent="0" marL="0">
+              <a:lnSpc>
+                <a:spcPts val="1820"/>
+              </a:lnSpc>
+              <a:spcBef>
+                <a:spcPts val="300"/>
+              </a:spcBef>
+              <a:spcAft>
+                <a:spcPts val="300"/>
+              </a:spcAft>
+              <a:buNone/>
+            </a:pPr>
+            <a:r>
+              <a:rPr lang="en-US" sz="1300" i="1" dirty="0">
+                <a:solidFill>
+                  <a:srgbClr val="1C2833"/>
+                </a:solidFill>
+                <a:latin typeface="Georgia" pitchFamily="34" charset="0"/>
+                <a:ea typeface="Georgia" pitchFamily="34" charset="-122"/>
+                <a:cs typeface="Georgia" pitchFamily="34" charset="-120"/>
+              </a:rPr>
+              <a:t>kāvu</a:t>
+            </a:r>
+            <a:pPr algn="l" indent="0" marL="0">
+              <a:lnSpc>
+                <a:spcPts val="1820"/>
+              </a:lnSpc>
+              <a:spcBef>
+                <a:spcPts val="300"/>
+              </a:spcBef>
+              <a:spcAft>
+                <a:spcPts val="300"/>
+              </a:spcAft>
+              <a:buNone/>
+            </a:pPr>
+            <a:r>
+              <a:rPr lang="en-US" sz="1300" dirty="0">
+                <a:solidFill>
+                  <a:srgbClr val="1C2833"/>
+                </a:solidFill>
+                <a:latin typeface="Georgia" pitchFamily="34" charset="0"/>
+                <a:ea typeface="Georgia" pitchFamily="34" charset="-122"/>
+                <a:cs typeface="Georgia" pitchFamily="34" charset="-120"/>
+              </a:rPr>
+              <a:t> — Kerala</a:t>
+            </a:r>
+            <a:endParaRPr lang="en-US" sz="1300" dirty="0"/>
+          </a:p>
+        </p:txBody>
+      </p:sp>
+      <p:sp>
+        <p:nvSpPr>
+          <p:cNvPr id="11" name="Text 9"/>
+          <p:cNvSpPr/>
+          <p:nvPr/>
+        </p:nvSpPr>
+        <p:spPr>
+          <a:xfrm>
+            <a:off x="692051" y="2650480"/>
+            <a:ext cx="7973389" cy="230981"/>
+          </a:xfrm>
+          <a:prstGeom prst="rect">
+            <a:avLst/>
+          </a:prstGeom>
+          <a:noFill/>
+          <a:ln/>
+        </p:spPr>
+        <p:txBody>
+          <a:bodyPr wrap="square" lIns="0" tIns="0" rIns="0" bIns="0" rtlCol="0" anchor="t"/>
+          <a:lstStyle/>
+          <a:p>
+            <a:pPr algn="l" indent="0" marL="0">
+              <a:lnSpc>
+                <a:spcPts val="1820"/>
+              </a:lnSpc>
+              <a:spcBef>
+                <a:spcPts val="300"/>
+              </a:spcBef>
+              <a:spcAft>
+                <a:spcPts val="300"/>
+              </a:spcAft>
+              <a:buNone/>
+            </a:pPr>
+            <a:r>
+              <a:rPr lang="en-US" sz="1300" i="1" dirty="0">
+                <a:solidFill>
+                  <a:srgbClr val="1C2833"/>
+                </a:solidFill>
+                <a:latin typeface="Georgia" pitchFamily="34" charset="0"/>
+                <a:ea typeface="Georgia" pitchFamily="34" charset="-122"/>
+                <a:cs typeface="Georgia" pitchFamily="34" charset="-120"/>
+              </a:rPr>
+              <a:t>orans</a:t>
+            </a:r>
+            <a:pPr algn="l" indent="0" marL="0">
+              <a:lnSpc>
+                <a:spcPts val="1820"/>
+              </a:lnSpc>
+              <a:spcBef>
+                <a:spcPts val="300"/>
+              </a:spcBef>
+              <a:spcAft>
+                <a:spcPts val="300"/>
+              </a:spcAft>
+              <a:buNone/>
+            </a:pPr>
+            <a:r>
+              <a:rPr lang="en-US" sz="1300" dirty="0">
+                <a:solidFill>
+                  <a:srgbClr val="1C2833"/>
+                </a:solidFill>
+                <a:latin typeface="Georgia" pitchFamily="34" charset="0"/>
+                <a:ea typeface="Georgia" pitchFamily="34" charset="-122"/>
+                <a:cs typeface="Georgia" pitchFamily="34" charset="-120"/>
+              </a:rPr>
+              <a:t> — Rajasthan</a:t>
+            </a:r>
+            <a:endParaRPr lang="en-US" sz="1300" dirty="0"/>
+          </a:p>
+        </p:txBody>
+      </p:sp>
+      <p:sp>
+        <p:nvSpPr>
+          <p:cNvPr id="12" name="Text 10"/>
+          <p:cNvSpPr/>
+          <p:nvPr/>
+        </p:nvSpPr>
+        <p:spPr>
+          <a:xfrm>
+            <a:off x="692051" y="2919561"/>
+            <a:ext cx="7973389" cy="692944"/>
+          </a:xfrm>
+          <a:prstGeom prst="rect">
+            <a:avLst/>
+          </a:prstGeom>
+          <a:noFill/>
+          <a:ln/>
+        </p:spPr>
+        <p:txBody>
+          <a:bodyPr wrap="square" lIns="0" tIns="0" rIns="0" bIns="0" rtlCol="0" anchor="t"/>
+          <a:lstStyle/>
+          <a:p>
+            <a:pPr algn="l" indent="0" marL="0">
+              <a:lnSpc>
+                <a:spcPts val="1820"/>
+              </a:lnSpc>
+              <a:spcBef>
+                <a:spcPts val="300"/>
+              </a:spcBef>
+              <a:spcAft>
+                <a:spcPts val="300"/>
+              </a:spcAft>
+              <a:buNone/>
+            </a:pPr>
+            <a:r>
+              <a:rPr lang="en-US" sz="1300" i="1" dirty="0">
+                <a:solidFill>
+                  <a:srgbClr val="1C2833"/>
+                </a:solidFill>
+                <a:latin typeface="Georgia" pitchFamily="34" charset="0"/>
+                <a:ea typeface="Georgia" pitchFamily="34" charset="-122"/>
+                <a:cs typeface="Georgia" pitchFamily="34" charset="-120"/>
+              </a:rPr>
+              <a:t>In the Western Ghats, ecologists have documented more than 1,000 sacred groves. Some are only a few trees; some are several hectares. Together they preserve plants and animals that survive nowhere else in their region.</a:t>
+            </a:r>
+            <a:endParaRPr lang="en-US" sz="1300" dirty="0"/>
+          </a:p>
+        </p:txBody>
+      </p:sp>
+      <p:sp>
+        <p:nvSpPr>
+          <p:cNvPr id="13" name="Text 11"/>
+          <p:cNvSpPr/>
+          <p:nvPr/>
+        </p:nvSpPr>
+        <p:spPr>
+          <a:xfrm>
+            <a:off x="692051" y="3650605"/>
+            <a:ext cx="7973389" cy="461963"/>
+          </a:xfrm>
+          <a:prstGeom prst="rect">
+            <a:avLst/>
+          </a:prstGeom>
+          <a:noFill/>
+          <a:ln/>
+        </p:spPr>
+        <p:txBody>
+          <a:bodyPr wrap="square" lIns="0" tIns="0" rIns="0" bIns="0" rtlCol="0" anchor="t"/>
+          <a:lstStyle/>
+          <a:p>
+            <a:pPr algn="l" indent="0" marL="0">
+              <a:lnSpc>
+                <a:spcPts val="1820"/>
+              </a:lnSpc>
+              <a:spcBef>
+                <a:spcPts val="300"/>
+              </a:spcBef>
+              <a:spcAft>
+                <a:spcPts val="300"/>
+              </a:spcAft>
+              <a:buNone/>
+            </a:pPr>
+            <a:r>
+              <a:rPr lang="en-US" sz="1300" i="1" dirty="0">
+                <a:solidFill>
+                  <a:srgbClr val="1C2833"/>
+                </a:solidFill>
+                <a:latin typeface="Georgia" pitchFamily="34" charset="0"/>
+                <a:ea typeface="Georgia" pitchFamily="34" charset="-122"/>
+                <a:cs typeface="Georgia" pitchFamily="34" charset="-120"/>
+              </a:rPr>
+              <a:t>The same idea — community-protected conservation areas — is now formally recommended by the UN's Convention on Biological Diversity (Indigenous and Community Conserved Areas, or ICCAs).</a:t>
+            </a:r>
+            <a:endParaRPr lang="en-US" sz="1300" dirty="0"/>
+          </a:p>
+        </p:txBody>
+      </p:sp>
+      <p:sp>
+        <p:nvSpPr>
+          <p:cNvPr id="14" name="Text 12"/>
+          <p:cNvSpPr/>
+          <p:nvPr/>
+        </p:nvSpPr>
+        <p:spPr>
+          <a:xfrm>
+            <a:off x="406301" y="4468118"/>
+            <a:ext cx="8498026" cy="213271"/>
+          </a:xfrm>
+          <a:prstGeom prst="rect">
+            <a:avLst/>
+          </a:prstGeom>
+          <a:noFill/>
+          <a:ln/>
+        </p:spPr>
+        <p:txBody>
+          <a:bodyPr wrap="square" lIns="0" tIns="0" rIns="0" bIns="0" rtlCol="0" anchor="t"/>
+          <a:lstStyle/>
+          <a:p>
+            <a:pPr algn="l" indent="0" marL="0">
+              <a:lnSpc>
+                <a:spcPts val="1680"/>
+              </a:lnSpc>
+              <a:spcBef>
+                <a:spcPts val="300"/>
+              </a:spcBef>
+              <a:spcAft>
+                <a:spcPts val="300"/>
+              </a:spcAft>
+              <a:buNone/>
+            </a:pPr>
+            <a:r>
+              <a:rPr lang="en-US" sz="1200" dirty="0">
+                <a:solidFill>
+                  <a:srgbClr val="1C2833"/>
+                </a:solidFill>
+                <a:latin typeface="Arial" pitchFamily="34" charset="0"/>
+                <a:ea typeface="Arial" pitchFamily="34" charset="-122"/>
+                <a:cs typeface="Arial" pitchFamily="34" charset="-120"/>
+              </a:rPr>
+              <a:t>Middle ·  · IKS Curriculum</a:t>
+            </a:r>
+            <a:endParaRPr lang="en-US" sz="1200" dirty="0"/>
+          </a:p>
+        </p:txBody>
+      </p:sp>
+    </p:spTree>
+  </p:cSld>
+  <p:clrMapOvr>
+    <a:masterClrMapping/>
+  </p:clrMapOvr>
+</p:sld>
+</file>
+
+<file path=ppt/slides/slide18.xml><?xml version="1.0" encoding="utf-8"?>
+<p:sld xmlns:a="http://schemas.openxmlformats.org/drawingml/2006/main" xmlns:r="http://schemas.openxmlformats.org/officeDocument/2006/relationships" xmlns:p="http://schemas.openxmlformats.org/presentationml/2006/main">
+  <p:cSld name="Slide 18">
+    <p:bg>
+      <p:bgPr>
+        <a:solidFill>
+          <a:srgbClr val="FFFFFF"/>
+        </a:solidFill>
+      </p:bgPr>
+    </p:bg>
+    <p:spTree>
+      <p:nvGrpSpPr>
+        <p:cNvPr id="1" name=""/>
+        <p:cNvGrpSpPr/>
+        <p:nvPr/>
+      </p:nvGrpSpPr>
+      <p:grpSpPr>
+        <a:xfrm>
+          <a:off x="0" y="0"/>
+          <a:ext cx="0" cy="0"/>
+          <a:chOff x="0" y="0"/>
+          <a:chExt cx="0" cy="0"/>
+        </a:xfrm>
+      </p:grpSpPr>
+      <p:sp>
+        <p:nvSpPr>
+          <p:cNvPr id="2" name="Text 0"/>
+          <p:cNvSpPr/>
+          <p:nvPr/>
+        </p:nvSpPr>
+        <p:spPr>
+          <a:xfrm>
+            <a:off x="0" y="0"/>
+            <a:ext cx="9144000" cy="101501"/>
+          </a:xfrm>
+          <a:prstGeom prst="rect">
+            <a:avLst/>
+          </a:prstGeom>
+          <a:solidFill>
+            <a:srgbClr val="277884"/>
+          </a:solidFill>
+          <a:ln/>
+        </p:spPr>
+        <p:txBody>
+          <a:bodyPr wrap="square" rtlCol="0" anchor="ctr"/>
+          <a:lstStyle/>
+          <a:p>
+            <a:pPr indent="0" marL="0">
+              <a:buNone/>
+            </a:pPr>
+            <a:endParaRPr lang="en-US" dirty="0"/>
+          </a:p>
+        </p:txBody>
+      </p:sp>
+      <p:sp>
+        <p:nvSpPr>
+          <p:cNvPr id="3" name="Text 1"/>
+          <p:cNvSpPr/>
+          <p:nvPr/>
+        </p:nvSpPr>
+        <p:spPr>
+          <a:xfrm>
+            <a:off x="406301" y="457051"/>
+            <a:ext cx="8498026" cy="274290"/>
+          </a:xfrm>
+          <a:prstGeom prst="rect">
+            <a:avLst/>
+          </a:prstGeom>
+          <a:noFill/>
+          <a:ln/>
+        </p:spPr>
+        <p:txBody>
+          <a:bodyPr wrap="square" lIns="0" tIns="0" rIns="0" bIns="0" rtlCol="0" anchor="t"/>
+          <a:lstStyle/>
+          <a:p>
+            <a:pPr algn="l" indent="0" marL="0">
+              <a:lnSpc>
+                <a:spcPts val="2160"/>
+              </a:lnSpc>
+              <a:spcBef>
+                <a:spcPts val="600"/>
+              </a:spcBef>
+              <a:spcAft>
+                <a:spcPts val="800"/>
+              </a:spcAft>
+              <a:buNone/>
+            </a:pPr>
+            <a:r>
+              <a:rPr lang="en-US" sz="1800" b="1" dirty="0">
+                <a:solidFill>
+                  <a:srgbClr val="FE4447"/>
+                </a:solidFill>
+                <a:latin typeface="Georgia" pitchFamily="34" charset="0"/>
+                <a:ea typeface="Georgia" pitchFamily="34" charset="-122"/>
+                <a:cs typeface="Georgia" pitchFamily="34" charset="-120"/>
+              </a:rPr>
+              <a:t>Homework</a:t>
+            </a:r>
+            <a:endParaRPr lang="en-US" sz="1800" dirty="0"/>
+          </a:p>
+        </p:txBody>
+      </p:sp>
+      <p:sp>
+        <p:nvSpPr>
+          <p:cNvPr id="4" name="Text 2"/>
+          <p:cNvSpPr/>
+          <p:nvPr/>
+        </p:nvSpPr>
+        <p:spPr>
+          <a:xfrm>
+            <a:off x="634901" y="883593"/>
+            <a:ext cx="8102798" cy="487561"/>
+          </a:xfrm>
+          <a:prstGeom prst="rect">
+            <a:avLst/>
+          </a:prstGeom>
+          <a:noFill/>
+          <a:ln/>
+        </p:spPr>
+        <p:txBody>
+          <a:bodyPr wrap="square" lIns="0" tIns="0" rIns="0" bIns="0" rtlCol="0" anchor="t"/>
+          <a:lstStyle/>
+          <a:p>
+            <a:pPr algn="l" marL="342900" indent="-342900">
+              <a:lnSpc>
+                <a:spcPts val="1620"/>
+              </a:lnSpc>
+              <a:spcAft>
+                <a:spcPts val="300"/>
+              </a:spcAft>
+              <a:buSzPct val="100000"/>
+              <a:buChar char="•"/>
+            </a:pPr>
+            <a:r>
+              <a:rPr lang="en-US" sz="1200" dirty="0">
+                <a:solidFill>
+                  <a:srgbClr val="1C2833"/>
+                </a:solidFill>
+                <a:latin typeface="Arial" pitchFamily="34" charset="0"/>
+                <a:ea typeface="Arial" pitchFamily="34" charset="-122"/>
+                <a:cs typeface="Arial" pitchFamily="34" charset="-120"/>
+              </a:rPr>
+              <a:t>Ask one elder in your family or neighbourhood: </a:t>
+            </a:r>
+            <a:pPr algn="l" indent="0" marL="0">
+              <a:lnSpc>
+                <a:spcPts val="1620"/>
+              </a:lnSpc>
+              <a:spcAft>
+                <a:spcPts val="300"/>
+              </a:spcAft>
+              <a:buNone/>
+            </a:pPr>
+            <a:r>
+              <a:rPr lang="en-US" sz="1200" i="1" dirty="0">
+                <a:solidFill>
+                  <a:srgbClr val="1C2833"/>
+                </a:solidFill>
+                <a:latin typeface="Arial" pitchFamily="34" charset="0"/>
+                <a:ea typeface="Arial" pitchFamily="34" charset="-122"/>
+                <a:cs typeface="Arial" pitchFamily="34" charset="-120"/>
+              </a:rPr>
+              <a:t>"Was there any tree, grove, pond, or piece of land that was 'not to be touched' when you were a child? What happened to it?"</a:t>
+            </a:r>
+            <a:pPr algn="l" indent="0" marL="0">
+              <a:lnSpc>
+                <a:spcPts val="1620"/>
+              </a:lnSpc>
+              <a:spcAft>
+                <a:spcPts val="300"/>
+              </a:spcAft>
+              <a:buNone/>
+            </a:pPr>
+            <a:r>
+              <a:rPr lang="en-US" sz="1200" dirty="0">
+                <a:solidFill>
+                  <a:srgbClr val="1C2833"/>
+                </a:solidFill>
+                <a:latin typeface="Arial" pitchFamily="34" charset="0"/>
+                <a:ea typeface="Arial" pitchFamily="34" charset="-122"/>
+                <a:cs typeface="Arial" pitchFamily="34" charset="-120"/>
+              </a:rPr>
+              <a:t> Write what they said in 5 sentences. Bring tomorrow.</a:t>
+            </a:r>
+            <a:endParaRPr lang="en-US" sz="1200" dirty="0"/>
+          </a:p>
+        </p:txBody>
+      </p:sp>
+      <p:sp>
+        <p:nvSpPr>
+          <p:cNvPr id="5" name="Text 3"/>
+          <p:cNvSpPr/>
+          <p:nvPr/>
+        </p:nvSpPr>
+        <p:spPr>
+          <a:xfrm>
+            <a:off x="406301" y="4434929"/>
+            <a:ext cx="8498026" cy="213271"/>
+          </a:xfrm>
+          <a:prstGeom prst="rect">
+            <a:avLst/>
+          </a:prstGeom>
+          <a:noFill/>
+          <a:ln/>
+        </p:spPr>
+        <p:txBody>
+          <a:bodyPr wrap="square" lIns="0" tIns="0" rIns="0" bIns="0" rtlCol="0" anchor="t"/>
+          <a:lstStyle/>
+          <a:p>
+            <a:pPr algn="l" indent="0" marL="0">
+              <a:lnSpc>
+                <a:spcPts val="1680"/>
+              </a:lnSpc>
+              <a:spcBef>
+                <a:spcPts val="300"/>
+              </a:spcBef>
+              <a:spcAft>
+                <a:spcPts val="300"/>
+              </a:spcAft>
+              <a:buNone/>
+            </a:pPr>
+            <a:r>
+              <a:rPr lang="en-US" sz="1200" dirty="0">
+                <a:solidFill>
+                  <a:srgbClr val="1C2833"/>
+                </a:solidFill>
+                <a:latin typeface="Arial" pitchFamily="34" charset="0"/>
+                <a:ea typeface="Arial" pitchFamily="34" charset="-122"/>
+                <a:cs typeface="Arial" pitchFamily="34" charset="-120"/>
+              </a:rPr>
+              <a:t>Middle ·  · IKS Curriculum</a:t>
+            </a:r>
+            <a:endParaRPr lang="en-US" sz="1200" dirty="0"/>
+          </a:p>
+        </p:txBody>
+      </p:sp>
+    </p:spTree>
+  </p:cSld>
+  <p:clrMapOvr>
+    <a:masterClrMapping/>
+  </p:clrMapOvr>
+</p:sld>
+</file>
+
+<file path=ppt/slides/slide19.xml><?xml version="1.0" encoding="utf-8"?>
+<p:sld xmlns:a="http://schemas.openxmlformats.org/drawingml/2006/main" xmlns:r="http://schemas.openxmlformats.org/officeDocument/2006/relationships" xmlns:p="http://schemas.openxmlformats.org/presentationml/2006/main">
+  <p:cSld name="Slide 19">
+    <p:bg>
+      <p:bgPr>
+        <a:solidFill>
+          <a:srgbClr val="FFFFFF"/>
+        </a:solidFill>
+      </p:bgPr>
+    </p:bg>
+    <p:spTree>
+      <p:nvGrpSpPr>
+        <p:cNvPr id="1" name=""/>
+        <p:cNvGrpSpPr/>
+        <p:nvPr/>
+      </p:nvGrpSpPr>
+      <p:grpSpPr>
+        <a:xfrm>
+          <a:off x="0" y="0"/>
+          <a:ext cx="0" cy="0"/>
+          <a:chOff x="0" y="0"/>
+          <a:chExt cx="0" cy="0"/>
+        </a:xfrm>
+      </p:grpSpPr>
+      <p:sp>
+        <p:nvSpPr>
+          <p:cNvPr id="2" name="Text 0"/>
+          <p:cNvSpPr/>
+          <p:nvPr/>
+        </p:nvSpPr>
+        <p:spPr>
+          <a:xfrm>
+            <a:off x="0" y="0"/>
+            <a:ext cx="9144000" cy="101501"/>
+          </a:xfrm>
+          <a:prstGeom prst="rect">
+            <a:avLst/>
+          </a:prstGeom>
+          <a:solidFill>
+            <a:srgbClr val="277884"/>
+          </a:solidFill>
+          <a:ln/>
+        </p:spPr>
+        <p:txBody>
+          <a:bodyPr wrap="square" rtlCol="0" anchor="ctr"/>
+          <a:lstStyle/>
+          <a:p>
+            <a:pPr indent="0" marL="0">
+              <a:buNone/>
+            </a:pPr>
+            <a:endParaRPr lang="en-US" dirty="0"/>
+          </a:p>
+        </p:txBody>
+      </p:sp>
+      <p:sp>
+        <p:nvSpPr>
+          <p:cNvPr id="3" name="Text 1"/>
+          <p:cNvSpPr/>
+          <p:nvPr/>
+        </p:nvSpPr>
+        <p:spPr>
+          <a:xfrm>
+            <a:off x="406301" y="457051"/>
+            <a:ext cx="8498026" cy="274290"/>
+          </a:xfrm>
+          <a:prstGeom prst="rect">
+            <a:avLst/>
+          </a:prstGeom>
+          <a:noFill/>
+          <a:ln/>
+        </p:spPr>
+        <p:txBody>
+          <a:bodyPr wrap="square" lIns="0" tIns="0" rIns="0" bIns="0" rtlCol="0" anchor="t"/>
+          <a:lstStyle/>
+          <a:p>
+            <a:pPr algn="l" indent="0" marL="0">
+              <a:lnSpc>
+                <a:spcPts val="2160"/>
+              </a:lnSpc>
+              <a:spcBef>
+                <a:spcPts val="600"/>
+              </a:spcBef>
+              <a:spcAft>
+                <a:spcPts val="800"/>
+              </a:spcAft>
+              <a:buNone/>
+            </a:pPr>
+            <a:r>
+              <a:rPr lang="en-US" sz="1800" b="1" dirty="0">
+                <a:solidFill>
+                  <a:srgbClr val="FE4447"/>
+                </a:solidFill>
+                <a:latin typeface="Georgia" pitchFamily="34" charset="0"/>
+                <a:ea typeface="Georgia" pitchFamily="34" charset="-122"/>
+                <a:cs typeface="Georgia" pitchFamily="34" charset="-120"/>
+              </a:rPr>
+              <a:t>Differentiation</a:t>
+            </a:r>
+            <a:endParaRPr lang="en-US" sz="1800" dirty="0"/>
+          </a:p>
+        </p:txBody>
+      </p:sp>
+      <p:sp>
+        <p:nvSpPr>
+          <p:cNvPr id="4" name="Text 2"/>
+          <p:cNvSpPr/>
+          <p:nvPr/>
+        </p:nvSpPr>
+        <p:spPr>
+          <a:xfrm>
+            <a:off x="634901" y="883593"/>
+            <a:ext cx="8102798" cy="937022"/>
+          </a:xfrm>
+          <a:prstGeom prst="rect">
+            <a:avLst/>
+          </a:prstGeom>
+          <a:noFill/>
+          <a:ln/>
+        </p:spPr>
+        <p:txBody>
+          <a:bodyPr wrap="square" lIns="0" tIns="0" rIns="0" bIns="0" rtlCol="0" anchor="t"/>
+          <a:lstStyle/>
+          <a:p>
+            <a:pPr algn="l" marL="342900" indent="-342900">
+              <a:lnSpc>
+                <a:spcPts val="1620"/>
+              </a:lnSpc>
+              <a:spcAft>
+                <a:spcPts val="300"/>
+              </a:spcAft>
+              <a:buSzPct val="100000"/>
+              <a:buChar char="•"/>
+            </a:pPr>
+            <a:r>
+              <a:rPr lang="en-US" sz="1200" b="1" dirty="0">
+                <a:solidFill>
+                  <a:srgbClr val="1C2833"/>
+                </a:solidFill>
+                <a:latin typeface="Arial" pitchFamily="34" charset="0"/>
+                <a:ea typeface="Arial" pitchFamily="34" charset="-122"/>
+                <a:cs typeface="Arial" pitchFamily="34" charset="-120"/>
+              </a:rPr>
+              <a:t>One tier up:</a:t>
+            </a:r>
+            <a:pPr algn="l" indent="0" marL="0">
+              <a:lnSpc>
+                <a:spcPts val="1620"/>
+              </a:lnSpc>
+              <a:spcAft>
+                <a:spcPts val="300"/>
+              </a:spcAft>
+              <a:buNone/>
+            </a:pPr>
+            <a:r>
+              <a:rPr lang="en-US" sz="1200" dirty="0">
+                <a:solidFill>
+                  <a:srgbClr val="1C2833"/>
+                </a:solidFill>
+                <a:latin typeface="Arial" pitchFamily="34" charset="0"/>
+                <a:ea typeface="Arial" pitchFamily="34" charset="-122"/>
+                <a:cs typeface="Arial" pitchFamily="34" charset="-120"/>
+              </a:rPr>
+              <a:t> Find one news story from the last 5 years about a sacred grove being threatened (a road, a mine, a township). Summarise in a paragraph. We'll add it to Day 7's discussion.</a:t>
+            </a:r>
+            <a:endParaRPr lang="en-US" sz="1200" dirty="0"/>
+          </a:p>
+          <a:p>
+            <a:pPr algn="l" marL="342900" indent="-342900">
+              <a:lnSpc>
+                <a:spcPts val="1620"/>
+              </a:lnSpc>
+              <a:spcAft>
+                <a:spcPts val="300"/>
+              </a:spcAft>
+              <a:buSzPct val="100000"/>
+              <a:buChar char="•"/>
+            </a:pPr>
+            <a:r>
+              <a:rPr lang="en-US" sz="1200" b="1" dirty="0">
+                <a:solidFill>
+                  <a:srgbClr val="1C2833"/>
+                </a:solidFill>
+                <a:latin typeface="Arial" pitchFamily="34" charset="0"/>
+                <a:ea typeface="Arial" pitchFamily="34" charset="-122"/>
+                <a:cs typeface="Arial" pitchFamily="34" charset="-120"/>
+              </a:rPr>
+              <a:t>One tier down:</a:t>
+            </a:r>
+            <a:pPr algn="l" indent="0" marL="0">
+              <a:lnSpc>
+                <a:spcPts val="1620"/>
+              </a:lnSpc>
+              <a:spcAft>
+                <a:spcPts val="300"/>
+              </a:spcAft>
+              <a:buNone/>
+            </a:pPr>
+            <a:r>
+              <a:rPr lang="en-US" sz="1200" dirty="0">
+                <a:solidFill>
+                  <a:srgbClr val="1C2833"/>
+                </a:solidFill>
+                <a:latin typeface="Arial" pitchFamily="34" charset="0"/>
+                <a:ea typeface="Arial" pitchFamily="34" charset="-122"/>
+                <a:cs typeface="Arial" pitchFamily="34" charset="-120"/>
+              </a:rPr>
+              <a:t> Just remember two regional names (</a:t>
+            </a:r>
+            <a:pPr algn="l" indent="0" marL="0">
+              <a:lnSpc>
+                <a:spcPts val="1620"/>
+              </a:lnSpc>
+              <a:spcAft>
+                <a:spcPts val="300"/>
+              </a:spcAft>
+              <a:buNone/>
+            </a:pPr>
+            <a:r>
+              <a:rPr lang="en-US" sz="1200" i="1" dirty="0">
+                <a:solidFill>
+                  <a:srgbClr val="1C2833"/>
+                </a:solidFill>
+                <a:latin typeface="Arial" pitchFamily="34" charset="0"/>
+                <a:ea typeface="Arial" pitchFamily="34" charset="-122"/>
+                <a:cs typeface="Arial" pitchFamily="34" charset="-120"/>
+              </a:rPr>
+              <a:t>devarakāḍu</a:t>
+            </a:r>
+            <a:pPr algn="l" indent="0" marL="0">
+              <a:lnSpc>
+                <a:spcPts val="1620"/>
+              </a:lnSpc>
+              <a:spcAft>
+                <a:spcPts val="300"/>
+              </a:spcAft>
+              <a:buNone/>
+            </a:pPr>
+            <a:r>
+              <a:rPr lang="en-US" sz="1200" dirty="0">
+                <a:solidFill>
+                  <a:srgbClr val="1C2833"/>
+                </a:solidFill>
+                <a:latin typeface="Arial" pitchFamily="34" charset="0"/>
+                <a:ea typeface="Arial" pitchFamily="34" charset="-122"/>
+                <a:cs typeface="Arial" pitchFamily="34" charset="-120"/>
+              </a:rPr>
+              <a:t> and </a:t>
+            </a:r>
+            <a:pPr algn="l" indent="0" marL="0">
+              <a:lnSpc>
+                <a:spcPts val="1620"/>
+              </a:lnSpc>
+              <a:spcAft>
+                <a:spcPts val="300"/>
+              </a:spcAft>
+              <a:buNone/>
+            </a:pPr>
+            <a:r>
+              <a:rPr lang="en-US" sz="1200" i="1" dirty="0">
+                <a:solidFill>
+                  <a:srgbClr val="1C2833"/>
+                </a:solidFill>
+                <a:latin typeface="Arial" pitchFamily="34" charset="0"/>
+                <a:ea typeface="Arial" pitchFamily="34" charset="-122"/>
+                <a:cs typeface="Arial" pitchFamily="34" charset="-120"/>
+              </a:rPr>
+              <a:t>sarna</a:t>
+            </a:r>
+            <a:pPr algn="l" indent="0" marL="0">
+              <a:lnSpc>
+                <a:spcPts val="1620"/>
+              </a:lnSpc>
+              <a:spcAft>
+                <a:spcPts val="300"/>
+              </a:spcAft>
+              <a:buNone/>
+            </a:pPr>
+            <a:r>
+              <a:rPr lang="en-US" sz="1200" dirty="0">
+                <a:solidFill>
+                  <a:srgbClr val="1C2833"/>
+                </a:solidFill>
+                <a:latin typeface="Arial" pitchFamily="34" charset="0"/>
+                <a:ea typeface="Arial" pitchFamily="34" charset="-122"/>
+                <a:cs typeface="Arial" pitchFamily="34" charset="-120"/>
+              </a:rPr>
+              <a:t>) and one fact: sacred groves preserve species the surrounding land has lost.</a:t>
+            </a:r>
+            <a:endParaRPr lang="en-US" sz="1200" dirty="0"/>
+          </a:p>
+        </p:txBody>
+      </p:sp>
+      <p:sp>
+        <p:nvSpPr>
+          <p:cNvPr id="5" name="Text 3"/>
           <p:cNvSpPr/>
           <p:nvPr/>
         </p:nvSpPr>
@@ -3482,7 +6346,7 @@
                 <a:ea typeface="Georgia" pitchFamily="34" charset="-122"/>
                 <a:cs typeface="Georgia" pitchFamily="34" charset="-120"/>
               </a:rPr>
-              <a:t>Materials</a:t>
+              <a:t>Learning objective</a:t>
             </a:r>
             <a:endParaRPr lang="en-US" sz="1800" dirty="0"/>
           </a:p>
@@ -3497,7 +6361,7 @@
         <p:spPr>
           <a:xfrm>
             <a:off x="406301" y="870942"/>
-            <a:ext cx="8498026" cy="639812"/>
+            <a:ext cx="8498026" cy="426541"/>
           </a:xfrm>
           <a:prstGeom prst="rect">
             <a:avLst/>
@@ -3530,7 +6394,7 @@
                 <a:ea typeface="Arial" pitchFamily="34" charset="-122"/>
                 <a:cs typeface="Arial" pitchFamily="34" charset="-120"/>
               </a:rPr>
-              <a:t>– A handful of photographs of sacred groves — the </a:t>
+              <a:t>Students explain what a sacred grove is (community-protected forest fragment) using two regional terms — </a:t>
             </a:r>
             <a:pPr algn="l" indent="0" marL="0">
               <a:lnSpc>
@@ -3553,7 +6417,7 @@
                 <a:ea typeface="Arial" pitchFamily="34" charset="-122"/>
                 <a:cs typeface="Arial" pitchFamily="34" charset="-120"/>
               </a:rPr>
-              <a:t>kāvu</a:t>
+              <a:t>devarakāḍu</a:t>
             </a:r>
             <a:pPr algn="l" indent="0" marL="0">
               <a:lnSpc>
@@ -3576,7 +6440,7 @@
                 <a:ea typeface="Arial" pitchFamily="34" charset="-122"/>
                 <a:cs typeface="Arial" pitchFamily="34" charset="-120"/>
               </a:rPr>
-              <a:t> of Kerala, the </a:t>
+              <a:t> (Karnataka) and </a:t>
             </a:r>
             <a:pPr algn="l" indent="0" marL="0">
               <a:lnSpc>
@@ -3599,10 +6463,406 @@
                 <a:ea typeface="Arial" pitchFamily="34" charset="-122"/>
                 <a:cs typeface="Arial" pitchFamily="34" charset="-120"/>
               </a:rPr>
+              <a:t>sarna</a:t>
+            </a:r>
+            <a:pPr algn="l" indent="0" marL="0">
+              <a:lnSpc>
+                <a:spcPts val="1680"/>
+              </a:lnSpc>
+              <a:spcBef>
+                <a:spcPts val="300"/>
+              </a:spcBef>
+              <a:spcAft>
+                <a:spcPts val="300"/>
+              </a:spcAft>
+              <a:buNone/>
+            </a:pPr>
+            <a:r>
+              <a:rPr lang="en-US" sz="1200" dirty="0">
+                <a:solidFill>
+                  <a:srgbClr val="1C2833"/>
+                </a:solidFill>
+                <a:latin typeface="Arial" pitchFamily="34" charset="0"/>
+                <a:ea typeface="Arial" pitchFamily="34" charset="-122"/>
+                <a:cs typeface="Arial" pitchFamily="34" charset="-120"/>
+              </a:rPr>
+              <a:t> (tribal Eastern India) — and identify the ecological function of these groves as biodiversity reserves.</a:t>
+            </a:r>
+            <a:endParaRPr lang="en-US" sz="1200" dirty="0"/>
+          </a:p>
+        </p:txBody>
+      </p:sp>
+      <p:sp>
+        <p:nvSpPr>
+          <p:cNvPr id="5" name="Text 3"/>
+          <p:cNvSpPr/>
+          <p:nvPr/>
+        </p:nvSpPr>
+        <p:spPr>
+          <a:xfrm>
+            <a:off x="406301" y="4434929"/>
+            <a:ext cx="8498026" cy="213271"/>
+          </a:xfrm>
+          <a:prstGeom prst="rect">
+            <a:avLst/>
+          </a:prstGeom>
+          <a:noFill/>
+          <a:ln/>
+        </p:spPr>
+        <p:txBody>
+          <a:bodyPr wrap="square" lIns="0" tIns="0" rIns="0" bIns="0" rtlCol="0" anchor="t"/>
+          <a:lstStyle/>
+          <a:p>
+            <a:pPr algn="l" indent="0" marL="0">
+              <a:lnSpc>
+                <a:spcPts val="1680"/>
+              </a:lnSpc>
+              <a:spcBef>
+                <a:spcPts val="300"/>
+              </a:spcBef>
+              <a:spcAft>
+                <a:spcPts val="300"/>
+              </a:spcAft>
+              <a:buNone/>
+            </a:pPr>
+            <a:r>
+              <a:rPr lang="en-US" sz="1200" dirty="0">
+                <a:solidFill>
+                  <a:srgbClr val="1C2833"/>
+                </a:solidFill>
+                <a:latin typeface="Arial" pitchFamily="34" charset="0"/>
+                <a:ea typeface="Arial" pitchFamily="34" charset="-122"/>
+                <a:cs typeface="Arial" pitchFamily="34" charset="-120"/>
+              </a:rPr>
+              <a:t>Middle ·  · IKS Curriculum</a:t>
+            </a:r>
+            <a:endParaRPr lang="en-US" sz="1200" dirty="0"/>
+          </a:p>
+        </p:txBody>
+      </p:sp>
+    </p:spTree>
+  </p:cSld>
+  <p:clrMapOvr>
+    <a:masterClrMapping/>
+  </p:clrMapOvr>
+</p:sld>
+</file>
+
+<file path=ppt/slides/slide20.xml><?xml version="1.0" encoding="utf-8"?>
+<p:sld xmlns:a="http://schemas.openxmlformats.org/drawingml/2006/main" xmlns:r="http://schemas.openxmlformats.org/officeDocument/2006/relationships" xmlns:p="http://schemas.openxmlformats.org/presentationml/2006/main">
+  <p:cSld name="Slide 20">
+    <p:bg>
+      <p:bgPr>
+        <a:solidFill>
+          <a:srgbClr val="FFFFFF"/>
+        </a:solidFill>
+      </p:bgPr>
+    </p:bg>
+    <p:spTree>
+      <p:nvGrpSpPr>
+        <p:cNvPr id="1" name=""/>
+        <p:cNvGrpSpPr/>
+        <p:nvPr/>
+      </p:nvGrpSpPr>
+      <p:grpSpPr>
+        <a:xfrm>
+          <a:off x="0" y="0"/>
+          <a:ext cx="0" cy="0"/>
+          <a:chOff x="0" y="0"/>
+          <a:chExt cx="0" cy="0"/>
+        </a:xfrm>
+      </p:grpSpPr>
+      <p:sp>
+        <p:nvSpPr>
+          <p:cNvPr id="2" name="Text 0"/>
+          <p:cNvSpPr/>
+          <p:nvPr/>
+        </p:nvSpPr>
+        <p:spPr>
+          <a:xfrm>
+            <a:off x="0" y="0"/>
+            <a:ext cx="9144000" cy="101501"/>
+          </a:xfrm>
+          <a:prstGeom prst="rect">
+            <a:avLst/>
+          </a:prstGeom>
+          <a:solidFill>
+            <a:srgbClr val="277884"/>
+          </a:solidFill>
+          <a:ln/>
+        </p:spPr>
+        <p:txBody>
+          <a:bodyPr wrap="square" rtlCol="0" anchor="ctr"/>
+          <a:lstStyle/>
+          <a:p>
+            <a:pPr indent="0" marL="0">
+              <a:buNone/>
+            </a:pPr>
+            <a:endParaRPr lang="en-US" dirty="0"/>
+          </a:p>
+        </p:txBody>
+      </p:sp>
+      <p:sp>
+        <p:nvSpPr>
+          <p:cNvPr id="3" name="Text 1"/>
+          <p:cNvSpPr/>
+          <p:nvPr/>
+        </p:nvSpPr>
+        <p:spPr>
+          <a:xfrm>
+            <a:off x="406301" y="457051"/>
+            <a:ext cx="8498026" cy="274290"/>
+          </a:xfrm>
+          <a:prstGeom prst="rect">
+            <a:avLst/>
+          </a:prstGeom>
+          <a:noFill/>
+          <a:ln/>
+        </p:spPr>
+        <p:txBody>
+          <a:bodyPr wrap="square" lIns="0" tIns="0" rIns="0" bIns="0" rtlCol="0" anchor="t"/>
+          <a:lstStyle/>
+          <a:p>
+            <a:pPr algn="l" indent="0" marL="0">
+              <a:lnSpc>
+                <a:spcPts val="2160"/>
+              </a:lnSpc>
+              <a:spcBef>
+                <a:spcPts val="600"/>
+              </a:spcBef>
+              <a:spcAft>
+                <a:spcPts val="800"/>
+              </a:spcAft>
+              <a:buNone/>
+            </a:pPr>
+            <a:r>
+              <a:rPr lang="en-US" sz="1800" b="1" dirty="0">
+                <a:solidFill>
+                  <a:srgbClr val="FE4447"/>
+                </a:solidFill>
+                <a:latin typeface="Georgia" pitchFamily="34" charset="0"/>
+                <a:ea typeface="Georgia" pitchFamily="34" charset="-122"/>
+                <a:cs typeface="Georgia" pitchFamily="34" charset="-120"/>
+              </a:rPr>
+              <a:t>Teacher notes</a:t>
+            </a:r>
+            <a:endParaRPr lang="en-US" sz="1800" dirty="0"/>
+          </a:p>
+        </p:txBody>
+      </p:sp>
+      <p:sp>
+        <p:nvSpPr>
+          <p:cNvPr id="4" name="Text 2"/>
+          <p:cNvSpPr/>
+          <p:nvPr/>
+        </p:nvSpPr>
+        <p:spPr>
+          <a:xfrm>
+            <a:off x="634901" y="883593"/>
+            <a:ext cx="8102798" cy="1348383"/>
+          </a:xfrm>
+          <a:prstGeom prst="rect">
+            <a:avLst/>
+          </a:prstGeom>
+          <a:noFill/>
+          <a:ln/>
+        </p:spPr>
+        <p:txBody>
+          <a:bodyPr wrap="square" lIns="0" tIns="0" rIns="0" bIns="0" rtlCol="0" anchor="t"/>
+          <a:lstStyle/>
+          <a:p>
+            <a:pPr algn="l" marL="342900" indent="-342900">
+              <a:lnSpc>
+                <a:spcPts val="1620"/>
+              </a:lnSpc>
+              <a:spcAft>
+                <a:spcPts val="300"/>
+              </a:spcAft>
+              <a:buSzPct val="100000"/>
+              <a:buChar char="•"/>
+            </a:pPr>
+            <a:r>
+              <a:rPr lang="en-US" sz="1200" dirty="0">
+                <a:solidFill>
+                  <a:srgbClr val="1C2833"/>
+                </a:solidFill>
+                <a:latin typeface="Arial" pitchFamily="34" charset="0"/>
+                <a:ea typeface="Arial" pitchFamily="34" charset="-122"/>
+                <a:cs typeface="Arial" pitchFamily="34" charset="-120"/>
+              </a:rPr>
+              <a:t>Some students will challenge: </a:t>
+            </a:r>
+            <a:pPr algn="l" indent="0" marL="0">
+              <a:lnSpc>
+                <a:spcPts val="1620"/>
+              </a:lnSpc>
+              <a:spcAft>
+                <a:spcPts val="300"/>
+              </a:spcAft>
+              <a:buNone/>
+            </a:pPr>
+            <a:r>
+              <a:rPr lang="en-US" sz="1200" i="1" dirty="0">
+                <a:solidFill>
+                  <a:srgbClr val="1C2833"/>
+                </a:solidFill>
+                <a:latin typeface="Arial" pitchFamily="34" charset="0"/>
+                <a:ea typeface="Arial" pitchFamily="34" charset="-122"/>
+                <a:cs typeface="Arial" pitchFamily="34" charset="-120"/>
+              </a:rPr>
+              <a:t>"That's superstition. Why should we protect a forest because of a goddess?"</a:t>
+            </a:r>
+            <a:pPr algn="l" indent="0" marL="0">
+              <a:lnSpc>
+                <a:spcPts val="1620"/>
+              </a:lnSpc>
+              <a:spcAft>
+                <a:spcPts val="300"/>
+              </a:spcAft>
+              <a:buNone/>
+            </a:pPr>
+            <a:r>
+              <a:rPr lang="en-US" sz="1200" dirty="0">
+                <a:solidFill>
+                  <a:srgbClr val="1C2833"/>
+                </a:solidFill>
+                <a:latin typeface="Arial" pitchFamily="34" charset="0"/>
+                <a:ea typeface="Arial" pitchFamily="34" charset="-122"/>
+                <a:cs typeface="Arial" pitchFamily="34" charset="-120"/>
+              </a:rPr>
+              <a:t> — affirm the question. Answer: it doesn't matter </a:t>
+            </a:r>
+            <a:pPr algn="l" indent="0" marL="0">
+              <a:lnSpc>
+                <a:spcPts val="1620"/>
+              </a:lnSpc>
+              <a:spcAft>
+                <a:spcPts val="300"/>
+              </a:spcAft>
+              <a:buNone/>
+            </a:pPr>
+            <a:r>
+              <a:rPr lang="en-US" sz="1200" i="1" dirty="0">
+                <a:solidFill>
+                  <a:srgbClr val="1C2833"/>
+                </a:solidFill>
+                <a:latin typeface="Arial" pitchFamily="34" charset="0"/>
+                <a:ea typeface="Arial" pitchFamily="34" charset="-122"/>
+                <a:cs typeface="Arial" pitchFamily="34" charset="-120"/>
+              </a:rPr>
+              <a:t>why</a:t>
+            </a:r>
+            <a:pPr algn="l" indent="0" marL="0">
+              <a:lnSpc>
+                <a:spcPts val="1620"/>
+              </a:lnSpc>
+              <a:spcAft>
+                <a:spcPts val="300"/>
+              </a:spcAft>
+              <a:buNone/>
+            </a:pPr>
+            <a:r>
+              <a:rPr lang="en-US" sz="1200" dirty="0">
+                <a:solidFill>
+                  <a:srgbClr val="1C2833"/>
+                </a:solidFill>
+                <a:latin typeface="Arial" pitchFamily="34" charset="0"/>
+                <a:ea typeface="Arial" pitchFamily="34" charset="-122"/>
+                <a:cs typeface="Arial" pitchFamily="34" charset="-120"/>
+              </a:rPr>
+              <a:t> a community protects a forest; what matters is that it gets protected. The Indic tradition used the language of the sacred. Modern conservation uses the language of "ecosystem services." Both are descriptions of the same protective behaviour.</a:t>
+            </a:r>
+            <a:endParaRPr lang="en-US" sz="1200" dirty="0"/>
+          </a:p>
+          <a:p>
+            <a:pPr algn="l" marL="342900" indent="-342900">
+              <a:lnSpc>
+                <a:spcPts val="1620"/>
+              </a:lnSpc>
+              <a:spcAft>
+                <a:spcPts val="300"/>
+              </a:spcAft>
+              <a:buSzPct val="100000"/>
+              <a:buChar char="•"/>
+            </a:pPr>
+            <a:r>
+              <a:rPr lang="en-US" sz="1200" dirty="0">
+                <a:solidFill>
+                  <a:srgbClr val="1C2833"/>
+                </a:solidFill>
+                <a:latin typeface="Arial" pitchFamily="34" charset="0"/>
+                <a:ea typeface="Arial" pitchFamily="34" charset="-122"/>
+                <a:cs typeface="Arial" pitchFamily="34" charset="-120"/>
+              </a:rPr>
+              <a:t>The Coorg </a:t>
+            </a:r>
+            <a:pPr algn="l" indent="0" marL="0">
+              <a:lnSpc>
+                <a:spcPts val="1620"/>
+              </a:lnSpc>
+              <a:spcAft>
+                <a:spcPts val="300"/>
+              </a:spcAft>
+              <a:buNone/>
+            </a:pPr>
+            <a:r>
+              <a:rPr lang="en-US" sz="1200" i="1" dirty="0">
+                <a:solidFill>
+                  <a:srgbClr val="1C2833"/>
+                </a:solidFill>
+                <a:latin typeface="Arial" pitchFamily="34" charset="0"/>
+                <a:ea typeface="Arial" pitchFamily="34" charset="-122"/>
+                <a:cs typeface="Arial" pitchFamily="34" charset="-120"/>
+              </a:rPr>
               <a:t>devarakāḍu</a:t>
             </a:r>
             <a:pPr algn="l" indent="0" marL="0">
               <a:lnSpc>
+                <a:spcPts val="1620"/>
+              </a:lnSpc>
+              <a:spcAft>
+                <a:spcPts val="300"/>
+              </a:spcAft>
+              <a:buNone/>
+            </a:pPr>
+            <a:r>
+              <a:rPr lang="en-US" sz="1200" dirty="0">
+                <a:solidFill>
+                  <a:srgbClr val="1C2833"/>
+                </a:solidFill>
+                <a:latin typeface="Arial" pitchFamily="34" charset="0"/>
+                <a:ea typeface="Arial" pitchFamily="34" charset="-122"/>
+                <a:cs typeface="Arial" pitchFamily="34" charset="-120"/>
+              </a:rPr>
+              <a:t> network is well-documented; the figure of ~1,200 groves is from Gadgil's published surveys. If you want a source, Gadgil &amp; Subash Chandran (1991) is a more recent count.</a:t>
+            </a:r>
+            <a:endParaRPr lang="en-US" sz="1200" dirty="0"/>
+          </a:p>
+        </p:txBody>
+      </p:sp>
+      <p:sp>
+        <p:nvSpPr>
+          <p:cNvPr id="5" name="Text 3"/>
+          <p:cNvSpPr/>
+          <p:nvPr/>
+        </p:nvSpPr>
+        <p:spPr>
+          <a:xfrm>
+            <a:off x="406301" y="4434929"/>
+            <a:ext cx="8498026" cy="213271"/>
+          </a:xfrm>
+          <a:prstGeom prst="rect">
+            <a:avLst/>
+          </a:prstGeom>
+          <a:noFill/>
+          <a:ln/>
+        </p:spPr>
+        <p:txBody>
+          <a:bodyPr wrap="square" lIns="0" tIns="0" rIns="0" bIns="0" rtlCol="0" anchor="t"/>
+          <a:lstStyle/>
+          <a:p>
+            <a:pPr algn="l" indent="0" marL="0">
+              <a:lnSpc>
                 <a:spcPts val="1680"/>
               </a:lnSpc>
               <a:spcBef>
@@ -3622,8 +6882,189 @@
                 <a:ea typeface="Arial" pitchFamily="34" charset="-122"/>
                 <a:cs typeface="Arial" pitchFamily="34" charset="-120"/>
               </a:rPr>
-              <a:t> of Coorg, the </a:t>
-            </a:r>
+              <a:t>Middle ·  · IKS Curriculum</a:t>
+            </a:r>
+            <a:endParaRPr lang="en-US" sz="1200" dirty="0"/>
+          </a:p>
+        </p:txBody>
+      </p:sp>
+    </p:spTree>
+  </p:cSld>
+  <p:clrMapOvr>
+    <a:masterClrMapping/>
+  </p:clrMapOvr>
+</p:sld>
+</file>
+
+<file path=ppt/slides/slide21.xml><?xml version="1.0" encoding="utf-8"?>
+<p:sld xmlns:a="http://schemas.openxmlformats.org/drawingml/2006/main" xmlns:r="http://schemas.openxmlformats.org/officeDocument/2006/relationships" xmlns:p="http://schemas.openxmlformats.org/presentationml/2006/main">
+  <p:cSld name="Slide 21">
+    <p:bg>
+      <p:bgPr>
+        <a:solidFill>
+          <a:srgbClr val="FFFFFF"/>
+        </a:solidFill>
+      </p:bgPr>
+    </p:bg>
+    <p:spTree>
+      <p:nvGrpSpPr>
+        <p:cNvPr id="1" name=""/>
+        <p:cNvGrpSpPr/>
+        <p:nvPr/>
+      </p:nvGrpSpPr>
+      <p:grpSpPr>
+        <a:xfrm>
+          <a:off x="0" y="0"/>
+          <a:ext cx="0" cy="0"/>
+          <a:chOff x="0" y="0"/>
+          <a:chExt cx="0" cy="0"/>
+        </a:xfrm>
+      </p:grpSpPr>
+      <p:sp>
+        <p:nvSpPr>
+          <p:cNvPr id="2" name="Text 0"/>
+          <p:cNvSpPr/>
+          <p:nvPr/>
+        </p:nvSpPr>
+        <p:spPr>
+          <a:xfrm>
+            <a:off x="0" y="0"/>
+            <a:ext cx="9144000" cy="101501"/>
+          </a:xfrm>
+          <a:prstGeom prst="rect">
+            <a:avLst/>
+          </a:prstGeom>
+          <a:solidFill>
+            <a:srgbClr val="277884"/>
+          </a:solidFill>
+          <a:ln/>
+        </p:spPr>
+        <p:txBody>
+          <a:bodyPr wrap="square" rtlCol="0" anchor="ctr"/>
+          <a:lstStyle/>
+          <a:p>
+            <a:pPr indent="0" marL="0">
+              <a:buNone/>
+            </a:pPr>
+            <a:endParaRPr lang="en-US" dirty="0"/>
+          </a:p>
+        </p:txBody>
+      </p:sp>
+      <p:sp>
+        <p:nvSpPr>
+          <p:cNvPr id="3" name="Text 1"/>
+          <p:cNvSpPr/>
+          <p:nvPr/>
+        </p:nvSpPr>
+        <p:spPr>
+          <a:xfrm>
+            <a:off x="406301" y="457051"/>
+            <a:ext cx="8498026" cy="274290"/>
+          </a:xfrm>
+          <a:prstGeom prst="rect">
+            <a:avLst/>
+          </a:prstGeom>
+          <a:noFill/>
+          <a:ln/>
+        </p:spPr>
+        <p:txBody>
+          <a:bodyPr wrap="square" lIns="0" tIns="0" rIns="0" bIns="0" rtlCol="0" anchor="t"/>
+          <a:lstStyle/>
+          <a:p>
+            <a:pPr algn="l" indent="0" marL="0">
+              <a:lnSpc>
+                <a:spcPts val="2160"/>
+              </a:lnSpc>
+              <a:spcBef>
+                <a:spcPts val="600"/>
+              </a:spcBef>
+              <a:spcAft>
+                <a:spcPts val="800"/>
+              </a:spcAft>
+              <a:buNone/>
+            </a:pPr>
+            <a:r>
+              <a:rPr lang="en-US" sz="1800" b="1" dirty="0">
+                <a:solidFill>
+                  <a:srgbClr val="FE4447"/>
+                </a:solidFill>
+                <a:latin typeface="Georgia" pitchFamily="34" charset="0"/>
+                <a:ea typeface="Georgia" pitchFamily="34" charset="-122"/>
+                <a:cs typeface="Georgia" pitchFamily="34" charset="-120"/>
+              </a:rPr>
+              <a:t>Teacher notes (cont.)</a:t>
+            </a:r>
+            <a:endParaRPr lang="en-US" sz="1800" dirty="0"/>
+          </a:p>
+        </p:txBody>
+      </p:sp>
+      <p:sp>
+        <p:nvSpPr>
+          <p:cNvPr id="4" name="Text 2"/>
+          <p:cNvSpPr/>
+          <p:nvPr/>
+        </p:nvSpPr>
+        <p:spPr>
+          <a:xfrm>
+            <a:off x="634901" y="883593"/>
+            <a:ext cx="8102798" cy="487561"/>
+          </a:xfrm>
+          <a:prstGeom prst="rect">
+            <a:avLst/>
+          </a:prstGeom>
+          <a:noFill/>
+          <a:ln/>
+        </p:spPr>
+        <p:txBody>
+          <a:bodyPr wrap="square" lIns="0" tIns="0" rIns="0" bIns="0" rtlCol="0" anchor="t"/>
+          <a:lstStyle/>
+          <a:p>
+            <a:pPr algn="l" marL="342900" indent="-342900">
+              <a:lnSpc>
+                <a:spcPts val="1620"/>
+              </a:lnSpc>
+              <a:spcAft>
+                <a:spcPts val="300"/>
+              </a:spcAft>
+              <a:buSzPct val="100000"/>
+              <a:buChar char="•"/>
+            </a:pPr>
+            <a:r>
+              <a:rPr lang="en-US" sz="1200" dirty="0">
+                <a:solidFill>
+                  <a:srgbClr val="1C2833"/>
+                </a:solidFill>
+                <a:latin typeface="Arial" pitchFamily="34" charset="0"/>
+                <a:ea typeface="Arial" pitchFamily="34" charset="-122"/>
+                <a:cs typeface="Arial" pitchFamily="34" charset="-120"/>
+              </a:rPr>
+              <a:t>Don't romanticise sacred groves as universally protected. Many have been encroached, paved over, or turned into commercial temples. The protection is real where it is sustained; it is not magical.</a:t>
+            </a:r>
+            <a:endParaRPr lang="en-US" sz="1200" dirty="0"/>
+          </a:p>
+        </p:txBody>
+      </p:sp>
+      <p:sp>
+        <p:nvSpPr>
+          <p:cNvPr id="5" name="Text 3"/>
+          <p:cNvSpPr/>
+          <p:nvPr/>
+        </p:nvSpPr>
+        <p:spPr>
+          <a:xfrm>
+            <a:off x="406301" y="4434929"/>
+            <a:ext cx="8498026" cy="213271"/>
+          </a:xfrm>
+          <a:prstGeom prst="rect">
+            <a:avLst/>
+          </a:prstGeom>
+          <a:noFill/>
+          <a:ln/>
+        </p:spPr>
+        <p:txBody>
+          <a:bodyPr wrap="square" lIns="0" tIns="0" rIns="0" bIns="0" rtlCol="0" anchor="t"/>
+          <a:lstStyle/>
+          <a:p>
             <a:pPr algn="l" indent="0" marL="0">
               <a:lnSpc>
                 <a:spcPts val="1680"/>
@@ -3637,6 +7078,202 @@
               <a:buNone/>
             </a:pPr>
             <a:r>
+              <a:rPr lang="en-US" sz="1200" dirty="0">
+                <a:solidFill>
+                  <a:srgbClr val="1C2833"/>
+                </a:solidFill>
+                <a:latin typeface="Arial" pitchFamily="34" charset="0"/>
+                <a:ea typeface="Arial" pitchFamily="34" charset="-122"/>
+                <a:cs typeface="Arial" pitchFamily="34" charset="-120"/>
+              </a:rPr>
+              <a:t>Middle ·  · IKS Curriculum</a:t>
+            </a:r>
+            <a:endParaRPr lang="en-US" sz="1200" dirty="0"/>
+          </a:p>
+        </p:txBody>
+      </p:sp>
+    </p:spTree>
+  </p:cSld>
+  <p:clrMapOvr>
+    <a:masterClrMapping/>
+  </p:clrMapOvr>
+</p:sld>
+</file>
+
+<file path=ppt/slides/slide22.xml><?xml version="1.0" encoding="utf-8"?>
+<p:sld xmlns:a="http://schemas.openxmlformats.org/drawingml/2006/main" xmlns:r="http://schemas.openxmlformats.org/officeDocument/2006/relationships" xmlns:p="http://schemas.openxmlformats.org/presentationml/2006/main">
+  <p:cSld name="Slide 22">
+    <p:bg>
+      <p:bgPr>
+        <a:solidFill>
+          <a:srgbClr val="FFFFFF"/>
+        </a:solidFill>
+      </p:bgPr>
+    </p:bg>
+    <p:spTree>
+      <p:nvGrpSpPr>
+        <p:cNvPr id="1" name=""/>
+        <p:cNvGrpSpPr/>
+        <p:nvPr/>
+      </p:nvGrpSpPr>
+      <p:grpSpPr>
+        <a:xfrm>
+          <a:off x="0" y="0"/>
+          <a:ext cx="0" cy="0"/>
+          <a:chOff x="0" y="0"/>
+          <a:chExt cx="0" cy="0"/>
+        </a:xfrm>
+      </p:grpSpPr>
+      <p:sp>
+        <p:nvSpPr>
+          <p:cNvPr id="2" name="Text 0"/>
+          <p:cNvSpPr/>
+          <p:nvPr/>
+        </p:nvSpPr>
+        <p:spPr>
+          <a:xfrm>
+            <a:off x="0" y="0"/>
+            <a:ext cx="9144000" cy="101501"/>
+          </a:xfrm>
+          <a:prstGeom prst="rect">
+            <a:avLst/>
+          </a:prstGeom>
+          <a:solidFill>
+            <a:srgbClr val="277884"/>
+          </a:solidFill>
+          <a:ln/>
+        </p:spPr>
+        <p:txBody>
+          <a:bodyPr wrap="square" rtlCol="0" anchor="ctr"/>
+          <a:lstStyle/>
+          <a:p>
+            <a:pPr indent="0" marL="0">
+              <a:buNone/>
+            </a:pPr>
+            <a:endParaRPr lang="en-US" dirty="0"/>
+          </a:p>
+        </p:txBody>
+      </p:sp>
+      <p:sp>
+        <p:nvSpPr>
+          <p:cNvPr id="3" name="Text 1"/>
+          <p:cNvSpPr/>
+          <p:nvPr/>
+        </p:nvSpPr>
+        <p:spPr>
+          <a:xfrm>
+            <a:off x="406301" y="457051"/>
+            <a:ext cx="8498026" cy="274290"/>
+          </a:xfrm>
+          <a:prstGeom prst="rect">
+            <a:avLst/>
+          </a:prstGeom>
+          <a:noFill/>
+          <a:ln/>
+        </p:spPr>
+        <p:txBody>
+          <a:bodyPr wrap="square" lIns="0" tIns="0" rIns="0" bIns="0" rtlCol="0" anchor="t"/>
+          <a:lstStyle/>
+          <a:p>
+            <a:pPr algn="l" indent="0" marL="0">
+              <a:lnSpc>
+                <a:spcPts val="2160"/>
+              </a:lnSpc>
+              <a:spcBef>
+                <a:spcPts val="600"/>
+              </a:spcBef>
+              <a:spcAft>
+                <a:spcPts val="800"/>
+              </a:spcAft>
+              <a:buNone/>
+            </a:pPr>
+            <a:r>
+              <a:rPr lang="en-US" sz="1800" b="1" dirty="0">
+                <a:solidFill>
+                  <a:srgbClr val="FE4447"/>
+                </a:solidFill>
+                <a:latin typeface="Georgia" pitchFamily="34" charset="0"/>
+                <a:ea typeface="Georgia" pitchFamily="34" charset="-122"/>
+                <a:cs typeface="Georgia" pitchFamily="34" charset="-120"/>
+              </a:rPr>
+              <a:t>Citation(s) used in this lesson</a:t>
+            </a:r>
+            <a:endParaRPr lang="en-US" sz="1800" dirty="0"/>
+          </a:p>
+        </p:txBody>
+      </p:sp>
+      <p:sp>
+        <p:nvSpPr>
+          <p:cNvPr id="4" name="Text 2"/>
+          <p:cNvSpPr/>
+          <p:nvPr/>
+        </p:nvSpPr>
+        <p:spPr>
+          <a:xfrm>
+            <a:off x="634901" y="883593"/>
+            <a:ext cx="8102798" cy="750391"/>
+          </a:xfrm>
+          <a:prstGeom prst="rect">
+            <a:avLst/>
+          </a:prstGeom>
+          <a:noFill/>
+          <a:ln/>
+        </p:spPr>
+        <p:txBody>
+          <a:bodyPr wrap="square" lIns="0" tIns="0" rIns="0" bIns="0" rtlCol="0" anchor="t"/>
+          <a:lstStyle/>
+          <a:p>
+            <a:pPr algn="l" marL="342900" indent="-342900">
+              <a:lnSpc>
+                <a:spcPts val="1620"/>
+              </a:lnSpc>
+              <a:spcAft>
+                <a:spcPts val="300"/>
+              </a:spcAft>
+              <a:buSzPct val="100000"/>
+              <a:buChar char="•"/>
+            </a:pPr>
+            <a:r>
+              <a:rPr lang="en-US" sz="1200" b="1" dirty="0">
+                <a:solidFill>
+                  <a:srgbClr val="1C2833"/>
+                </a:solidFill>
+                <a:latin typeface="Arial" pitchFamily="34" charset="0"/>
+                <a:ea typeface="Arial" pitchFamily="34" charset="-122"/>
+                <a:cs typeface="Arial" pitchFamily="34" charset="-120"/>
+              </a:rPr>
+              <a:t>Gadgil, M. &amp; Vartak, V. D.</a:t>
+            </a:r>
+            <a:pPr algn="l" indent="0" marL="0">
+              <a:lnSpc>
+                <a:spcPts val="1620"/>
+              </a:lnSpc>
+              <a:spcAft>
+                <a:spcPts val="300"/>
+              </a:spcAft>
+              <a:buNone/>
+            </a:pPr>
+            <a:r>
+              <a:rPr lang="en-US" sz="1200" dirty="0">
+                <a:solidFill>
+                  <a:srgbClr val="1C2833"/>
+                </a:solidFill>
+                <a:latin typeface="Arial" pitchFamily="34" charset="0"/>
+                <a:ea typeface="Arial" pitchFamily="34" charset="-122"/>
+                <a:cs typeface="Arial" pitchFamily="34" charset="-120"/>
+              </a:rPr>
+              <a:t> (1976). "The Sacred Groves of Western Ghats in India." </a:t>
+            </a:r>
+            <a:pPr algn="l" indent="0" marL="0">
+              <a:lnSpc>
+                <a:spcPts val="1620"/>
+              </a:lnSpc>
+              <a:spcAft>
+                <a:spcPts val="300"/>
+              </a:spcAft>
+              <a:buNone/>
+            </a:pPr>
+            <a:r>
               <a:rPr lang="en-US" sz="1200" i="1" dirty="0">
                 <a:solidFill>
                   <a:srgbClr val="1C2833"/>
@@ -3645,15 +7282,12 @@
                 <a:ea typeface="Arial" pitchFamily="34" charset="-122"/>
                 <a:cs typeface="Arial" pitchFamily="34" charset="-120"/>
               </a:rPr>
-              <a:t>sarna</a:t>
-            </a:r>
-            <a:pPr algn="l" indent="0" marL="0">
-              <a:lnSpc>
-                <a:spcPts val="1680"/>
-              </a:lnSpc>
-              <a:spcBef>
-                <a:spcPts val="300"/>
-              </a:spcBef>
+              <a:t>Economic Botany</a:t>
+            </a:r>
+            <a:pPr algn="l" indent="0" marL="0">
+              <a:lnSpc>
+                <a:spcPts val="1620"/>
+              </a:lnSpc>
               <a:spcAft>
                 <a:spcPts val="300"/>
               </a:spcAft>
@@ -3668,7 +7302,71 @@
                 <a:ea typeface="Arial" pitchFamily="34" charset="-122"/>
                 <a:cs typeface="Arial" pitchFamily="34" charset="-120"/>
               </a:rPr>
-              <a:t> of Jharkhand. (Internet image search; teacher prepares ~6 images.) – Printed handout: a 1-paragraph extract from Gadgil &amp; Vartak (1976) on the function of sacred groves – Map of India with sacred-grove regions marked (teacher prepares)</a:t>
+              <a:t> 30(2): 152–160. — Paraphrased in the handout.</a:t>
+            </a:r>
+            <a:endParaRPr lang="en-US" sz="1200" dirty="0"/>
+          </a:p>
+          <a:p>
+            <a:pPr algn="l" marL="342900" indent="-342900">
+              <a:lnSpc>
+                <a:spcPts val="1620"/>
+              </a:lnSpc>
+              <a:spcAft>
+                <a:spcPts val="300"/>
+              </a:spcAft>
+              <a:buSzPct val="100000"/>
+              <a:buChar char="•"/>
+            </a:pPr>
+            <a:r>
+              <a:rPr lang="en-US" sz="1200" dirty="0">
+                <a:solidFill>
+                  <a:srgbClr val="1C2833"/>
+                </a:solidFill>
+                <a:latin typeface="Arial" pitchFamily="34" charset="0"/>
+                <a:ea typeface="Arial" pitchFamily="34" charset="-122"/>
+                <a:cs typeface="Arial" pitchFamily="34" charset="-120"/>
+              </a:rPr>
+              <a:t>See </a:t>
+            </a:r>
+            <a:pPr algn="l" indent="0" marL="0">
+              <a:lnSpc>
+                <a:spcPts val="1620"/>
+              </a:lnSpc>
+              <a:spcAft>
+                <a:spcPts val="300"/>
+              </a:spcAft>
+              <a:buNone/>
+            </a:pPr>
+            <a:r>
+              <a:rPr lang="en-US" sz="1200" dirty="0">
+                <a:solidFill>
+                  <a:srgbClr val="1C2833"/>
+                </a:solidFill>
+                <a:latin typeface="Arial" pitchFamily="34" charset="0"/>
+                <a:ea typeface="Arial" pitchFamily="34" charset="-122"/>
+                <a:cs typeface="Arial" pitchFamily="34" charset="-120"/>
+              </a:rPr>
+              <a:t>sources.md</a:t>
+            </a:r>
+            <a:pPr algn="l" indent="0" marL="0">
+              <a:lnSpc>
+                <a:spcPts val="1620"/>
+              </a:lnSpc>
+              <a:spcAft>
+                <a:spcPts val="300"/>
+              </a:spcAft>
+              <a:buNone/>
+            </a:pPr>
+            <a:r>
+              <a:rPr lang="en-US" sz="1200" dirty="0">
+                <a:solidFill>
+                  <a:srgbClr val="1C2833"/>
+                </a:solidFill>
+                <a:latin typeface="Arial" pitchFamily="34" charset="0"/>
+                <a:ea typeface="Arial" pitchFamily="34" charset="-122"/>
+                <a:cs typeface="Arial" pitchFamily="34" charset="-120"/>
+              </a:rPr>
+              <a:t> for the full reference and the Chapple &amp; Tucker (2000) anthology if you need teacher background.</a:t>
             </a:r>
             <a:endParaRPr lang="en-US" sz="1200" dirty="0"/>
           </a:p>
@@ -3826,7 +7524,7 @@
                 <a:ea typeface="Georgia" pitchFamily="34" charset="-122"/>
                 <a:cs typeface="Georgia" pitchFamily="34" charset="-120"/>
               </a:rPr>
-              <a:t>Vocabulary</a:t>
+              <a:t>Materials</a:t>
             </a:r>
             <a:endParaRPr lang="en-US" sz="1800" dirty="0"/>
           </a:p>
@@ -3841,7 +7539,7 @@
         <p:spPr>
           <a:xfrm>
             <a:off x="634901" y="883593"/>
-            <a:ext cx="8102798" cy="1668363"/>
+            <a:ext cx="8102798" cy="975122"/>
           </a:xfrm>
           <a:prstGeom prst="rect">
             <a:avLst/>
@@ -3864,6 +7562,26 @@
               <a:buChar char="•"/>
             </a:pPr>
             <a:r>
+              <a:rPr lang="en-US" sz="1200" dirty="0">
+                <a:solidFill>
+                  <a:srgbClr val="1C2833"/>
+                </a:solidFill>
+                <a:latin typeface="Arial" pitchFamily="34" charset="0"/>
+                <a:ea typeface="Arial" pitchFamily="34" charset="-122"/>
+                <a:cs typeface="Arial" pitchFamily="34" charset="-120"/>
+              </a:rPr>
+              <a:t>A handful of photographs of sacred groves — the </a:t>
+            </a:r>
+            <a:pPr algn="l" indent="0" marL="0">
+              <a:lnSpc>
+                <a:spcPts val="1620"/>
+              </a:lnSpc>
+              <a:spcAft>
+                <a:spcPts val="300"/>
+              </a:spcAft>
+              <a:buNone/>
+            </a:pPr>
+            <a:r>
               <a:rPr lang="en-US" sz="1200" i="1" dirty="0">
                 <a:solidFill>
                   <a:srgbClr val="1C2833"/>
@@ -3872,6 +7590,46 @@
                 <a:ea typeface="Arial" pitchFamily="34" charset="-122"/>
                 <a:cs typeface="Arial" pitchFamily="34" charset="-120"/>
               </a:rPr>
+              <a:t>kāvu</a:t>
+            </a:r>
+            <a:pPr algn="l" indent="0" marL="0">
+              <a:lnSpc>
+                <a:spcPts val="1620"/>
+              </a:lnSpc>
+              <a:spcAft>
+                <a:spcPts val="300"/>
+              </a:spcAft>
+              <a:buNone/>
+            </a:pPr>
+            <a:r>
+              <a:rPr lang="en-US" sz="1200" dirty="0">
+                <a:solidFill>
+                  <a:srgbClr val="1C2833"/>
+                </a:solidFill>
+                <a:latin typeface="Arial" pitchFamily="34" charset="0"/>
+                <a:ea typeface="Arial" pitchFamily="34" charset="-122"/>
+                <a:cs typeface="Arial" pitchFamily="34" charset="-120"/>
+              </a:rPr>
+              <a:t> of Kerala, the </a:t>
+            </a:r>
+            <a:pPr algn="l" indent="0" marL="0">
+              <a:lnSpc>
+                <a:spcPts val="1620"/>
+              </a:lnSpc>
+              <a:spcAft>
+                <a:spcPts val="300"/>
+              </a:spcAft>
+              <a:buNone/>
+            </a:pPr>
+            <a:r>
+              <a:rPr lang="en-US" sz="1200" i="1" dirty="0">
+                <a:solidFill>
+                  <a:srgbClr val="1C2833"/>
+                </a:solidFill>
+                <a:latin typeface="Arial" pitchFamily="34" charset="0"/>
+                <a:ea typeface="Arial" pitchFamily="34" charset="-122"/>
+                <a:cs typeface="Arial" pitchFamily="34" charset="-120"/>
+              </a:rPr>
               <a:t>devarakāḍu</a:t>
             </a:r>
             <a:pPr algn="l" indent="0" marL="0">
@@ -3892,7 +7650,47 @@
                 <a:ea typeface="Arial" pitchFamily="34" charset="-122"/>
                 <a:cs typeface="Arial" pitchFamily="34" charset="-120"/>
               </a:rPr>
-              <a:t> (IAST: devarakāḍu; lit. "god's forest," Kannada) — sacred forest patch dedicated to a village deity, traditionally protected by community rule.</a:t>
+              <a:t> of Coorg, the </a:t>
+            </a:r>
+            <a:pPr algn="l" indent="0" marL="0">
+              <a:lnSpc>
+                <a:spcPts val="1620"/>
+              </a:lnSpc>
+              <a:spcAft>
+                <a:spcPts val="300"/>
+              </a:spcAft>
+              <a:buNone/>
+            </a:pPr>
+            <a:r>
+              <a:rPr lang="en-US" sz="1200" i="1" dirty="0">
+                <a:solidFill>
+                  <a:srgbClr val="1C2833"/>
+                </a:solidFill>
+                <a:latin typeface="Arial" pitchFamily="34" charset="0"/>
+                <a:ea typeface="Arial" pitchFamily="34" charset="-122"/>
+                <a:cs typeface="Arial" pitchFamily="34" charset="-120"/>
+              </a:rPr>
+              <a:t>sarna</a:t>
+            </a:r>
+            <a:pPr algn="l" indent="0" marL="0">
+              <a:lnSpc>
+                <a:spcPts val="1620"/>
+              </a:lnSpc>
+              <a:spcAft>
+                <a:spcPts val="300"/>
+              </a:spcAft>
+              <a:buNone/>
+            </a:pPr>
+            <a:r>
+              <a:rPr lang="en-US" sz="1200" dirty="0">
+                <a:solidFill>
+                  <a:srgbClr val="1C2833"/>
+                </a:solidFill>
+                <a:latin typeface="Arial" pitchFamily="34" charset="0"/>
+                <a:ea typeface="Arial" pitchFamily="34" charset="-122"/>
+                <a:cs typeface="Arial" pitchFamily="34" charset="-120"/>
+              </a:rPr>
+              <a:t> of Jharkhand. (Internet image search; teacher prepares ~6 images.)</a:t>
             </a:r>
             <a:endParaRPr lang="en-US" sz="1200" dirty="0"/>
           </a:p>
@@ -3908,26 +7706,6 @@
               <a:buChar char="•"/>
             </a:pPr>
             <a:r>
-              <a:rPr lang="en-US" sz="1200" i="1" dirty="0">
-                <a:solidFill>
-                  <a:srgbClr val="1C2833"/>
-                </a:solidFill>
-                <a:latin typeface="Arial" pitchFamily="34" charset="0"/>
-                <a:ea typeface="Arial" pitchFamily="34" charset="-122"/>
-                <a:cs typeface="Arial" pitchFamily="34" charset="-120"/>
-              </a:rPr>
-              <a:t>sarna</a:t>
-            </a:r>
-            <a:pPr algn="l" indent="0" marL="0">
-              <a:lnSpc>
-                <a:spcPts val="1620"/>
-              </a:lnSpc>
-              <a:spcAft>
-                <a:spcPts val="300"/>
-              </a:spcAft>
-              <a:buNone/>
-            </a:pPr>
-            <a:r>
               <a:rPr lang="en-US" sz="1200" dirty="0">
                 <a:solidFill>
                   <a:srgbClr val="1C2833"/>
@@ -3936,87 +7714,7 @@
                 <a:ea typeface="Arial" pitchFamily="34" charset="-122"/>
                 <a:cs typeface="Arial" pitchFamily="34" charset="-120"/>
               </a:rPr>
-              <a:t> (sarnā in some dialects) — sacred grove in the </a:t>
-            </a:r>
-            <a:pPr algn="l" indent="0" marL="0">
-              <a:lnSpc>
-                <a:spcPts val="1620"/>
-              </a:lnSpc>
-              <a:spcAft>
-                <a:spcPts val="300"/>
-              </a:spcAft>
-              <a:buNone/>
-            </a:pPr>
-            <a:r>
-              <a:rPr lang="en-US" sz="1200" i="1" dirty="0">
-                <a:solidFill>
-                  <a:srgbClr val="1C2833"/>
-                </a:solidFill>
-                <a:latin typeface="Arial" pitchFamily="34" charset="0"/>
-                <a:ea typeface="Arial" pitchFamily="34" charset="-122"/>
-                <a:cs typeface="Arial" pitchFamily="34" charset="-120"/>
-              </a:rPr>
-              <a:t>Adivasi</a:t>
-            </a:r>
-            <a:pPr algn="l" indent="0" marL="0">
-              <a:lnSpc>
-                <a:spcPts val="1620"/>
-              </a:lnSpc>
-              <a:spcAft>
-                <a:spcPts val="300"/>
-              </a:spcAft>
-              <a:buNone/>
-            </a:pPr>
-            <a:r>
-              <a:rPr lang="en-US" sz="1200" dirty="0">
-                <a:solidFill>
-                  <a:srgbClr val="1C2833"/>
-                </a:solidFill>
-                <a:latin typeface="Arial" pitchFamily="34" charset="0"/>
-                <a:ea typeface="Arial" pitchFamily="34" charset="-122"/>
-                <a:cs typeface="Arial" pitchFamily="34" charset="-120"/>
-              </a:rPr>
-              <a:t> belt (Jharkhand, West Bengal, Odisha), centred on the </a:t>
-            </a:r>
-            <a:pPr algn="l" indent="0" marL="0">
-              <a:lnSpc>
-                <a:spcPts val="1620"/>
-              </a:lnSpc>
-              <a:spcAft>
-                <a:spcPts val="300"/>
-              </a:spcAft>
-              <a:buNone/>
-            </a:pPr>
-            <a:r>
-              <a:rPr lang="en-US" sz="1200" i="1" dirty="0">
-                <a:solidFill>
-                  <a:srgbClr val="1C2833"/>
-                </a:solidFill>
-                <a:latin typeface="Arial" pitchFamily="34" charset="0"/>
-                <a:ea typeface="Arial" pitchFamily="34" charset="-122"/>
-                <a:cs typeface="Arial" pitchFamily="34" charset="-120"/>
-              </a:rPr>
-              <a:t>sal</a:t>
-            </a:r>
-            <a:pPr algn="l" indent="0" marL="0">
-              <a:lnSpc>
-                <a:spcPts val="1620"/>
-              </a:lnSpc>
-              <a:spcAft>
-                <a:spcPts val="300"/>
-              </a:spcAft>
-              <a:buNone/>
-            </a:pPr>
-            <a:r>
-              <a:rPr lang="en-US" sz="1200" dirty="0">
-                <a:solidFill>
-                  <a:srgbClr val="1C2833"/>
-                </a:solidFill>
-                <a:latin typeface="Arial" pitchFamily="34" charset="0"/>
-                <a:ea typeface="Arial" pitchFamily="34" charset="-122"/>
-                <a:cs typeface="Arial" pitchFamily="34" charset="-120"/>
-              </a:rPr>
-              <a:t> tree and tribal deities.</a:t>
+              <a:t>Printed handout: a 1-paragraph extract from Gadgil &amp; Vartak (1976) on the function of sacred groves</a:t>
             </a:r>
             <a:endParaRPr lang="en-US" sz="1200" dirty="0"/>
           </a:p>
@@ -4032,26 +7730,6 @@
               <a:buChar char="•"/>
             </a:pPr>
             <a:r>
-              <a:rPr lang="en-US" sz="1200" i="1" dirty="0">
-                <a:solidFill>
-                  <a:srgbClr val="1C2833"/>
-                </a:solidFill>
-                <a:latin typeface="Arial" pitchFamily="34" charset="0"/>
-                <a:ea typeface="Arial" pitchFamily="34" charset="-122"/>
-                <a:cs typeface="Arial" pitchFamily="34" charset="-120"/>
-              </a:rPr>
-              <a:t>kāvu</a:t>
-            </a:r>
-            <a:pPr algn="l" indent="0" marL="0">
-              <a:lnSpc>
-                <a:spcPts val="1620"/>
-              </a:lnSpc>
-              <a:spcAft>
-                <a:spcPts val="300"/>
-              </a:spcAft>
-              <a:buNone/>
-            </a:pPr>
-            <a:r>
               <a:rPr lang="en-US" sz="1200" dirty="0">
                 <a:solidFill>
                   <a:srgbClr val="1C2833"/>
@@ -4060,95 +7738,7 @@
                 <a:ea typeface="Arial" pitchFamily="34" charset="-122"/>
                 <a:cs typeface="Arial" pitchFamily="34" charset="-120"/>
               </a:rPr>
-              <a:t> — sacred grove in Kerala (Malayalam).</a:t>
-            </a:r>
-            <a:endParaRPr lang="en-US" sz="1200" dirty="0"/>
-          </a:p>
-          <a:p>
-            <a:pPr algn="l" marL="342900" indent="-342900">
-              <a:lnSpc>
-                <a:spcPts val="1620"/>
-              </a:lnSpc>
-              <a:spcAft>
-                <a:spcPts val="300"/>
-              </a:spcAft>
-              <a:buSzPct val="100000"/>
-              <a:buChar char="•"/>
-            </a:pPr>
-            <a:r>
-              <a:rPr lang="en-US" sz="1200" i="1" dirty="0">
-                <a:solidFill>
-                  <a:srgbClr val="1C2833"/>
-                </a:solidFill>
-                <a:latin typeface="Arial" pitchFamily="34" charset="0"/>
-                <a:ea typeface="Arial" pitchFamily="34" charset="-122"/>
-                <a:cs typeface="Arial" pitchFamily="34" charset="-120"/>
-              </a:rPr>
-              <a:t>orans</a:t>
-            </a:r>
-            <a:pPr algn="l" indent="0" marL="0">
-              <a:lnSpc>
-                <a:spcPts val="1620"/>
-              </a:lnSpc>
-              <a:spcAft>
-                <a:spcPts val="300"/>
-              </a:spcAft>
-              <a:buNone/>
-            </a:pPr>
-            <a:r>
-              <a:rPr lang="en-US" sz="1200" dirty="0">
-                <a:solidFill>
-                  <a:srgbClr val="1C2833"/>
-                </a:solidFill>
-                <a:latin typeface="Arial" pitchFamily="34" charset="0"/>
-                <a:ea typeface="Arial" pitchFamily="34" charset="-122"/>
-                <a:cs typeface="Arial" pitchFamily="34" charset="-120"/>
-              </a:rPr>
-              <a:t> — sacred grove / pasture in Rajasthan.</a:t>
-            </a:r>
-            <a:endParaRPr lang="en-US" sz="1200" dirty="0"/>
-          </a:p>
-          <a:p>
-            <a:pPr algn="l" marL="342900" indent="-342900">
-              <a:lnSpc>
-                <a:spcPts val="1620"/>
-              </a:lnSpc>
-              <a:spcAft>
-                <a:spcPts val="300"/>
-              </a:spcAft>
-              <a:buSzPct val="100000"/>
-              <a:buChar char="•"/>
-            </a:pPr>
-            <a:r>
-              <a:rPr lang="en-US" sz="1200" i="1" dirty="0">
-                <a:solidFill>
-                  <a:srgbClr val="1C2833"/>
-                </a:solidFill>
-                <a:latin typeface="Arial" pitchFamily="34" charset="0"/>
-                <a:ea typeface="Arial" pitchFamily="34" charset="-122"/>
-                <a:cs typeface="Arial" pitchFamily="34" charset="-120"/>
-              </a:rPr>
-              <a:t>biodiversity</a:t>
-            </a:r>
-            <a:pPr algn="l" indent="0" marL="0">
-              <a:lnSpc>
-                <a:spcPts val="1620"/>
-              </a:lnSpc>
-              <a:spcAft>
-                <a:spcPts val="300"/>
-              </a:spcAft>
-              <a:buNone/>
-            </a:pPr>
-            <a:r>
-              <a:rPr lang="en-US" sz="1200" dirty="0">
-                <a:solidFill>
-                  <a:srgbClr val="1C2833"/>
-                </a:solidFill>
-                <a:latin typeface="Arial" pitchFamily="34" charset="0"/>
-                <a:ea typeface="Arial" pitchFamily="34" charset="-122"/>
-                <a:cs typeface="Arial" pitchFamily="34" charset="-120"/>
-              </a:rPr>
-              <a:t> — the variety of living species in a particular area.</a:t>
+              <a:t>Map of India with sacred-grove regions marked (teacher prepares)</a:t>
             </a:r>
             <a:endParaRPr lang="en-US" sz="1200" dirty="0"/>
           </a:p>
@@ -4306,7 +7896,7 @@
                 <a:ea typeface="Georgia" pitchFamily="34" charset="-122"/>
                 <a:cs typeface="Georgia" pitchFamily="34" charset="-120"/>
               </a:rPr>
-              <a:t>Lesson flow</a:t>
+              <a:t>Vocabulary</a:t>
             </a:r>
             <a:endParaRPr lang="en-US" sz="1800" dirty="0"/>
           </a:p>
@@ -4315,6 +7905,328 @@
       <p:sp>
         <p:nvSpPr>
           <p:cNvPr id="4" name="Text 2"/>
+          <p:cNvSpPr/>
+          <p:nvPr/>
+        </p:nvSpPr>
+        <p:spPr>
+          <a:xfrm>
+            <a:off x="634901" y="883593"/>
+            <a:ext cx="8102798" cy="1668363"/>
+          </a:xfrm>
+          <a:prstGeom prst="rect">
+            <a:avLst/>
+          </a:prstGeom>
+          <a:noFill/>
+          <a:ln/>
+        </p:spPr>
+        <p:txBody>
+          <a:bodyPr wrap="square" lIns="0" tIns="0" rIns="0" bIns="0" rtlCol="0" anchor="t"/>
+          <a:lstStyle/>
+          <a:p>
+            <a:pPr algn="l" marL="342900" indent="-342900">
+              <a:lnSpc>
+                <a:spcPts val="1620"/>
+              </a:lnSpc>
+              <a:spcAft>
+                <a:spcPts val="300"/>
+              </a:spcAft>
+              <a:buSzPct val="100000"/>
+              <a:buChar char="•"/>
+            </a:pPr>
+            <a:r>
+              <a:rPr lang="en-US" sz="1200" i="1" dirty="0">
+                <a:solidFill>
+                  <a:srgbClr val="1C2833"/>
+                </a:solidFill>
+                <a:latin typeface="Arial" pitchFamily="34" charset="0"/>
+                <a:ea typeface="Arial" pitchFamily="34" charset="-122"/>
+                <a:cs typeface="Arial" pitchFamily="34" charset="-120"/>
+              </a:rPr>
+              <a:t>devarakāḍu</a:t>
+            </a:r>
+            <a:pPr algn="l" indent="0" marL="0">
+              <a:lnSpc>
+                <a:spcPts val="1620"/>
+              </a:lnSpc>
+              <a:spcAft>
+                <a:spcPts val="300"/>
+              </a:spcAft>
+              <a:buNone/>
+            </a:pPr>
+            <a:r>
+              <a:rPr lang="en-US" sz="1200" dirty="0">
+                <a:solidFill>
+                  <a:srgbClr val="1C2833"/>
+                </a:solidFill>
+                <a:latin typeface="Arial" pitchFamily="34" charset="0"/>
+                <a:ea typeface="Arial" pitchFamily="34" charset="-122"/>
+                <a:cs typeface="Arial" pitchFamily="34" charset="-120"/>
+              </a:rPr>
+              <a:t> (IAST: devarakāḍu; lit. "god's forest," Kannada) — sacred forest patch dedicated to a village deity, traditionally protected by community rule.</a:t>
+            </a:r>
+            <a:endParaRPr lang="en-US" sz="1200" dirty="0"/>
+          </a:p>
+          <a:p>
+            <a:pPr algn="l" marL="342900" indent="-342900">
+              <a:lnSpc>
+                <a:spcPts val="1620"/>
+              </a:lnSpc>
+              <a:spcAft>
+                <a:spcPts val="300"/>
+              </a:spcAft>
+              <a:buSzPct val="100000"/>
+              <a:buChar char="•"/>
+            </a:pPr>
+            <a:r>
+              <a:rPr lang="en-US" sz="1200" i="1" dirty="0">
+                <a:solidFill>
+                  <a:srgbClr val="1C2833"/>
+                </a:solidFill>
+                <a:latin typeface="Arial" pitchFamily="34" charset="0"/>
+                <a:ea typeface="Arial" pitchFamily="34" charset="-122"/>
+                <a:cs typeface="Arial" pitchFamily="34" charset="-120"/>
+              </a:rPr>
+              <a:t>sarna</a:t>
+            </a:r>
+            <a:pPr algn="l" indent="0" marL="0">
+              <a:lnSpc>
+                <a:spcPts val="1620"/>
+              </a:lnSpc>
+              <a:spcAft>
+                <a:spcPts val="300"/>
+              </a:spcAft>
+              <a:buNone/>
+            </a:pPr>
+            <a:r>
+              <a:rPr lang="en-US" sz="1200" dirty="0">
+                <a:solidFill>
+                  <a:srgbClr val="1C2833"/>
+                </a:solidFill>
+                <a:latin typeface="Arial" pitchFamily="34" charset="0"/>
+                <a:ea typeface="Arial" pitchFamily="34" charset="-122"/>
+                <a:cs typeface="Arial" pitchFamily="34" charset="-120"/>
+              </a:rPr>
+              <a:t> (sarnā in some dialects) — sacred grove in the </a:t>
+            </a:r>
+            <a:pPr algn="l" indent="0" marL="0">
+              <a:lnSpc>
+                <a:spcPts val="1620"/>
+              </a:lnSpc>
+              <a:spcAft>
+                <a:spcPts val="300"/>
+              </a:spcAft>
+              <a:buNone/>
+            </a:pPr>
+            <a:r>
+              <a:rPr lang="en-US" sz="1200" i="1" dirty="0">
+                <a:solidFill>
+                  <a:srgbClr val="1C2833"/>
+                </a:solidFill>
+                <a:latin typeface="Arial" pitchFamily="34" charset="0"/>
+                <a:ea typeface="Arial" pitchFamily="34" charset="-122"/>
+                <a:cs typeface="Arial" pitchFamily="34" charset="-120"/>
+              </a:rPr>
+              <a:t>Adivasi</a:t>
+            </a:r>
+            <a:pPr algn="l" indent="0" marL="0">
+              <a:lnSpc>
+                <a:spcPts val="1620"/>
+              </a:lnSpc>
+              <a:spcAft>
+                <a:spcPts val="300"/>
+              </a:spcAft>
+              <a:buNone/>
+            </a:pPr>
+            <a:r>
+              <a:rPr lang="en-US" sz="1200" dirty="0">
+                <a:solidFill>
+                  <a:srgbClr val="1C2833"/>
+                </a:solidFill>
+                <a:latin typeface="Arial" pitchFamily="34" charset="0"/>
+                <a:ea typeface="Arial" pitchFamily="34" charset="-122"/>
+                <a:cs typeface="Arial" pitchFamily="34" charset="-120"/>
+              </a:rPr>
+              <a:t> belt (Jharkhand, West Bengal, Odisha), centred on the </a:t>
+            </a:r>
+            <a:pPr algn="l" indent="0" marL="0">
+              <a:lnSpc>
+                <a:spcPts val="1620"/>
+              </a:lnSpc>
+              <a:spcAft>
+                <a:spcPts val="300"/>
+              </a:spcAft>
+              <a:buNone/>
+            </a:pPr>
+            <a:r>
+              <a:rPr lang="en-US" sz="1200" i="1" dirty="0">
+                <a:solidFill>
+                  <a:srgbClr val="1C2833"/>
+                </a:solidFill>
+                <a:latin typeface="Arial" pitchFamily="34" charset="0"/>
+                <a:ea typeface="Arial" pitchFamily="34" charset="-122"/>
+                <a:cs typeface="Arial" pitchFamily="34" charset="-120"/>
+              </a:rPr>
+              <a:t>sal</a:t>
+            </a:r>
+            <a:pPr algn="l" indent="0" marL="0">
+              <a:lnSpc>
+                <a:spcPts val="1620"/>
+              </a:lnSpc>
+              <a:spcAft>
+                <a:spcPts val="300"/>
+              </a:spcAft>
+              <a:buNone/>
+            </a:pPr>
+            <a:r>
+              <a:rPr lang="en-US" sz="1200" dirty="0">
+                <a:solidFill>
+                  <a:srgbClr val="1C2833"/>
+                </a:solidFill>
+                <a:latin typeface="Arial" pitchFamily="34" charset="0"/>
+                <a:ea typeface="Arial" pitchFamily="34" charset="-122"/>
+                <a:cs typeface="Arial" pitchFamily="34" charset="-120"/>
+              </a:rPr>
+              <a:t> tree and tribal deities.</a:t>
+            </a:r>
+            <a:endParaRPr lang="en-US" sz="1200" dirty="0"/>
+          </a:p>
+          <a:p>
+            <a:pPr algn="l" marL="342900" indent="-342900">
+              <a:lnSpc>
+                <a:spcPts val="1620"/>
+              </a:lnSpc>
+              <a:spcAft>
+                <a:spcPts val="300"/>
+              </a:spcAft>
+              <a:buSzPct val="100000"/>
+              <a:buChar char="•"/>
+            </a:pPr>
+            <a:r>
+              <a:rPr lang="en-US" sz="1200" i="1" dirty="0">
+                <a:solidFill>
+                  <a:srgbClr val="1C2833"/>
+                </a:solidFill>
+                <a:latin typeface="Arial" pitchFamily="34" charset="0"/>
+                <a:ea typeface="Arial" pitchFamily="34" charset="-122"/>
+                <a:cs typeface="Arial" pitchFamily="34" charset="-120"/>
+              </a:rPr>
+              <a:t>kāvu</a:t>
+            </a:r>
+            <a:pPr algn="l" indent="0" marL="0">
+              <a:lnSpc>
+                <a:spcPts val="1620"/>
+              </a:lnSpc>
+              <a:spcAft>
+                <a:spcPts val="300"/>
+              </a:spcAft>
+              <a:buNone/>
+            </a:pPr>
+            <a:r>
+              <a:rPr lang="en-US" sz="1200" dirty="0">
+                <a:solidFill>
+                  <a:srgbClr val="1C2833"/>
+                </a:solidFill>
+                <a:latin typeface="Arial" pitchFamily="34" charset="0"/>
+                <a:ea typeface="Arial" pitchFamily="34" charset="-122"/>
+                <a:cs typeface="Arial" pitchFamily="34" charset="-120"/>
+              </a:rPr>
+              <a:t> — sacred grove in Kerala (Malayalam).</a:t>
+            </a:r>
+            <a:endParaRPr lang="en-US" sz="1200" dirty="0"/>
+          </a:p>
+          <a:p>
+            <a:pPr algn="l" marL="342900" indent="-342900">
+              <a:lnSpc>
+                <a:spcPts val="1620"/>
+              </a:lnSpc>
+              <a:spcAft>
+                <a:spcPts val="300"/>
+              </a:spcAft>
+              <a:buSzPct val="100000"/>
+              <a:buChar char="•"/>
+            </a:pPr>
+            <a:r>
+              <a:rPr lang="en-US" sz="1200" i="1" dirty="0">
+                <a:solidFill>
+                  <a:srgbClr val="1C2833"/>
+                </a:solidFill>
+                <a:latin typeface="Arial" pitchFamily="34" charset="0"/>
+                <a:ea typeface="Arial" pitchFamily="34" charset="-122"/>
+                <a:cs typeface="Arial" pitchFamily="34" charset="-120"/>
+              </a:rPr>
+              <a:t>orans</a:t>
+            </a:r>
+            <a:pPr algn="l" indent="0" marL="0">
+              <a:lnSpc>
+                <a:spcPts val="1620"/>
+              </a:lnSpc>
+              <a:spcAft>
+                <a:spcPts val="300"/>
+              </a:spcAft>
+              <a:buNone/>
+            </a:pPr>
+            <a:r>
+              <a:rPr lang="en-US" sz="1200" dirty="0">
+                <a:solidFill>
+                  <a:srgbClr val="1C2833"/>
+                </a:solidFill>
+                <a:latin typeface="Arial" pitchFamily="34" charset="0"/>
+                <a:ea typeface="Arial" pitchFamily="34" charset="-122"/>
+                <a:cs typeface="Arial" pitchFamily="34" charset="-120"/>
+              </a:rPr>
+              <a:t> — sacred grove / pasture in Rajasthan.</a:t>
+            </a:r>
+            <a:endParaRPr lang="en-US" sz="1200" dirty="0"/>
+          </a:p>
+          <a:p>
+            <a:pPr algn="l" marL="342900" indent="-342900">
+              <a:lnSpc>
+                <a:spcPts val="1620"/>
+              </a:lnSpc>
+              <a:spcAft>
+                <a:spcPts val="300"/>
+              </a:spcAft>
+              <a:buSzPct val="100000"/>
+              <a:buChar char="•"/>
+            </a:pPr>
+            <a:r>
+              <a:rPr lang="en-US" sz="1200" i="1" dirty="0">
+                <a:solidFill>
+                  <a:srgbClr val="1C2833"/>
+                </a:solidFill>
+                <a:latin typeface="Arial" pitchFamily="34" charset="0"/>
+                <a:ea typeface="Arial" pitchFamily="34" charset="-122"/>
+                <a:cs typeface="Arial" pitchFamily="34" charset="-120"/>
+              </a:rPr>
+              <a:t>biodiversity</a:t>
+            </a:r>
+            <a:pPr algn="l" indent="0" marL="0">
+              <a:lnSpc>
+                <a:spcPts val="1620"/>
+              </a:lnSpc>
+              <a:spcAft>
+                <a:spcPts val="300"/>
+              </a:spcAft>
+              <a:buNone/>
+            </a:pPr>
+            <a:r>
+              <a:rPr lang="en-US" sz="1200" dirty="0">
+                <a:solidFill>
+                  <a:srgbClr val="1C2833"/>
+                </a:solidFill>
+                <a:latin typeface="Arial" pitchFamily="34" charset="0"/>
+                <a:ea typeface="Arial" pitchFamily="34" charset="-122"/>
+                <a:cs typeface="Arial" pitchFamily="34" charset="-120"/>
+              </a:rPr>
+              <a:t> — the variety of living species in a particular area.</a:t>
+            </a:r>
+            <a:endParaRPr lang="en-US" sz="1200" dirty="0"/>
+          </a:p>
+        </p:txBody>
+      </p:sp>
+      <p:sp>
+        <p:nvSpPr>
+          <p:cNvPr id="5" name="Text 3"/>
           <p:cNvSpPr/>
           <p:nvPr/>
         </p:nvSpPr>
@@ -4464,7 +8376,7 @@
                 <a:ea typeface="Georgia" pitchFamily="34" charset="-122"/>
                 <a:cs typeface="Georgia" pitchFamily="34" charset="-120"/>
               </a:rPr>
-              <a:t>Warm-up (5 min)</a:t>
+              <a:t>Lesson flow</a:t>
             </a:r>
             <a:endParaRPr lang="en-US" sz="1800" dirty="0"/>
           </a:p>
@@ -4473,164 +8385,6 @@
       <p:sp>
         <p:nvSpPr>
           <p:cNvPr id="4" name="Text 2"/>
-          <p:cNvSpPr/>
-          <p:nvPr/>
-        </p:nvSpPr>
-        <p:spPr>
-          <a:xfrm>
-            <a:off x="406301" y="870942"/>
-            <a:ext cx="8498026" cy="213271"/>
-          </a:xfrm>
-          <a:prstGeom prst="rect">
-            <a:avLst/>
-          </a:prstGeom>
-          <a:noFill/>
-          <a:ln/>
-        </p:spPr>
-        <p:txBody>
-          <a:bodyPr wrap="square" lIns="0" tIns="0" rIns="0" bIns="0" rtlCol="0" anchor="t"/>
-          <a:lstStyle/>
-          <a:p>
-            <a:pPr algn="l" indent="0" marL="0">
-              <a:lnSpc>
-                <a:spcPts val="1680"/>
-              </a:lnSpc>
-              <a:spcBef>
-                <a:spcPts val="300"/>
-              </a:spcBef>
-              <a:spcAft>
-                <a:spcPts val="300"/>
-              </a:spcAft>
-              <a:buNone/>
-            </a:pPr>
-            <a:r>
-              <a:rPr lang="en-US" sz="1200" dirty="0">
-                <a:solidFill>
-                  <a:srgbClr val="1C2833"/>
-                </a:solidFill>
-                <a:latin typeface="Arial" pitchFamily="34" charset="0"/>
-                <a:ea typeface="Arial" pitchFamily="34" charset="-122"/>
-                <a:cs typeface="Arial" pitchFamily="34" charset="-120"/>
-              </a:rPr>
-              <a:t>– Project one photograph of a sacred grove (dense, untouched, surrounded by cleared agricultural land).</a:t>
-            </a:r>
-            <a:endParaRPr lang="en-US" sz="1200" dirty="0"/>
-          </a:p>
-        </p:txBody>
-      </p:sp>
-      <p:sp>
-        <p:nvSpPr>
-          <p:cNvPr id="5" name="Text 3"/>
-          <p:cNvSpPr/>
-          <p:nvPr/>
-        </p:nvSpPr>
-        <p:spPr>
-          <a:xfrm>
-            <a:off x="634901" y="1173063"/>
-            <a:ext cx="8102798" cy="525661"/>
-          </a:xfrm>
-          <a:prstGeom prst="rect">
-            <a:avLst/>
-          </a:prstGeom>
-          <a:noFill/>
-          <a:ln/>
-        </p:spPr>
-        <p:txBody>
-          <a:bodyPr wrap="square" lIns="0" tIns="0" rIns="0" bIns="0" rtlCol="0" anchor="t"/>
-          <a:lstStyle/>
-          <a:p>
-            <a:pPr algn="l" marL="342900" indent="-342900">
-              <a:lnSpc>
-                <a:spcPts val="1620"/>
-              </a:lnSpc>
-              <a:spcAft>
-                <a:spcPts val="300"/>
-              </a:spcAft>
-              <a:buSzPct val="100000"/>
-              <a:buChar char="•"/>
-            </a:pPr>
-            <a:r>
-              <a:rPr lang="en-US" sz="1200" i="1" dirty="0">
-                <a:solidFill>
-                  <a:srgbClr val="1C2833"/>
-                </a:solidFill>
-                <a:latin typeface="Arial" pitchFamily="34" charset="0"/>
-                <a:ea typeface="Arial" pitchFamily="34" charset="-122"/>
-                <a:cs typeface="Arial" pitchFamily="34" charset="-120"/>
-              </a:rPr>
-              <a:t>"What do you notice about this patch of forest compared to what's around it?"</a:t>
-            </a:r>
-            <a:pPr algn="l" indent="0" marL="0">
-              <a:lnSpc>
-                <a:spcPts val="1620"/>
-              </a:lnSpc>
-              <a:spcAft>
-                <a:spcPts val="300"/>
-              </a:spcAft>
-              <a:buNone/>
-            </a:pPr>
-            <a:r>
-              <a:rPr lang="en-US" sz="1200" dirty="0">
-                <a:solidFill>
-                  <a:srgbClr val="1C2833"/>
-                </a:solidFill>
-                <a:latin typeface="Arial" pitchFamily="34" charset="0"/>
-                <a:ea typeface="Arial" pitchFamily="34" charset="-122"/>
-                <a:cs typeface="Arial" pitchFamily="34" charset="-120"/>
-              </a:rPr>
-              <a:t> Take 2–3 responses.</a:t>
-            </a:r>
-            <a:endParaRPr lang="en-US" sz="1200" dirty="0"/>
-          </a:p>
-          <a:p>
-            <a:pPr algn="l" marL="342900" indent="-342900">
-              <a:lnSpc>
-                <a:spcPts val="1620"/>
-              </a:lnSpc>
-              <a:spcAft>
-                <a:spcPts val="300"/>
-              </a:spcAft>
-              <a:buSzPct val="100000"/>
-              <a:buChar char="•"/>
-            </a:pPr>
-            <a:r>
-              <a:rPr lang="en-US" sz="1200" i="1" dirty="0">
-                <a:solidFill>
-                  <a:srgbClr val="1C2833"/>
-                </a:solidFill>
-                <a:latin typeface="Arial" pitchFamily="34" charset="0"/>
-                <a:ea typeface="Arial" pitchFamily="34" charset="-122"/>
-                <a:cs typeface="Arial" pitchFamily="34" charset="-120"/>
-              </a:rPr>
-              <a:t>"Why might this small patch have survived when the surrounding forest was cut?"</a:t>
-            </a:r>
-            <a:pPr algn="l" indent="0" marL="0">
-              <a:lnSpc>
-                <a:spcPts val="1620"/>
-              </a:lnSpc>
-              <a:spcAft>
-                <a:spcPts val="300"/>
-              </a:spcAft>
-              <a:buNone/>
-            </a:pPr>
-            <a:r>
-              <a:rPr lang="en-US" sz="1200" dirty="0">
-                <a:solidFill>
-                  <a:srgbClr val="1C2833"/>
-                </a:solidFill>
-                <a:latin typeface="Arial" pitchFamily="34" charset="0"/>
-                <a:ea typeface="Arial" pitchFamily="34" charset="-122"/>
-                <a:cs typeface="Arial" pitchFamily="34" charset="-120"/>
-              </a:rPr>
-              <a:t> Take 2–3 hypotheses. Don't resolve.</a:t>
-            </a:r>
-            <a:endParaRPr lang="en-US" sz="1200" dirty="0"/>
-          </a:p>
-        </p:txBody>
-      </p:sp>
-      <p:sp>
-        <p:nvSpPr>
-          <p:cNvPr id="6" name="Text 4"/>
           <p:cNvSpPr/>
           <p:nvPr/>
         </p:nvSpPr>
@@ -4780,7 +8534,7 @@
                 <a:ea typeface="Georgia" pitchFamily="34" charset="-122"/>
                 <a:cs typeface="Georgia" pitchFamily="34" charset="-120"/>
               </a:rPr>
-              <a:t>Core (20 min)</a:t>
+              <a:t>Warm-up (5 min)</a:t>
             </a:r>
             <a:endParaRPr lang="en-US" sz="1800" dirty="0"/>
           </a:p>
@@ -4795,7 +8549,7 @@
         <p:spPr>
           <a:xfrm>
             <a:off x="634901" y="883593"/>
-            <a:ext cx="8102798" cy="898922"/>
+            <a:ext cx="8102798" cy="769441"/>
           </a:xfrm>
           <a:prstGeom prst="rect">
             <a:avLst/>
@@ -4818,26 +8572,6 @@
               <a:buChar char="•"/>
             </a:pPr>
             <a:r>
-              <a:rPr lang="en-US" sz="1200" b="1" dirty="0">
-                <a:solidFill>
-                  <a:srgbClr val="1C2833"/>
-                </a:solidFill>
-                <a:latin typeface="Arial" pitchFamily="34" charset="0"/>
-                <a:ea typeface="Arial" pitchFamily="34" charset="-122"/>
-                <a:cs typeface="Arial" pitchFamily="34" charset="-120"/>
-              </a:rPr>
-              <a:t>Define a sacred grove.</a:t>
-            </a:r>
-            <a:pPr algn="l" indent="0" marL="0">
-              <a:lnSpc>
-                <a:spcPts val="1620"/>
-              </a:lnSpc>
-              <a:spcAft>
-                <a:spcPts val="300"/>
-              </a:spcAft>
-              <a:buNone/>
-            </a:pPr>
-            <a:r>
               <a:rPr lang="en-US" sz="1200" dirty="0">
                 <a:solidFill>
                   <a:srgbClr val="1C2833"/>
@@ -4846,7 +8580,95 @@
                 <a:ea typeface="Arial" pitchFamily="34" charset="-122"/>
                 <a:cs typeface="Arial" pitchFamily="34" charset="-120"/>
               </a:rPr>
-              <a:t> A patch of forest — anywhere from a few trees to several hectares — protected by community rule because of a religious association: a village deity, a goddess, an ancestor, a snake-shrine, a tree itself. The protection takes the form of taboos: no tree-cutting, no twig-collection, no hunting, sometimes no entry except on festival days.</a:t>
+              <a:t>Project one photograph of a sacred grove (dense, untouched, surrounded by cleared agricultural land).</a:t>
+            </a:r>
+            <a:endParaRPr lang="en-US" sz="1200" dirty="0"/>
+          </a:p>
+          <a:p>
+            <a:pPr algn="l" marL="342900" indent="-342900">
+              <a:lnSpc>
+                <a:spcPts val="1620"/>
+              </a:lnSpc>
+              <a:spcAft>
+                <a:spcPts val="300"/>
+              </a:spcAft>
+              <a:buSzPct val="100000"/>
+              <a:buChar char="•"/>
+            </a:pPr>
+            <a:r>
+              <a:rPr lang="en-US" sz="1200" i="1" dirty="0">
+                <a:solidFill>
+                  <a:srgbClr val="1C2833"/>
+                </a:solidFill>
+                <a:latin typeface="Arial" pitchFamily="34" charset="0"/>
+                <a:ea typeface="Arial" pitchFamily="34" charset="-122"/>
+                <a:cs typeface="Arial" pitchFamily="34" charset="-120"/>
+              </a:rPr>
+              <a:t>"What do you notice about this patch of forest compared to what's around it?"</a:t>
+            </a:r>
+            <a:pPr algn="l" indent="0" marL="0">
+              <a:lnSpc>
+                <a:spcPts val="1620"/>
+              </a:lnSpc>
+              <a:spcAft>
+                <a:spcPts val="300"/>
+              </a:spcAft>
+              <a:buNone/>
+            </a:pPr>
+            <a:r>
+              <a:rPr lang="en-US" sz="1200" dirty="0">
+                <a:solidFill>
+                  <a:srgbClr val="1C2833"/>
+                </a:solidFill>
+                <a:latin typeface="Arial" pitchFamily="34" charset="0"/>
+                <a:ea typeface="Arial" pitchFamily="34" charset="-122"/>
+                <a:cs typeface="Arial" pitchFamily="34" charset="-120"/>
+              </a:rPr>
+              <a:t> Take 2–3 responses.</a:t>
+            </a:r>
+            <a:endParaRPr lang="en-US" sz="1200" dirty="0"/>
+          </a:p>
+          <a:p>
+            <a:pPr algn="l" marL="342900" indent="-342900">
+              <a:lnSpc>
+                <a:spcPts val="1620"/>
+              </a:lnSpc>
+              <a:spcAft>
+                <a:spcPts val="300"/>
+              </a:spcAft>
+              <a:buSzPct val="100000"/>
+              <a:buChar char="•"/>
+            </a:pPr>
+            <a:r>
+              <a:rPr lang="en-US" sz="1200" i="1" dirty="0">
+                <a:solidFill>
+                  <a:srgbClr val="1C2833"/>
+                </a:solidFill>
+                <a:latin typeface="Arial" pitchFamily="34" charset="0"/>
+                <a:ea typeface="Arial" pitchFamily="34" charset="-122"/>
+                <a:cs typeface="Arial" pitchFamily="34" charset="-120"/>
+              </a:rPr>
+              <a:t>"Why might this small patch have survived when the surrounding forest was cut?"</a:t>
+            </a:r>
+            <a:pPr algn="l" indent="0" marL="0">
+              <a:lnSpc>
+                <a:spcPts val="1620"/>
+              </a:lnSpc>
+              <a:spcAft>
+                <a:spcPts val="300"/>
+              </a:spcAft>
+              <a:buNone/>
+            </a:pPr>
+            <a:r>
+              <a:rPr lang="en-US" sz="1200" dirty="0">
+                <a:solidFill>
+                  <a:srgbClr val="1C2833"/>
+                </a:solidFill>
+                <a:latin typeface="Arial" pitchFamily="34" charset="0"/>
+                <a:ea typeface="Arial" pitchFamily="34" charset="-122"/>
+                <a:cs typeface="Arial" pitchFamily="34" charset="-120"/>
+              </a:rPr>
+              <a:t> Take 2–3 hypotheses. Don't resolve.</a:t>
             </a:r>
             <a:endParaRPr lang="en-US" sz="1200" dirty="0"/>
           </a:p>
@@ -4860,1273 +8682,7 @@
         </p:nvSpPr>
         <p:spPr>
           <a:xfrm>
-            <a:off x="634901" y="1884015"/>
-            <a:ext cx="8102798" cy="281880"/>
-          </a:xfrm>
-          <a:prstGeom prst="rect">
-            <a:avLst/>
-          </a:prstGeom>
-          <a:noFill/>
-          <a:ln/>
-        </p:spPr>
-        <p:txBody>
-          <a:bodyPr wrap="square" lIns="0" tIns="0" rIns="0" bIns="0" rtlCol="0" anchor="t"/>
-          <a:lstStyle/>
-          <a:p>
-            <a:pPr algn="l" marL="342900" indent="-342900">
-              <a:lnSpc>
-                <a:spcPts val="1620"/>
-              </a:lnSpc>
-              <a:spcAft>
-                <a:spcPts val="300"/>
-              </a:spcAft>
-              <a:buSzPct val="100000"/>
-              <a:buChar char="•"/>
-            </a:pPr>
-            <a:r>
-              <a:rPr lang="en-US" sz="1200" b="1" dirty="0">
-                <a:solidFill>
-                  <a:srgbClr val="1C2833"/>
-                </a:solidFill>
-                <a:latin typeface="Arial" pitchFamily="34" charset="0"/>
-                <a:ea typeface="Arial" pitchFamily="34" charset="-122"/>
-                <a:cs typeface="Arial" pitchFamily="34" charset="-120"/>
-              </a:rPr>
-              <a:t>Where they survive.</a:t>
-            </a:r>
-            <a:pPr algn="l" indent="0" marL="0">
-              <a:lnSpc>
-                <a:spcPts val="1620"/>
-              </a:lnSpc>
-              <a:spcAft>
-                <a:spcPts val="300"/>
-              </a:spcAft>
-              <a:buNone/>
-            </a:pPr>
-            <a:r>
-              <a:rPr lang="en-US" sz="1200" dirty="0">
-                <a:solidFill>
-                  <a:srgbClr val="1C2833"/>
-                </a:solidFill>
-                <a:latin typeface="Arial" pitchFamily="34" charset="0"/>
-                <a:ea typeface="Arial" pitchFamily="34" charset="-122"/>
-                <a:cs typeface="Arial" pitchFamily="34" charset="-120"/>
-              </a:rPr>
-              <a:t> Sacred groves exist across India:</a:t>
-            </a:r>
-            <a:endParaRPr lang="en-US" sz="1200" dirty="0"/>
-          </a:p>
-        </p:txBody>
-      </p:sp>
-      <p:sp>
-        <p:nvSpPr>
-          <p:cNvPr id="6" name="Text 4"/>
-          <p:cNvSpPr/>
-          <p:nvPr/>
-        </p:nvSpPr>
-        <p:spPr>
-          <a:xfrm>
-            <a:off x="406301" y="2254746"/>
-            <a:ext cx="8498026" cy="213271"/>
-          </a:xfrm>
-          <a:prstGeom prst="rect">
-            <a:avLst/>
-          </a:prstGeom>
-          <a:noFill/>
-          <a:ln/>
-        </p:spPr>
-        <p:txBody>
-          <a:bodyPr wrap="square" lIns="0" tIns="0" rIns="0" bIns="0" rtlCol="0" anchor="t"/>
-          <a:lstStyle/>
-          <a:p>
-            <a:pPr algn="l" indent="0" marL="0">
-              <a:lnSpc>
-                <a:spcPts val="1680"/>
-              </a:lnSpc>
-              <a:spcBef>
-                <a:spcPts val="300"/>
-              </a:spcBef>
-              <a:spcAft>
-                <a:spcPts val="300"/>
-              </a:spcAft>
-              <a:buNone/>
-            </a:pPr>
-            <a:r>
-              <a:rPr lang="en-US" sz="1200" i="1" dirty="0">
-                <a:solidFill>
-                  <a:srgbClr val="1C2833"/>
-                </a:solidFill>
-                <a:latin typeface="Arial" pitchFamily="34" charset="0"/>
-                <a:ea typeface="Arial" pitchFamily="34" charset="-122"/>
-                <a:cs typeface="Arial" pitchFamily="34" charset="-120"/>
-              </a:rPr>
-              <a:t>Each row: Region · Local name · Notes.</a:t>
-            </a:r>
-            <a:endParaRPr lang="en-US" sz="1200" dirty="0"/>
-          </a:p>
-        </p:txBody>
-      </p:sp>
-      <p:sp>
-        <p:nvSpPr>
-          <p:cNvPr id="7" name="Text 5"/>
-          <p:cNvSpPr/>
-          <p:nvPr/>
-        </p:nvSpPr>
-        <p:spPr>
-          <a:xfrm>
-            <a:off x="634901" y="2556867"/>
-            <a:ext cx="8102798" cy="1500783"/>
-          </a:xfrm>
-          <a:prstGeom prst="rect">
-            <a:avLst/>
-          </a:prstGeom>
-          <a:noFill/>
-          <a:ln/>
-        </p:spPr>
-        <p:txBody>
-          <a:bodyPr wrap="square" lIns="0" tIns="0" rIns="0" bIns="0" rtlCol="0" anchor="t"/>
-          <a:lstStyle/>
-          <a:p>
-            <a:pPr algn="l" marL="342900" indent="-342900">
-              <a:lnSpc>
-                <a:spcPts val="1620"/>
-              </a:lnSpc>
-              <a:spcAft>
-                <a:spcPts val="300"/>
-              </a:spcAft>
-              <a:buSzPct val="100000"/>
-              <a:buChar char="•"/>
-            </a:pPr>
-            <a:r>
-              <a:rPr lang="en-US" sz="1200" b="1" dirty="0">
-                <a:solidFill>
-                  <a:srgbClr val="1C2833"/>
-                </a:solidFill>
-                <a:latin typeface="Arial" pitchFamily="34" charset="0"/>
-                <a:ea typeface="Arial" pitchFamily="34" charset="-122"/>
-                <a:cs typeface="Arial" pitchFamily="34" charset="-120"/>
-              </a:rPr>
-              <a:t>Karnataka (Coorg)</a:t>
-            </a:r>
-            <a:pPr algn="l" indent="0" marL="0">
-              <a:lnSpc>
-                <a:spcPts val="1620"/>
-              </a:lnSpc>
-              <a:spcAft>
-                <a:spcPts val="300"/>
-              </a:spcAft>
-              <a:buNone/>
-            </a:pPr>
-            <a:r>
-              <a:rPr lang="en-US" sz="1200" dirty="0">
-                <a:solidFill>
-                  <a:srgbClr val="1C2833"/>
-                </a:solidFill>
-                <a:latin typeface="Arial" pitchFamily="34" charset="0"/>
-                <a:ea typeface="Arial" pitchFamily="34" charset="-122"/>
-                <a:cs typeface="Arial" pitchFamily="34" charset="-120"/>
-              </a:rPr>
-              <a:t> — </a:t>
-            </a:r>
-            <a:pPr algn="l" indent="0" marL="0">
-              <a:lnSpc>
-                <a:spcPts val="1620"/>
-              </a:lnSpc>
-              <a:spcAft>
-                <a:spcPts val="300"/>
-              </a:spcAft>
-              <a:buNone/>
-            </a:pPr>
-            <a:r>
-              <a:rPr lang="en-US" sz="1200" i="1" dirty="0">
-                <a:solidFill>
-                  <a:srgbClr val="1C2833"/>
-                </a:solidFill>
-                <a:latin typeface="Arial" pitchFamily="34" charset="0"/>
-                <a:ea typeface="Arial" pitchFamily="34" charset="-122"/>
-                <a:cs typeface="Arial" pitchFamily="34" charset="-120"/>
-              </a:rPr>
-              <a:t>devarakāḍu</a:t>
-            </a:r>
-            <a:pPr algn="l" indent="0" marL="0">
-              <a:lnSpc>
-                <a:spcPts val="1620"/>
-              </a:lnSpc>
-              <a:spcAft>
-                <a:spcPts val="300"/>
-              </a:spcAft>
-              <a:buNone/>
-            </a:pPr>
-            <a:r>
-              <a:rPr lang="en-US" sz="1200" dirty="0">
-                <a:solidFill>
-                  <a:srgbClr val="1C2833"/>
-                </a:solidFill>
-                <a:latin typeface="Arial" pitchFamily="34" charset="0"/>
-                <a:ea typeface="Arial" pitchFamily="34" charset="-122"/>
-                <a:cs typeface="Arial" pitchFamily="34" charset="-120"/>
-              </a:rPr>
-              <a:t> · ~1,200 documented groves; surveyed by Madhav Gadgil's team in the 1970s–90s.</a:t>
-            </a:r>
-            <a:endParaRPr lang="en-US" sz="1200" dirty="0"/>
-          </a:p>
-          <a:p>
-            <a:pPr algn="l" marL="342900" indent="-342900">
-              <a:lnSpc>
-                <a:spcPts val="1620"/>
-              </a:lnSpc>
-              <a:spcAft>
-                <a:spcPts val="300"/>
-              </a:spcAft>
-              <a:buSzPct val="100000"/>
-              <a:buChar char="•"/>
-            </a:pPr>
-            <a:r>
-              <a:rPr lang="en-US" sz="1200" b="1" dirty="0">
-                <a:solidFill>
-                  <a:srgbClr val="1C2833"/>
-                </a:solidFill>
-                <a:latin typeface="Arial" pitchFamily="34" charset="0"/>
-                <a:ea typeface="Arial" pitchFamily="34" charset="-122"/>
-                <a:cs typeface="Arial" pitchFamily="34" charset="-120"/>
-              </a:rPr>
-              <a:t>Kerala</a:t>
-            </a:r>
-            <a:pPr algn="l" indent="0" marL="0">
-              <a:lnSpc>
-                <a:spcPts val="1620"/>
-              </a:lnSpc>
-              <a:spcAft>
-                <a:spcPts val="300"/>
-              </a:spcAft>
-              <a:buNone/>
-            </a:pPr>
-            <a:r>
-              <a:rPr lang="en-US" sz="1200" dirty="0">
-                <a:solidFill>
-                  <a:srgbClr val="1C2833"/>
-                </a:solidFill>
-                <a:latin typeface="Arial" pitchFamily="34" charset="0"/>
-                <a:ea typeface="Arial" pitchFamily="34" charset="-122"/>
-                <a:cs typeface="Arial" pitchFamily="34" charset="-120"/>
-              </a:rPr>
-              <a:t> — </a:t>
-            </a:r>
-            <a:pPr algn="l" indent="0" marL="0">
-              <a:lnSpc>
-                <a:spcPts val="1620"/>
-              </a:lnSpc>
-              <a:spcAft>
-                <a:spcPts val="300"/>
-              </a:spcAft>
-              <a:buNone/>
-            </a:pPr>
-            <a:r>
-              <a:rPr lang="en-US" sz="1200" i="1" dirty="0">
-                <a:solidFill>
-                  <a:srgbClr val="1C2833"/>
-                </a:solidFill>
-                <a:latin typeface="Arial" pitchFamily="34" charset="0"/>
-                <a:ea typeface="Arial" pitchFamily="34" charset="-122"/>
-                <a:cs typeface="Arial" pitchFamily="34" charset="-120"/>
-              </a:rPr>
-              <a:t>kāvu</a:t>
-            </a:r>
-            <a:pPr algn="l" indent="0" marL="0">
-              <a:lnSpc>
-                <a:spcPts val="1620"/>
-              </a:lnSpc>
-              <a:spcAft>
-                <a:spcPts val="300"/>
-              </a:spcAft>
-              <a:buNone/>
-            </a:pPr>
-            <a:r>
-              <a:rPr lang="en-US" sz="1200" dirty="0">
-                <a:solidFill>
-                  <a:srgbClr val="1C2833"/>
-                </a:solidFill>
-                <a:latin typeface="Arial" pitchFamily="34" charset="0"/>
-                <a:ea typeface="Arial" pitchFamily="34" charset="-122"/>
-                <a:cs typeface="Arial" pitchFamily="34" charset="-120"/>
-              </a:rPr>
-              <a:t> · Often associated with snake deities (</a:t>
-            </a:r>
-            <a:pPr algn="l" indent="0" marL="0">
-              <a:lnSpc>
-                <a:spcPts val="1620"/>
-              </a:lnSpc>
-              <a:spcAft>
-                <a:spcPts val="300"/>
-              </a:spcAft>
-              <a:buNone/>
-            </a:pPr>
-            <a:r>
-              <a:rPr lang="en-US" sz="1200" i="1" dirty="0">
-                <a:solidFill>
-                  <a:srgbClr val="1C2833"/>
-                </a:solidFill>
-                <a:latin typeface="Arial" pitchFamily="34" charset="0"/>
-                <a:ea typeface="Arial" pitchFamily="34" charset="-122"/>
-                <a:cs typeface="Arial" pitchFamily="34" charset="-120"/>
-              </a:rPr>
-              <a:t>sarpa-kāvu</a:t>
-            </a:r>
-            <a:pPr algn="l" indent="0" marL="0">
-              <a:lnSpc>
-                <a:spcPts val="1620"/>
-              </a:lnSpc>
-              <a:spcAft>
-                <a:spcPts val="300"/>
-              </a:spcAft>
-              <a:buNone/>
-            </a:pPr>
-            <a:r>
-              <a:rPr lang="en-US" sz="1200" dirty="0">
-                <a:solidFill>
-                  <a:srgbClr val="1C2833"/>
-                </a:solidFill>
-                <a:latin typeface="Arial" pitchFamily="34" charset="0"/>
-                <a:ea typeface="Arial" pitchFamily="34" charset="-122"/>
-                <a:cs typeface="Arial" pitchFamily="34" charset="-120"/>
-              </a:rPr>
-              <a:t>).</a:t>
-            </a:r>
-            <a:endParaRPr lang="en-US" sz="1200" dirty="0"/>
-          </a:p>
-          <a:p>
-            <a:pPr algn="l" marL="342900" indent="-342900">
-              <a:lnSpc>
-                <a:spcPts val="1620"/>
-              </a:lnSpc>
-              <a:spcAft>
-                <a:spcPts val="300"/>
-              </a:spcAft>
-              <a:buSzPct val="100000"/>
-              <a:buChar char="•"/>
-            </a:pPr>
-            <a:r>
-              <a:rPr lang="en-US" sz="1200" b="1" dirty="0">
-                <a:solidFill>
-                  <a:srgbClr val="1C2833"/>
-                </a:solidFill>
-                <a:latin typeface="Arial" pitchFamily="34" charset="0"/>
-                <a:ea typeface="Arial" pitchFamily="34" charset="-122"/>
-                <a:cs typeface="Arial" pitchFamily="34" charset="-120"/>
-              </a:rPr>
-              <a:t>Maharashtra (Western Ghats)</a:t>
-            </a:r>
-            <a:pPr algn="l" indent="0" marL="0">
-              <a:lnSpc>
-                <a:spcPts val="1620"/>
-              </a:lnSpc>
-              <a:spcAft>
-                <a:spcPts val="300"/>
-              </a:spcAft>
-              <a:buNone/>
-            </a:pPr>
-            <a:r>
-              <a:rPr lang="en-US" sz="1200" dirty="0">
-                <a:solidFill>
-                  <a:srgbClr val="1C2833"/>
-                </a:solidFill>
-                <a:latin typeface="Arial" pitchFamily="34" charset="0"/>
-                <a:ea typeface="Arial" pitchFamily="34" charset="-122"/>
-                <a:cs typeface="Arial" pitchFamily="34" charset="-120"/>
-              </a:rPr>
-              <a:t> — </a:t>
-            </a:r>
-            <a:pPr algn="l" indent="0" marL="0">
-              <a:lnSpc>
-                <a:spcPts val="1620"/>
-              </a:lnSpc>
-              <a:spcAft>
-                <a:spcPts val="300"/>
-              </a:spcAft>
-              <a:buNone/>
-            </a:pPr>
-            <a:r>
-              <a:rPr lang="en-US" sz="1200" i="1" dirty="0">
-                <a:solidFill>
-                  <a:srgbClr val="1C2833"/>
-                </a:solidFill>
-                <a:latin typeface="Arial" pitchFamily="34" charset="0"/>
-                <a:ea typeface="Arial" pitchFamily="34" charset="-122"/>
-                <a:cs typeface="Arial" pitchFamily="34" charset="-120"/>
-              </a:rPr>
-              <a:t>devarāī</a:t>
-            </a:r>
-            <a:pPr algn="l" indent="0" marL="0">
-              <a:lnSpc>
-                <a:spcPts val="1620"/>
-              </a:lnSpc>
-              <a:spcAft>
-                <a:spcPts val="300"/>
-              </a:spcAft>
-              <a:buNone/>
-            </a:pPr>
-            <a:r>
-              <a:rPr lang="en-US" sz="1200" dirty="0">
-                <a:solidFill>
-                  <a:srgbClr val="1C2833"/>
-                </a:solidFill>
-                <a:latin typeface="Arial" pitchFamily="34" charset="0"/>
-                <a:ea typeface="Arial" pitchFamily="34" charset="-122"/>
-                <a:cs typeface="Arial" pitchFamily="34" charset="-120"/>
-              </a:rPr>
-              <a:t> · Surveyed by Gadgil &amp; Vartak in their 1976 paper.</a:t>
-            </a:r>
-            <a:endParaRPr lang="en-US" sz="1200" dirty="0"/>
-          </a:p>
-          <a:p>
-            <a:pPr algn="l" marL="342900" indent="-342900">
-              <a:lnSpc>
-                <a:spcPts val="1620"/>
-              </a:lnSpc>
-              <a:spcAft>
-                <a:spcPts val="300"/>
-              </a:spcAft>
-              <a:buSzPct val="100000"/>
-              <a:buChar char="•"/>
-            </a:pPr>
-            <a:r>
-              <a:rPr lang="en-US" sz="1200" b="1" dirty="0">
-                <a:solidFill>
-                  <a:srgbClr val="1C2833"/>
-                </a:solidFill>
-                <a:latin typeface="Arial" pitchFamily="34" charset="0"/>
-                <a:ea typeface="Arial" pitchFamily="34" charset="-122"/>
-                <a:cs typeface="Arial" pitchFamily="34" charset="-120"/>
-              </a:rPr>
-              <a:t>Jharkhand / Odisha / W. Bengal (tribal belt)</a:t>
-            </a:r>
-            <a:pPr algn="l" indent="0" marL="0">
-              <a:lnSpc>
-                <a:spcPts val="1620"/>
-              </a:lnSpc>
-              <a:spcAft>
-                <a:spcPts val="300"/>
-              </a:spcAft>
-              <a:buNone/>
-            </a:pPr>
-            <a:r>
-              <a:rPr lang="en-US" sz="1200" dirty="0">
-                <a:solidFill>
-                  <a:srgbClr val="1C2833"/>
-                </a:solidFill>
-                <a:latin typeface="Arial" pitchFamily="34" charset="0"/>
-                <a:ea typeface="Arial" pitchFamily="34" charset="-122"/>
-                <a:cs typeface="Arial" pitchFamily="34" charset="-120"/>
-              </a:rPr>
-              <a:t> — </a:t>
-            </a:r>
-            <a:pPr algn="l" indent="0" marL="0">
-              <a:lnSpc>
-                <a:spcPts val="1620"/>
-              </a:lnSpc>
-              <a:spcAft>
-                <a:spcPts val="300"/>
-              </a:spcAft>
-              <a:buNone/>
-            </a:pPr>
-            <a:r>
-              <a:rPr lang="en-US" sz="1200" i="1" dirty="0">
-                <a:solidFill>
-                  <a:srgbClr val="1C2833"/>
-                </a:solidFill>
-                <a:latin typeface="Arial" pitchFamily="34" charset="0"/>
-                <a:ea typeface="Arial" pitchFamily="34" charset="-122"/>
-                <a:cs typeface="Arial" pitchFamily="34" charset="-120"/>
-              </a:rPr>
-              <a:t>sarna</a:t>
-            </a:r>
-            <a:pPr algn="l" indent="0" marL="0">
-              <a:lnSpc>
-                <a:spcPts val="1620"/>
-              </a:lnSpc>
-              <a:spcAft>
-                <a:spcPts val="300"/>
-              </a:spcAft>
-              <a:buNone/>
-            </a:pPr>
-            <a:r>
-              <a:rPr lang="en-US" sz="1200" dirty="0">
-                <a:solidFill>
-                  <a:srgbClr val="1C2833"/>
-                </a:solidFill>
-                <a:latin typeface="Arial" pitchFamily="34" charset="0"/>
-                <a:ea typeface="Arial" pitchFamily="34" charset="-122"/>
-                <a:cs typeface="Arial" pitchFamily="34" charset="-120"/>
-              </a:rPr>
-              <a:t> · Centred on </a:t>
-            </a:r>
-            <a:pPr algn="l" indent="0" marL="0">
-              <a:lnSpc>
-                <a:spcPts val="1620"/>
-              </a:lnSpc>
-              <a:spcAft>
-                <a:spcPts val="300"/>
-              </a:spcAft>
-              <a:buNone/>
-            </a:pPr>
-            <a:r>
-              <a:rPr lang="en-US" sz="1200" i="1" dirty="0">
-                <a:solidFill>
-                  <a:srgbClr val="1C2833"/>
-                </a:solidFill>
-                <a:latin typeface="Arial" pitchFamily="34" charset="0"/>
-                <a:ea typeface="Arial" pitchFamily="34" charset="-122"/>
-                <a:cs typeface="Arial" pitchFamily="34" charset="-120"/>
-              </a:rPr>
-              <a:t>sal</a:t>
-            </a:r>
-            <a:pPr algn="l" indent="0" marL="0">
-              <a:lnSpc>
-                <a:spcPts val="1620"/>
-              </a:lnSpc>
-              <a:spcAft>
-                <a:spcPts val="300"/>
-              </a:spcAft>
-              <a:buNone/>
-            </a:pPr>
-            <a:r>
-              <a:rPr lang="en-US" sz="1200" dirty="0">
-                <a:solidFill>
-                  <a:srgbClr val="1C2833"/>
-                </a:solidFill>
-                <a:latin typeface="Arial" pitchFamily="34" charset="0"/>
-                <a:ea typeface="Arial" pitchFamily="34" charset="-122"/>
-                <a:cs typeface="Arial" pitchFamily="34" charset="-120"/>
-              </a:rPr>
-              <a:t> (</a:t>
-            </a:r>
-            <a:pPr algn="l" indent="0" marL="0">
-              <a:lnSpc>
-                <a:spcPts val="1620"/>
-              </a:lnSpc>
-              <a:spcAft>
-                <a:spcPts val="300"/>
-              </a:spcAft>
-              <a:buNone/>
-            </a:pPr>
-            <a:r>
-              <a:rPr lang="en-US" sz="1200" i="1" dirty="0">
-                <a:solidFill>
-                  <a:srgbClr val="1C2833"/>
-                </a:solidFill>
-                <a:latin typeface="Arial" pitchFamily="34" charset="0"/>
-                <a:ea typeface="Arial" pitchFamily="34" charset="-122"/>
-                <a:cs typeface="Arial" pitchFamily="34" charset="-120"/>
-              </a:rPr>
-              <a:t>Shorea robusta</a:t>
-            </a:r>
-            <a:pPr algn="l" indent="0" marL="0">
-              <a:lnSpc>
-                <a:spcPts val="1620"/>
-              </a:lnSpc>
-              <a:spcAft>
-                <a:spcPts val="300"/>
-              </a:spcAft>
-              <a:buNone/>
-            </a:pPr>
-            <a:r>
-              <a:rPr lang="en-US" sz="1200" dirty="0">
-                <a:solidFill>
-                  <a:srgbClr val="1C2833"/>
-                </a:solidFill>
-                <a:latin typeface="Arial" pitchFamily="34" charset="0"/>
-                <a:ea typeface="Arial" pitchFamily="34" charset="-122"/>
-                <a:cs typeface="Arial" pitchFamily="34" charset="-120"/>
-              </a:rPr>
-              <a:t>); tied to Adivasi worship.</a:t>
-            </a:r>
-            <a:endParaRPr lang="en-US" sz="1200" dirty="0"/>
-          </a:p>
-          <a:p>
-            <a:pPr algn="l" marL="342900" indent="-342900">
-              <a:lnSpc>
-                <a:spcPts val="1620"/>
-              </a:lnSpc>
-              <a:spcAft>
-                <a:spcPts val="300"/>
-              </a:spcAft>
-              <a:buSzPct val="100000"/>
-              <a:buChar char="•"/>
-            </a:pPr>
-            <a:r>
-              <a:rPr lang="en-US" sz="1200" b="1" dirty="0">
-                <a:solidFill>
-                  <a:srgbClr val="1C2833"/>
-                </a:solidFill>
-                <a:latin typeface="Arial" pitchFamily="34" charset="0"/>
-                <a:ea typeface="Arial" pitchFamily="34" charset="-122"/>
-                <a:cs typeface="Arial" pitchFamily="34" charset="-120"/>
-              </a:rPr>
-              <a:t>Rajasthan</a:t>
-            </a:r>
-            <a:pPr algn="l" indent="0" marL="0">
-              <a:lnSpc>
-                <a:spcPts val="1620"/>
-              </a:lnSpc>
-              <a:spcAft>
-                <a:spcPts val="300"/>
-              </a:spcAft>
-              <a:buNone/>
-            </a:pPr>
-            <a:r>
-              <a:rPr lang="en-US" sz="1200" dirty="0">
-                <a:solidFill>
-                  <a:srgbClr val="1C2833"/>
-                </a:solidFill>
-                <a:latin typeface="Arial" pitchFamily="34" charset="0"/>
-                <a:ea typeface="Arial" pitchFamily="34" charset="-122"/>
-                <a:cs typeface="Arial" pitchFamily="34" charset="-120"/>
-              </a:rPr>
-              <a:t> — </a:t>
-            </a:r>
-            <a:pPr algn="l" indent="0" marL="0">
-              <a:lnSpc>
-                <a:spcPts val="1620"/>
-              </a:lnSpc>
-              <a:spcAft>
-                <a:spcPts val="300"/>
-              </a:spcAft>
-              <a:buNone/>
-            </a:pPr>
-            <a:r>
-              <a:rPr lang="en-US" sz="1200" i="1" dirty="0">
-                <a:solidFill>
-                  <a:srgbClr val="1C2833"/>
-                </a:solidFill>
-                <a:latin typeface="Arial" pitchFamily="34" charset="0"/>
-                <a:ea typeface="Arial" pitchFamily="34" charset="-122"/>
-                <a:cs typeface="Arial" pitchFamily="34" charset="-120"/>
-              </a:rPr>
-              <a:t>orans</a:t>
-            </a:r>
-            <a:pPr algn="l" indent="0" marL="0">
-              <a:lnSpc>
-                <a:spcPts val="1620"/>
-              </a:lnSpc>
-              <a:spcAft>
-                <a:spcPts val="300"/>
-              </a:spcAft>
-              <a:buNone/>
-            </a:pPr>
-            <a:r>
-              <a:rPr lang="en-US" sz="1200" dirty="0">
-                <a:solidFill>
-                  <a:srgbClr val="1C2833"/>
-                </a:solidFill>
-                <a:latin typeface="Arial" pitchFamily="34" charset="0"/>
-                <a:ea typeface="Arial" pitchFamily="34" charset="-122"/>
-                <a:cs typeface="Arial" pitchFamily="34" charset="-120"/>
-              </a:rPr>
-              <a:t> · Often combined with grazing land for community livestock.</a:t>
-            </a:r>
-            <a:endParaRPr lang="en-US" sz="1200" dirty="0"/>
-          </a:p>
-          <a:p>
-            <a:pPr algn="l" marL="342900" indent="-342900">
-              <a:lnSpc>
-                <a:spcPts val="1620"/>
-              </a:lnSpc>
-              <a:spcAft>
-                <a:spcPts val="300"/>
-              </a:spcAft>
-              <a:buSzPct val="100000"/>
-              <a:buChar char="•"/>
-            </a:pPr>
-            <a:r>
-              <a:rPr lang="en-US" sz="1200" b="1" dirty="0">
-                <a:solidFill>
-                  <a:srgbClr val="1C2833"/>
-                </a:solidFill>
-                <a:latin typeface="Arial" pitchFamily="34" charset="0"/>
-                <a:ea typeface="Arial" pitchFamily="34" charset="-122"/>
-                <a:cs typeface="Arial" pitchFamily="34" charset="-120"/>
-              </a:rPr>
-              <a:t>Meghalaya (Khasi Hills)</a:t>
-            </a:r>
-            <a:pPr algn="l" indent="0" marL="0">
-              <a:lnSpc>
-                <a:spcPts val="1620"/>
-              </a:lnSpc>
-              <a:spcAft>
-                <a:spcPts val="300"/>
-              </a:spcAft>
-              <a:buNone/>
-            </a:pPr>
-            <a:r>
-              <a:rPr lang="en-US" sz="1200" dirty="0">
-                <a:solidFill>
-                  <a:srgbClr val="1C2833"/>
-                </a:solidFill>
-                <a:latin typeface="Arial" pitchFamily="34" charset="0"/>
-                <a:ea typeface="Arial" pitchFamily="34" charset="-122"/>
-                <a:cs typeface="Arial" pitchFamily="34" charset="-120"/>
-              </a:rPr>
-              <a:t> — </a:t>
-            </a:r>
-            <a:pPr algn="l" indent="0" marL="0">
-              <a:lnSpc>
-                <a:spcPts val="1620"/>
-              </a:lnSpc>
-              <a:spcAft>
-                <a:spcPts val="300"/>
-              </a:spcAft>
-              <a:buNone/>
-            </a:pPr>
-            <a:r>
-              <a:rPr lang="en-US" sz="1200" i="1" dirty="0">
-                <a:solidFill>
-                  <a:srgbClr val="1C2833"/>
-                </a:solidFill>
-                <a:latin typeface="Arial" pitchFamily="34" charset="0"/>
-                <a:ea typeface="Arial" pitchFamily="34" charset="-122"/>
-                <a:cs typeface="Arial" pitchFamily="34" charset="-120"/>
-              </a:rPr>
-              <a:t>law kyntang</a:t>
-            </a:r>
-            <a:pPr algn="l" indent="0" marL="0">
-              <a:lnSpc>
-                <a:spcPts val="1620"/>
-              </a:lnSpc>
-              <a:spcAft>
-                <a:spcPts val="300"/>
-              </a:spcAft>
-              <a:buNone/>
-            </a:pPr>
-            <a:r>
-              <a:rPr lang="en-US" sz="1200" dirty="0">
-                <a:solidFill>
-                  <a:srgbClr val="1C2833"/>
-                </a:solidFill>
-                <a:latin typeface="Arial" pitchFamily="34" charset="0"/>
-                <a:ea typeface="Arial" pitchFamily="34" charset="-122"/>
-                <a:cs typeface="Arial" pitchFamily="34" charset="-120"/>
-              </a:rPr>
-              <a:t> · Some of the largest and best-protected groves in India.</a:t>
-            </a:r>
-            <a:endParaRPr lang="en-US" sz="1200" dirty="0"/>
-          </a:p>
-        </p:txBody>
-      </p:sp>
-      <p:sp>
-        <p:nvSpPr>
-          <p:cNvPr id="8" name="Text 6"/>
-          <p:cNvSpPr/>
-          <p:nvPr/>
-        </p:nvSpPr>
-        <p:spPr>
-          <a:xfrm>
-            <a:off x="634901" y="4159151"/>
-            <a:ext cx="8102798" cy="281880"/>
-          </a:xfrm>
-          <a:prstGeom prst="rect">
-            <a:avLst/>
-          </a:prstGeom>
-          <a:noFill/>
-          <a:ln/>
-        </p:spPr>
-        <p:txBody>
-          <a:bodyPr wrap="square" lIns="0" tIns="0" rIns="0" bIns="0" rtlCol="0" anchor="t"/>
-          <a:lstStyle/>
-          <a:p>
-            <a:pPr algn="l" marL="342900" indent="-342900">
-              <a:lnSpc>
-                <a:spcPts val="1620"/>
-              </a:lnSpc>
-              <a:spcAft>
-                <a:spcPts val="300"/>
-              </a:spcAft>
-              <a:buSzPct val="100000"/>
-              <a:buChar char="•"/>
-            </a:pPr>
-            <a:r>
-              <a:rPr lang="en-US" sz="1200" b="1" dirty="0">
-                <a:solidFill>
-                  <a:srgbClr val="1C2833"/>
-                </a:solidFill>
-                <a:latin typeface="Arial" pitchFamily="34" charset="0"/>
-                <a:ea typeface="Arial" pitchFamily="34" charset="-122"/>
-                <a:cs typeface="Arial" pitchFamily="34" charset="-120"/>
-              </a:rPr>
-              <a:t>Why they matter ecologically.</a:t>
-            </a:r>
-            <a:pPr algn="l" indent="0" marL="0">
-              <a:lnSpc>
-                <a:spcPts val="1620"/>
-              </a:lnSpc>
-              <a:spcAft>
-                <a:spcPts val="300"/>
-              </a:spcAft>
-              <a:buNone/>
-            </a:pPr>
-            <a:r>
-              <a:rPr lang="en-US" sz="1200" dirty="0">
-                <a:solidFill>
-                  <a:srgbClr val="1C2833"/>
-                </a:solidFill>
-                <a:latin typeface="Arial" pitchFamily="34" charset="0"/>
-                <a:ea typeface="Arial" pitchFamily="34" charset="-122"/>
-                <a:cs typeface="Arial" pitchFamily="34" charset="-120"/>
-              </a:rPr>
-              <a:t> Read the handout extract:</a:t>
-            </a:r>
-            <a:endParaRPr lang="en-US" sz="1200" dirty="0"/>
-          </a:p>
-        </p:txBody>
-      </p:sp>
-      <p:sp>
-        <p:nvSpPr>
-          <p:cNvPr id="9" name="Text 7"/>
-          <p:cNvSpPr/>
-          <p:nvPr/>
-        </p:nvSpPr>
-        <p:spPr>
-          <a:xfrm>
-            <a:off x="406301" y="4529882"/>
-            <a:ext cx="8498026" cy="1066354"/>
-          </a:xfrm>
-          <a:prstGeom prst="rect">
-            <a:avLst/>
-          </a:prstGeom>
-          <a:noFill/>
-          <a:ln/>
-        </p:spPr>
-        <p:txBody>
-          <a:bodyPr wrap="square" lIns="0" tIns="0" rIns="0" bIns="0" rtlCol="0" anchor="t"/>
-          <a:lstStyle/>
-          <a:p>
-            <a:pPr algn="l" indent="0" marL="0">
-              <a:lnSpc>
-                <a:spcPts val="1680"/>
-              </a:lnSpc>
-              <a:spcBef>
-                <a:spcPts val="300"/>
-              </a:spcBef>
-              <a:spcAft>
-                <a:spcPts val="300"/>
-              </a:spcAft>
-              <a:buNone/>
-            </a:pPr>
-            <a:r>
-              <a:rPr lang="en-US" sz="1200" dirty="0">
-                <a:solidFill>
-                  <a:srgbClr val="1C2833"/>
-                </a:solidFill>
-                <a:latin typeface="Arial" pitchFamily="34" charset="0"/>
-                <a:ea typeface="Arial" pitchFamily="34" charset="-122"/>
-                <a:cs typeface="Arial" pitchFamily="34" charset="-120"/>
-              </a:rPr>
-              <a:t>&gt; "Sacred groves are relict patches of original vegetation conserved through cultural-religious tradition. They function as in-situ refuges for plant species lost from surrounding areas, including medicinal plants and old-growth trees of high genetic value. In the Western Ghats, sacred groves harbour species not found in nearby agricultural or even reserve-forest landscapes." &gt; — paraphrased from Gadgil, M. &amp; Vartak, V. D. (1976), "The Sacred Groves of Western Ghats in India," </a:t>
-            </a:r>
-            <a:pPr algn="l" indent="0" marL="0">
-              <a:lnSpc>
-                <a:spcPts val="1680"/>
-              </a:lnSpc>
-              <a:spcBef>
-                <a:spcPts val="300"/>
-              </a:spcBef>
-              <a:spcAft>
-                <a:spcPts val="300"/>
-              </a:spcAft>
-              <a:buNone/>
-            </a:pPr>
-            <a:r>
-              <a:rPr lang="en-US" sz="1200" i="1" dirty="0">
-                <a:solidFill>
-                  <a:srgbClr val="1C2833"/>
-                </a:solidFill>
-                <a:latin typeface="Arial" pitchFamily="34" charset="0"/>
-                <a:ea typeface="Arial" pitchFamily="34" charset="-122"/>
-                <a:cs typeface="Arial" pitchFamily="34" charset="-120"/>
-              </a:rPr>
-              <a:t>Economic Botany</a:t>
-            </a:r>
-            <a:pPr algn="l" indent="0" marL="0">
-              <a:lnSpc>
-                <a:spcPts val="1680"/>
-              </a:lnSpc>
-              <a:spcBef>
-                <a:spcPts val="300"/>
-              </a:spcBef>
-              <a:spcAft>
-                <a:spcPts val="300"/>
-              </a:spcAft>
-              <a:buNone/>
-            </a:pPr>
-            <a:r>
-              <a:rPr lang="en-US" sz="1200" dirty="0">
-                <a:solidFill>
-                  <a:srgbClr val="1C2833"/>
-                </a:solidFill>
-                <a:latin typeface="Arial" pitchFamily="34" charset="0"/>
-                <a:ea typeface="Arial" pitchFamily="34" charset="-122"/>
-                <a:cs typeface="Arial" pitchFamily="34" charset="-120"/>
-              </a:rPr>
-              <a:t> 30(2): 152–160.</a:t>
-            </a:r>
-            <a:endParaRPr lang="en-US" sz="1200" dirty="0"/>
-          </a:p>
-        </p:txBody>
-      </p:sp>
-      <p:sp>
-        <p:nvSpPr>
-          <p:cNvPr id="10" name="Text 8"/>
-          <p:cNvSpPr/>
-          <p:nvPr/>
-        </p:nvSpPr>
-        <p:spPr>
-          <a:xfrm>
-            <a:off x="634901" y="5685086"/>
-            <a:ext cx="8102798" cy="693241"/>
-          </a:xfrm>
-          <a:prstGeom prst="rect">
-            <a:avLst/>
-          </a:prstGeom>
-          <a:noFill/>
-          <a:ln/>
-        </p:spPr>
-        <p:txBody>
-          <a:bodyPr wrap="square" lIns="0" tIns="0" rIns="0" bIns="0" rtlCol="0" anchor="t"/>
-          <a:lstStyle/>
-          <a:p>
-            <a:pPr algn="l" marL="342900" indent="-342900">
-              <a:lnSpc>
-                <a:spcPts val="1620"/>
-              </a:lnSpc>
-              <a:spcAft>
-                <a:spcPts val="300"/>
-              </a:spcAft>
-              <a:buSzPct val="100000"/>
-              <a:buChar char="•"/>
-            </a:pPr>
-            <a:r>
-              <a:rPr lang="en-US" sz="1200" b="1" dirty="0">
-                <a:solidFill>
-                  <a:srgbClr val="1C2833"/>
-                </a:solidFill>
-                <a:latin typeface="Arial" pitchFamily="34" charset="0"/>
-                <a:ea typeface="Arial" pitchFamily="34" charset="-122"/>
-                <a:cs typeface="Arial" pitchFamily="34" charset="-120"/>
-              </a:rPr>
-              <a:t>The mechanism, plainly stated.</a:t>
-            </a:r>
-            <a:pPr algn="l" indent="0" marL="0">
-              <a:lnSpc>
-                <a:spcPts val="1620"/>
-              </a:lnSpc>
-              <a:spcAft>
-                <a:spcPts val="300"/>
-              </a:spcAft>
-              <a:buNone/>
-            </a:pPr>
-            <a:r>
-              <a:rPr lang="en-US" sz="1200" dirty="0">
-                <a:solidFill>
-                  <a:srgbClr val="1C2833"/>
-                </a:solidFill>
-                <a:latin typeface="Arial" pitchFamily="34" charset="0"/>
-                <a:ea typeface="Arial" pitchFamily="34" charset="-122"/>
-                <a:cs typeface="Arial" pitchFamily="34" charset="-120"/>
-              </a:rPr>
-              <a:t> When a community treats a patch of forest as sacred, the patch survives. When the community stops, the patch goes the way of any unprotected land — into agriculture or development. Sacred groves are a </a:t>
-            </a:r>
-            <a:pPr algn="l" indent="0" marL="0">
-              <a:lnSpc>
-                <a:spcPts val="1620"/>
-              </a:lnSpc>
-              <a:spcAft>
-                <a:spcPts val="300"/>
-              </a:spcAft>
-              <a:buNone/>
-            </a:pPr>
-            <a:r>
-              <a:rPr lang="en-US" sz="1200" i="1" dirty="0">
-                <a:solidFill>
-                  <a:srgbClr val="1C2833"/>
-                </a:solidFill>
-                <a:latin typeface="Arial" pitchFamily="34" charset="0"/>
-                <a:ea typeface="Arial" pitchFamily="34" charset="-122"/>
-                <a:cs typeface="Arial" pitchFamily="34" charset="-120"/>
-              </a:rPr>
-              <a:t>social</a:t>
-            </a:r>
-            <a:pPr algn="l" indent="0" marL="0">
-              <a:lnSpc>
-                <a:spcPts val="1620"/>
-              </a:lnSpc>
-              <a:spcAft>
-                <a:spcPts val="300"/>
-              </a:spcAft>
-              <a:buNone/>
-            </a:pPr>
-            <a:r>
-              <a:rPr lang="en-US" sz="1200" dirty="0">
-                <a:solidFill>
-                  <a:srgbClr val="1C2833"/>
-                </a:solidFill>
-                <a:latin typeface="Arial" pitchFamily="34" charset="0"/>
-                <a:ea typeface="Arial" pitchFamily="34" charset="-122"/>
-                <a:cs typeface="Arial" pitchFamily="34" charset="-120"/>
-              </a:rPr>
-              <a:t> protection technology, not a biological accident.</a:t>
-            </a:r>
-            <a:endParaRPr lang="en-US" sz="1200" dirty="0"/>
-          </a:p>
-        </p:txBody>
-      </p:sp>
-      <p:sp>
-        <p:nvSpPr>
-          <p:cNvPr id="11" name="Text 9"/>
-          <p:cNvSpPr/>
-          <p:nvPr/>
-        </p:nvSpPr>
-        <p:spPr>
-          <a:xfrm>
-            <a:off x="634901" y="6479828"/>
-            <a:ext cx="8102798" cy="898922"/>
-          </a:xfrm>
-          <a:prstGeom prst="rect">
-            <a:avLst/>
-          </a:prstGeom>
-          <a:noFill/>
-          <a:ln/>
-        </p:spPr>
-        <p:txBody>
-          <a:bodyPr wrap="square" lIns="0" tIns="0" rIns="0" bIns="0" rtlCol="0" anchor="t"/>
-          <a:lstStyle/>
-          <a:p>
-            <a:pPr algn="l" marL="342900" indent="-342900">
-              <a:lnSpc>
-                <a:spcPts val="1620"/>
-              </a:lnSpc>
-              <a:spcAft>
-                <a:spcPts val="300"/>
-              </a:spcAft>
-              <a:buSzPct val="100000"/>
-              <a:buChar char="•"/>
-            </a:pPr>
-            <a:r>
-              <a:rPr lang="en-US" sz="1200" b="1" dirty="0">
-                <a:solidFill>
-                  <a:srgbClr val="1C2833"/>
-                </a:solidFill>
-                <a:latin typeface="Arial" pitchFamily="34" charset="0"/>
-                <a:ea typeface="Arial" pitchFamily="34" charset="-122"/>
-                <a:cs typeface="Arial" pitchFamily="34" charset="-120"/>
-              </a:rPr>
-              <a:t>Modern parallel.</a:t>
-            </a:r>
-            <a:pPr algn="l" indent="0" marL="0">
-              <a:lnSpc>
-                <a:spcPts val="1620"/>
-              </a:lnSpc>
-              <a:spcAft>
-                <a:spcPts val="300"/>
-              </a:spcAft>
-              <a:buNone/>
-            </a:pPr>
-            <a:r>
-              <a:rPr lang="en-US" sz="1200" dirty="0">
-                <a:solidFill>
-                  <a:srgbClr val="1C2833"/>
-                </a:solidFill>
-                <a:latin typeface="Arial" pitchFamily="34" charset="0"/>
-                <a:ea typeface="Arial" pitchFamily="34" charset="-122"/>
-                <a:cs typeface="Arial" pitchFamily="34" charset="-120"/>
-              </a:rPr>
-              <a:t> Modern ecology has a name for this same phenomenon: "community-managed conservation areas" or "biocultural refugia." The UN's Convention on Biological Diversity recognises Indigenous and Community Conserved Areas (ICCAs). The Indic </a:t>
-            </a:r>
-            <a:pPr algn="l" indent="0" marL="0">
-              <a:lnSpc>
-                <a:spcPts val="1620"/>
-              </a:lnSpc>
-              <a:spcAft>
-                <a:spcPts val="300"/>
-              </a:spcAft>
-              <a:buNone/>
-            </a:pPr>
-            <a:r>
-              <a:rPr lang="en-US" sz="1200" i="1" dirty="0">
-                <a:solidFill>
-                  <a:srgbClr val="1C2833"/>
-                </a:solidFill>
-                <a:latin typeface="Arial" pitchFamily="34" charset="0"/>
-                <a:ea typeface="Arial" pitchFamily="34" charset="-122"/>
-                <a:cs typeface="Arial" pitchFamily="34" charset="-120"/>
-              </a:rPr>
-              <a:t>devarakāḍu</a:t>
-            </a:r>
-            <a:pPr algn="l" indent="0" marL="0">
-              <a:lnSpc>
-                <a:spcPts val="1620"/>
-              </a:lnSpc>
-              <a:spcAft>
-                <a:spcPts val="300"/>
-              </a:spcAft>
-              <a:buNone/>
-            </a:pPr>
-            <a:r>
-              <a:rPr lang="en-US" sz="1200" dirty="0">
-                <a:solidFill>
-                  <a:srgbClr val="1C2833"/>
-                </a:solidFill>
-                <a:latin typeface="Arial" pitchFamily="34" charset="0"/>
-                <a:ea typeface="Arial" pitchFamily="34" charset="-122"/>
-                <a:cs typeface="Arial" pitchFamily="34" charset="-120"/>
-              </a:rPr>
-              <a:t> and the </a:t>
-            </a:r>
-            <a:pPr algn="l" indent="0" marL="0">
-              <a:lnSpc>
-                <a:spcPts val="1620"/>
-              </a:lnSpc>
-              <a:spcAft>
-                <a:spcPts val="300"/>
-              </a:spcAft>
-              <a:buNone/>
-            </a:pPr>
-            <a:r>
-              <a:rPr lang="en-US" sz="1200" i="1" dirty="0">
-                <a:solidFill>
-                  <a:srgbClr val="1C2833"/>
-                </a:solidFill>
-                <a:latin typeface="Arial" pitchFamily="34" charset="0"/>
-                <a:ea typeface="Arial" pitchFamily="34" charset="-122"/>
-                <a:cs typeface="Arial" pitchFamily="34" charset="-120"/>
-              </a:rPr>
-              <a:t>sarna</a:t>
-            </a:r>
-            <a:pPr algn="l" indent="0" marL="0">
-              <a:lnSpc>
-                <a:spcPts val="1620"/>
-              </a:lnSpc>
-              <a:spcAft>
-                <a:spcPts val="300"/>
-              </a:spcAft>
-              <a:buNone/>
-            </a:pPr>
-            <a:r>
-              <a:rPr lang="en-US" sz="1200" dirty="0">
-                <a:solidFill>
-                  <a:srgbClr val="1C2833"/>
-                </a:solidFill>
-                <a:latin typeface="Arial" pitchFamily="34" charset="0"/>
-                <a:ea typeface="Arial" pitchFamily="34" charset="-122"/>
-                <a:cs typeface="Arial" pitchFamily="34" charset="-120"/>
-              </a:rPr>
-              <a:t> are some of the oldest documented examples of what global conservation policy now formally recommends.</a:t>
-            </a:r>
-            <a:endParaRPr lang="en-US" sz="1200" dirty="0"/>
-          </a:p>
-        </p:txBody>
-      </p:sp>
-      <p:sp>
-        <p:nvSpPr>
-          <p:cNvPr id="12" name="Text 10"/>
-          <p:cNvSpPr/>
-          <p:nvPr/>
-        </p:nvSpPr>
-        <p:spPr>
-          <a:xfrm>
-            <a:off x="406301" y="7467600"/>
-            <a:ext cx="8498026" cy="639812"/>
-          </a:xfrm>
-          <a:prstGeom prst="rect">
-            <a:avLst/>
-          </a:prstGeom>
-          <a:noFill/>
-          <a:ln/>
-        </p:spPr>
-        <p:txBody>
-          <a:bodyPr wrap="square" lIns="0" tIns="0" rIns="0" bIns="0" rtlCol="0" anchor="t"/>
-          <a:lstStyle/>
-          <a:p>
-            <a:pPr algn="l" indent="0" marL="0">
-              <a:lnSpc>
-                <a:spcPts val="1680"/>
-              </a:lnSpc>
-              <a:spcBef>
-                <a:spcPts val="300"/>
-              </a:spcBef>
-              <a:spcAft>
-                <a:spcPts val="300"/>
-              </a:spcAft>
-              <a:buNone/>
-            </a:pPr>
-            <a:r>
-              <a:rPr lang="en-US" sz="1200" dirty="0">
-                <a:solidFill>
-                  <a:srgbClr val="1C2833"/>
-                </a:solidFill>
-                <a:latin typeface="Arial" pitchFamily="34" charset="0"/>
-                <a:ea typeface="Arial" pitchFamily="34" charset="-122"/>
-                <a:cs typeface="Arial" pitchFamily="34" charset="-120"/>
-              </a:rPr>
-              <a:t>Frame this carefully: </a:t>
-            </a:r>
-            <a:pPr algn="l" indent="0" marL="0">
-              <a:lnSpc>
-                <a:spcPts val="1680"/>
-              </a:lnSpc>
-              <a:spcBef>
-                <a:spcPts val="300"/>
-              </a:spcBef>
-              <a:spcAft>
-                <a:spcPts val="300"/>
-              </a:spcAft>
-              <a:buNone/>
-            </a:pPr>
-            <a:r>
-              <a:rPr lang="en-US" sz="1200" i="1" dirty="0">
-                <a:solidFill>
-                  <a:srgbClr val="1C2833"/>
-                </a:solidFill>
-                <a:latin typeface="Arial" pitchFamily="34" charset="0"/>
-                <a:ea typeface="Arial" pitchFamily="34" charset="-122"/>
-                <a:cs typeface="Arial" pitchFamily="34" charset="-120"/>
-              </a:rPr>
-              <a:t>we are not saying "ancient Indians invented modern conservation."</a:t>
-            </a:r>
-            <a:pPr algn="l" indent="0" marL="0">
-              <a:lnSpc>
-                <a:spcPts val="1680"/>
-              </a:lnSpc>
-              <a:spcBef>
-                <a:spcPts val="300"/>
-              </a:spcBef>
-              <a:spcAft>
-                <a:spcPts val="300"/>
-              </a:spcAft>
-              <a:buNone/>
-            </a:pPr>
-            <a:r>
-              <a:rPr lang="en-US" sz="1200" dirty="0">
-                <a:solidFill>
-                  <a:srgbClr val="1C2833"/>
-                </a:solidFill>
-                <a:latin typeface="Arial" pitchFamily="34" charset="0"/>
-                <a:ea typeface="Arial" pitchFamily="34" charset="-122"/>
-                <a:cs typeface="Arial" pitchFamily="34" charset="-120"/>
-              </a:rPr>
-              <a:t> We are saying multiple cultures, including the Indic tradition, arrived at similar protective practices for similar reasons. The recognition is mutual, not a claim to priority.</a:t>
-            </a:r>
-            <a:endParaRPr lang="en-US" sz="1200" dirty="0"/>
-          </a:p>
-        </p:txBody>
-      </p:sp>
-      <p:sp>
-        <p:nvSpPr>
-          <p:cNvPr id="13" name="Text 11"/>
-          <p:cNvSpPr/>
-          <p:nvPr/>
-        </p:nvSpPr>
-        <p:spPr>
-          <a:xfrm>
-            <a:off x="406301" y="8259812"/>
+            <a:off x="406301" y="4434929"/>
             <a:ext cx="8498026" cy="213271"/>
           </a:xfrm>
           <a:prstGeom prst="rect">
@@ -6270,7 +8826,7 @@
                 <a:ea typeface="Georgia" pitchFamily="34" charset="-122"/>
                 <a:cs typeface="Georgia" pitchFamily="34" charset="-120"/>
               </a:rPr>
-              <a:t>Activity (15 min) — Sacred Grove Mapping</a:t>
+              <a:t>Core (20 min)</a:t>
             </a:r>
             <a:endParaRPr lang="en-US" sz="1800" dirty="0"/>
           </a:p>
@@ -6284,8 +8840,8 @@
         </p:nvSpPr>
         <p:spPr>
           <a:xfrm>
-            <a:off x="406301" y="870942"/>
-            <a:ext cx="8498026" cy="222796"/>
+            <a:off x="634901" y="883593"/>
+            <a:ext cx="8102798" cy="898922"/>
           </a:xfrm>
           <a:prstGeom prst="rect">
             <a:avLst/>
@@ -6297,13 +8853,31 @@
           <a:bodyPr wrap="square" lIns="0" tIns="0" rIns="0" bIns="0" rtlCol="0" anchor="t"/>
           <a:lstStyle/>
           <a:p>
-            <a:pPr algn="l" indent="0" marL="0">
-              <a:lnSpc>
-                <a:spcPts val="1680"/>
-              </a:lnSpc>
-              <a:spcBef>
-                <a:spcPts val="300"/>
-              </a:spcBef>
+            <a:pPr algn="l" marL="342900" indent="-342900">
+              <a:lnSpc>
+                <a:spcPts val="1620"/>
+              </a:lnSpc>
+              <a:spcAft>
+                <a:spcPts val="300"/>
+              </a:spcAft>
+              <a:buSzPct val="100000"/>
+              <a:buChar char="•"/>
+            </a:pPr>
+            <a:r>
+              <a:rPr lang="en-US" sz="1200" b="1" dirty="0">
+                <a:solidFill>
+                  <a:srgbClr val="1C2833"/>
+                </a:solidFill>
+                <a:latin typeface="Arial" pitchFamily="34" charset="0"/>
+                <a:ea typeface="Arial" pitchFamily="34" charset="-122"/>
+                <a:cs typeface="Arial" pitchFamily="34" charset="-120"/>
+              </a:rPr>
+              <a:t>Define a sacred grove.</a:t>
+            </a:r>
+            <a:pPr algn="l" indent="0" marL="0">
+              <a:lnSpc>
+                <a:spcPts val="1620"/>
+              </a:lnSpc>
               <a:spcAft>
                 <a:spcPts val="300"/>
               </a:spcAft>
@@ -6318,53 +8892,7 @@
                 <a:ea typeface="Arial" pitchFamily="34" charset="-122"/>
                 <a:cs typeface="Arial" pitchFamily="34" charset="-120"/>
               </a:rPr>
-              <a:t>(See </a:t>
-            </a:r>
-            <a:pPr algn="l" indent="0" marL="0">
-              <a:lnSpc>
-                <a:spcPts val="1680"/>
-              </a:lnSpc>
-              <a:spcBef>
-                <a:spcPts val="300"/>
-              </a:spcBef>
-              <a:spcAft>
-                <a:spcPts val="300"/>
-              </a:spcAft>
-              <a:buNone/>
-            </a:pPr>
-            <a:r>
-              <a:rPr lang="en-US" sz="1200" dirty="0">
-                <a:solidFill>
-                  <a:srgbClr val="1C2833"/>
-                </a:solidFill>
-                <a:latin typeface="Arial" pitchFamily="34" charset="0"/>
-                <a:ea typeface="Arial" pitchFamily="34" charset="-122"/>
-                <a:cs typeface="Arial" pitchFamily="34" charset="-120"/>
-              </a:rPr>
-              <a:t>activities/activity-01-sacred-grove-mapping.md</a:t>
-            </a:r>
-            <a:pPr algn="l" indent="0" marL="0">
-              <a:lnSpc>
-                <a:spcPts val="1680"/>
-              </a:lnSpc>
-              <a:spcBef>
-                <a:spcPts val="300"/>
-              </a:spcBef>
-              <a:spcAft>
-                <a:spcPts val="300"/>
-              </a:spcAft>
-              <a:buNone/>
-            </a:pPr>
-            <a:r>
-              <a:rPr lang="en-US" sz="1200" dirty="0">
-                <a:solidFill>
-                  <a:srgbClr val="1C2833"/>
-                </a:solidFill>
-                <a:latin typeface="Arial" pitchFamily="34" charset="0"/>
-                <a:ea typeface="Arial" pitchFamily="34" charset="-122"/>
-                <a:cs typeface="Arial" pitchFamily="34" charset="-120"/>
-              </a:rPr>
-              <a:t> for the full sheet.)</a:t>
+              <a:t> A patch of forest — anywhere from a few trees to several hectares — protected by community rule because of a religious association: a village deity, a goddess, an ancestor, a snake-shrine, a tree itself. The protection takes the form of taboos: no tree-cutting, no twig-collection, no hunting, sometimes no entry except on festival days.</a:t>
             </a:r>
             <a:endParaRPr lang="en-US" sz="1200" dirty="0"/>
           </a:p>
@@ -6378,8 +8906,8 @@
         </p:nvSpPr>
         <p:spPr>
           <a:xfrm>
-            <a:off x="406301" y="1169938"/>
-            <a:ext cx="8498026" cy="853083"/>
+            <a:off x="634901" y="1884015"/>
+            <a:ext cx="8102798" cy="281880"/>
           </a:xfrm>
           <a:prstGeom prst="rect">
             <a:avLst/>
@@ -6391,13 +8919,31 @@
           <a:bodyPr wrap="square" lIns="0" tIns="0" rIns="0" bIns="0" rtlCol="0" anchor="t"/>
           <a:lstStyle/>
           <a:p>
-            <a:pPr algn="l" indent="0" marL="0">
-              <a:lnSpc>
-                <a:spcPts val="1680"/>
-              </a:lnSpc>
-              <a:spcBef>
-                <a:spcPts val="300"/>
-              </a:spcBef>
+            <a:pPr algn="l" marL="342900" indent="-342900">
+              <a:lnSpc>
+                <a:spcPts val="1620"/>
+              </a:lnSpc>
+              <a:spcAft>
+                <a:spcPts val="300"/>
+              </a:spcAft>
+              <a:buSzPct val="100000"/>
+              <a:buChar char="•"/>
+            </a:pPr>
+            <a:r>
+              <a:rPr lang="en-US" sz="1200" b="1" dirty="0">
+                <a:solidFill>
+                  <a:srgbClr val="1C2833"/>
+                </a:solidFill>
+                <a:latin typeface="Arial" pitchFamily="34" charset="0"/>
+                <a:ea typeface="Arial" pitchFamily="34" charset="-122"/>
+                <a:cs typeface="Arial" pitchFamily="34" charset="-120"/>
+              </a:rPr>
+              <a:t>Where they survive.</a:t>
+            </a:r>
+            <a:pPr algn="l" indent="0" marL="0">
+              <a:lnSpc>
+                <a:spcPts val="1620"/>
+              </a:lnSpc>
               <a:spcAft>
                 <a:spcPts val="300"/>
               </a:spcAft>
@@ -6412,7 +8958,7 @@
                 <a:ea typeface="Arial" pitchFamily="34" charset="-122"/>
                 <a:cs typeface="Arial" pitchFamily="34" charset="-120"/>
               </a:rPr>
-              <a:t>In groups of 4: – One student looks up your state's sacred-grove tradition (Coorg / Kerala / Jharkhand / etc.). One paragraph. – One student lists three species you would expect to find in a 200-year-old undisturbed forest patch in your bio-region. – One student draws what a "school sacred grove" could look like — even a 10-tree patch in a campus corner. – One student writes a one-sentence rule the group would adopt to keep their imaginary grove protected.</a:t>
+              <a:t> Sacred groves exist across India:</a:t>
             </a:r>
             <a:endParaRPr lang="en-US" sz="1200" dirty="0"/>
           </a:p>
@@ -6426,7 +8972,7 @@
         </p:nvSpPr>
         <p:spPr>
           <a:xfrm>
-            <a:off x="406301" y="2099221"/>
+            <a:off x="406301" y="2254746"/>
             <a:ext cx="8498026" cy="213271"/>
           </a:xfrm>
           <a:prstGeom prst="rect">
@@ -6452,15 +8998,15 @@
               <a:buNone/>
             </a:pPr>
             <a:r>
-              <a:rPr lang="en-US" sz="1200" dirty="0">
-                <a:solidFill>
-                  <a:srgbClr val="1C2833"/>
-                </a:solidFill>
-                <a:latin typeface="Arial" pitchFamily="34" charset="0"/>
-                <a:ea typeface="Arial" pitchFamily="34" charset="-122"/>
-                <a:cs typeface="Arial" pitchFamily="34" charset="-120"/>
-              </a:rPr>
-              <a:t>Groups present in 30 seconds each.</a:t>
+              <a:rPr lang="en-US" sz="1200" i="1" dirty="0">
+                <a:solidFill>
+                  <a:srgbClr val="1C2833"/>
+                </a:solidFill>
+                <a:latin typeface="Arial" pitchFamily="34" charset="0"/>
+                <a:ea typeface="Arial" pitchFamily="34" charset="-122"/>
+                <a:cs typeface="Arial" pitchFamily="34" charset="-120"/>
+              </a:rPr>
+              <a:t>Each row: Region · Local name · Notes.</a:t>
             </a:r>
             <a:endParaRPr lang="en-US" sz="1200" dirty="0"/>
           </a:p>
@@ -6618,7 +9164,7 @@
                 <a:ea typeface="Georgia" pitchFamily="34" charset="-122"/>
                 <a:cs typeface="Georgia" pitchFamily="34" charset="-120"/>
               </a:rPr>
-              <a:t>Wrap-up (5 min)</a:t>
+              <a:t>Core (20 min) (cont.)</a:t>
             </a:r>
             <a:endParaRPr lang="en-US" sz="1800" dirty="0"/>
           </a:p>
@@ -6633,7 +9179,7 @@
         <p:spPr>
           <a:xfrm>
             <a:off x="634901" y="883593"/>
-            <a:ext cx="8102798" cy="693241"/>
+            <a:ext cx="8102798" cy="1500783"/>
           </a:xfrm>
           <a:prstGeom prst="rect">
             <a:avLst/>
@@ -6664,7 +9210,7 @@
                 <a:ea typeface="Arial" pitchFamily="34" charset="-122"/>
                 <a:cs typeface="Arial" pitchFamily="34" charset="-120"/>
               </a:rPr>
-              <a:t>Daily prompt.</a:t>
+              <a:t>Karnataka (Coorg)</a:t>
             </a:r>
             <a:pPr algn="l" indent="0" marL="0">
               <a:lnSpc>
@@ -6684,7 +9230,7 @@
                 <a:ea typeface="Arial" pitchFamily="34" charset="-122"/>
                 <a:cs typeface="Arial" pitchFamily="34" charset="-120"/>
               </a:rPr>
-              <a:t> </a:t>
+              <a:t> — </a:t>
             </a:r>
             <a:pPr algn="l" indent="0" marL="0">
               <a:lnSpc>
@@ -6704,7 +9250,7 @@
                 <a:ea typeface="Arial" pitchFamily="34" charset="-122"/>
                 <a:cs typeface="Arial" pitchFamily="34" charset="-120"/>
               </a:rPr>
-              <a:t>"Do you know of any patch of land near you — even a small one — that has been protected for unusual reasons?"</a:t>
+              <a:t>devarakāḍu</a:t>
             </a:r>
             <a:pPr algn="l" indent="0" marL="0">
               <a:lnSpc>
@@ -6724,86 +9270,555 @@
                 <a:ea typeface="Arial" pitchFamily="34" charset="-122"/>
                 <a:cs typeface="Arial" pitchFamily="34" charset="-120"/>
               </a:rPr>
-              <a:t> (A graveyard. A shrine. A temple compound. A lawyer's office's overgrown corner.) Each of these may function as an accidental biodiversity refuge.</a:t>
+              <a:t> · ~1,200 documented groves; surveyed by Madhav Gadgil's team in the 1970s–90s.</a:t>
             </a:r>
             <a:endParaRPr lang="en-US" sz="1200" dirty="0"/>
           </a:p>
+          <a:p>
+            <a:pPr algn="l" marL="342900" indent="-342900">
+              <a:lnSpc>
+                <a:spcPts val="1620"/>
+              </a:lnSpc>
+              <a:spcAft>
+                <a:spcPts val="300"/>
+              </a:spcAft>
+              <a:buSzPct val="100000"/>
+              <a:buChar char="•"/>
+            </a:pPr>
+            <a:r>
+              <a:rPr lang="en-US" sz="1200" b="1" dirty="0">
+                <a:solidFill>
+                  <a:srgbClr val="1C2833"/>
+                </a:solidFill>
+                <a:latin typeface="Arial" pitchFamily="34" charset="0"/>
+                <a:ea typeface="Arial" pitchFamily="34" charset="-122"/>
+                <a:cs typeface="Arial" pitchFamily="34" charset="-120"/>
+              </a:rPr>
+              <a:t>Kerala</a:t>
+            </a:r>
+            <a:pPr algn="l" indent="0" marL="0">
+              <a:lnSpc>
+                <a:spcPts val="1620"/>
+              </a:lnSpc>
+              <a:spcAft>
+                <a:spcPts val="300"/>
+              </a:spcAft>
+              <a:buNone/>
+            </a:pPr>
+            <a:r>
+              <a:rPr lang="en-US" sz="1200" dirty="0">
+                <a:solidFill>
+                  <a:srgbClr val="1C2833"/>
+                </a:solidFill>
+                <a:latin typeface="Arial" pitchFamily="34" charset="0"/>
+                <a:ea typeface="Arial" pitchFamily="34" charset="-122"/>
+                <a:cs typeface="Arial" pitchFamily="34" charset="-120"/>
+              </a:rPr>
+              <a:t> — </a:t>
+            </a:r>
+            <a:pPr algn="l" indent="0" marL="0">
+              <a:lnSpc>
+                <a:spcPts val="1620"/>
+              </a:lnSpc>
+              <a:spcAft>
+                <a:spcPts val="300"/>
+              </a:spcAft>
+              <a:buNone/>
+            </a:pPr>
+            <a:r>
+              <a:rPr lang="en-US" sz="1200" i="1" dirty="0">
+                <a:solidFill>
+                  <a:srgbClr val="1C2833"/>
+                </a:solidFill>
+                <a:latin typeface="Arial" pitchFamily="34" charset="0"/>
+                <a:ea typeface="Arial" pitchFamily="34" charset="-122"/>
+                <a:cs typeface="Arial" pitchFamily="34" charset="-120"/>
+              </a:rPr>
+              <a:t>kāvu</a:t>
+            </a:r>
+            <a:pPr algn="l" indent="0" marL="0">
+              <a:lnSpc>
+                <a:spcPts val="1620"/>
+              </a:lnSpc>
+              <a:spcAft>
+                <a:spcPts val="300"/>
+              </a:spcAft>
+              <a:buNone/>
+            </a:pPr>
+            <a:r>
+              <a:rPr lang="en-US" sz="1200" dirty="0">
+                <a:solidFill>
+                  <a:srgbClr val="1C2833"/>
+                </a:solidFill>
+                <a:latin typeface="Arial" pitchFamily="34" charset="0"/>
+                <a:ea typeface="Arial" pitchFamily="34" charset="-122"/>
+                <a:cs typeface="Arial" pitchFamily="34" charset="-120"/>
+              </a:rPr>
+              <a:t> · Often associated with snake deities (</a:t>
+            </a:r>
+            <a:pPr algn="l" indent="0" marL="0">
+              <a:lnSpc>
+                <a:spcPts val="1620"/>
+              </a:lnSpc>
+              <a:spcAft>
+                <a:spcPts val="300"/>
+              </a:spcAft>
+              <a:buNone/>
+            </a:pPr>
+            <a:r>
+              <a:rPr lang="en-US" sz="1200" i="1" dirty="0">
+                <a:solidFill>
+                  <a:srgbClr val="1C2833"/>
+                </a:solidFill>
+                <a:latin typeface="Arial" pitchFamily="34" charset="0"/>
+                <a:ea typeface="Arial" pitchFamily="34" charset="-122"/>
+                <a:cs typeface="Arial" pitchFamily="34" charset="-120"/>
+              </a:rPr>
+              <a:t>sarpa-kāvu</a:t>
+            </a:r>
+            <a:pPr algn="l" indent="0" marL="0">
+              <a:lnSpc>
+                <a:spcPts val="1620"/>
+              </a:lnSpc>
+              <a:spcAft>
+                <a:spcPts val="300"/>
+              </a:spcAft>
+              <a:buNone/>
+            </a:pPr>
+            <a:r>
+              <a:rPr lang="en-US" sz="1200" dirty="0">
+                <a:solidFill>
+                  <a:srgbClr val="1C2833"/>
+                </a:solidFill>
+                <a:latin typeface="Arial" pitchFamily="34" charset="0"/>
+                <a:ea typeface="Arial" pitchFamily="34" charset="-122"/>
+                <a:cs typeface="Arial" pitchFamily="34" charset="-120"/>
+              </a:rPr>
+              <a:t>).</a:t>
+            </a:r>
+            <a:endParaRPr lang="en-US" sz="1200" dirty="0"/>
+          </a:p>
+          <a:p>
+            <a:pPr algn="l" marL="342900" indent="-342900">
+              <a:lnSpc>
+                <a:spcPts val="1620"/>
+              </a:lnSpc>
+              <a:spcAft>
+                <a:spcPts val="300"/>
+              </a:spcAft>
+              <a:buSzPct val="100000"/>
+              <a:buChar char="•"/>
+            </a:pPr>
+            <a:r>
+              <a:rPr lang="en-US" sz="1200" b="1" dirty="0">
+                <a:solidFill>
+                  <a:srgbClr val="1C2833"/>
+                </a:solidFill>
+                <a:latin typeface="Arial" pitchFamily="34" charset="0"/>
+                <a:ea typeface="Arial" pitchFamily="34" charset="-122"/>
+                <a:cs typeface="Arial" pitchFamily="34" charset="-120"/>
+              </a:rPr>
+              <a:t>Maharashtra (Western Ghats)</a:t>
+            </a:r>
+            <a:pPr algn="l" indent="0" marL="0">
+              <a:lnSpc>
+                <a:spcPts val="1620"/>
+              </a:lnSpc>
+              <a:spcAft>
+                <a:spcPts val="300"/>
+              </a:spcAft>
+              <a:buNone/>
+            </a:pPr>
+            <a:r>
+              <a:rPr lang="en-US" sz="1200" dirty="0">
+                <a:solidFill>
+                  <a:srgbClr val="1C2833"/>
+                </a:solidFill>
+                <a:latin typeface="Arial" pitchFamily="34" charset="0"/>
+                <a:ea typeface="Arial" pitchFamily="34" charset="-122"/>
+                <a:cs typeface="Arial" pitchFamily="34" charset="-120"/>
+              </a:rPr>
+              <a:t> — </a:t>
+            </a:r>
+            <a:pPr algn="l" indent="0" marL="0">
+              <a:lnSpc>
+                <a:spcPts val="1620"/>
+              </a:lnSpc>
+              <a:spcAft>
+                <a:spcPts val="300"/>
+              </a:spcAft>
+              <a:buNone/>
+            </a:pPr>
+            <a:r>
+              <a:rPr lang="en-US" sz="1200" i="1" dirty="0">
+                <a:solidFill>
+                  <a:srgbClr val="1C2833"/>
+                </a:solidFill>
+                <a:latin typeface="Arial" pitchFamily="34" charset="0"/>
+                <a:ea typeface="Arial" pitchFamily="34" charset="-122"/>
+                <a:cs typeface="Arial" pitchFamily="34" charset="-120"/>
+              </a:rPr>
+              <a:t>devarāī</a:t>
+            </a:r>
+            <a:pPr algn="l" indent="0" marL="0">
+              <a:lnSpc>
+                <a:spcPts val="1620"/>
+              </a:lnSpc>
+              <a:spcAft>
+                <a:spcPts val="300"/>
+              </a:spcAft>
+              <a:buNone/>
+            </a:pPr>
+            <a:r>
+              <a:rPr lang="en-US" sz="1200" dirty="0">
+                <a:solidFill>
+                  <a:srgbClr val="1C2833"/>
+                </a:solidFill>
+                <a:latin typeface="Arial" pitchFamily="34" charset="0"/>
+                <a:ea typeface="Arial" pitchFamily="34" charset="-122"/>
+                <a:cs typeface="Arial" pitchFamily="34" charset="-120"/>
+              </a:rPr>
+              <a:t> · Surveyed by Gadgil &amp; Vartak in their 1976 paper.</a:t>
+            </a:r>
+            <a:endParaRPr lang="en-US" sz="1200" dirty="0"/>
+          </a:p>
+          <a:p>
+            <a:pPr algn="l" marL="342900" indent="-342900">
+              <a:lnSpc>
+                <a:spcPts val="1620"/>
+              </a:lnSpc>
+              <a:spcAft>
+                <a:spcPts val="300"/>
+              </a:spcAft>
+              <a:buSzPct val="100000"/>
+              <a:buChar char="•"/>
+            </a:pPr>
+            <a:r>
+              <a:rPr lang="en-US" sz="1200" b="1" dirty="0">
+                <a:solidFill>
+                  <a:srgbClr val="1C2833"/>
+                </a:solidFill>
+                <a:latin typeface="Arial" pitchFamily="34" charset="0"/>
+                <a:ea typeface="Arial" pitchFamily="34" charset="-122"/>
+                <a:cs typeface="Arial" pitchFamily="34" charset="-120"/>
+              </a:rPr>
+              <a:t>Jharkhand / Odisha / W. Bengal (tribal belt)</a:t>
+            </a:r>
+            <a:pPr algn="l" indent="0" marL="0">
+              <a:lnSpc>
+                <a:spcPts val="1620"/>
+              </a:lnSpc>
+              <a:spcAft>
+                <a:spcPts val="300"/>
+              </a:spcAft>
+              <a:buNone/>
+            </a:pPr>
+            <a:r>
+              <a:rPr lang="en-US" sz="1200" dirty="0">
+                <a:solidFill>
+                  <a:srgbClr val="1C2833"/>
+                </a:solidFill>
+                <a:latin typeface="Arial" pitchFamily="34" charset="0"/>
+                <a:ea typeface="Arial" pitchFamily="34" charset="-122"/>
+                <a:cs typeface="Arial" pitchFamily="34" charset="-120"/>
+              </a:rPr>
+              <a:t> — </a:t>
+            </a:r>
+            <a:pPr algn="l" indent="0" marL="0">
+              <a:lnSpc>
+                <a:spcPts val="1620"/>
+              </a:lnSpc>
+              <a:spcAft>
+                <a:spcPts val="300"/>
+              </a:spcAft>
+              <a:buNone/>
+            </a:pPr>
+            <a:r>
+              <a:rPr lang="en-US" sz="1200" i="1" dirty="0">
+                <a:solidFill>
+                  <a:srgbClr val="1C2833"/>
+                </a:solidFill>
+                <a:latin typeface="Arial" pitchFamily="34" charset="0"/>
+                <a:ea typeface="Arial" pitchFamily="34" charset="-122"/>
+                <a:cs typeface="Arial" pitchFamily="34" charset="-120"/>
+              </a:rPr>
+              <a:t>sarna</a:t>
+            </a:r>
+            <a:pPr algn="l" indent="0" marL="0">
+              <a:lnSpc>
+                <a:spcPts val="1620"/>
+              </a:lnSpc>
+              <a:spcAft>
+                <a:spcPts val="300"/>
+              </a:spcAft>
+              <a:buNone/>
+            </a:pPr>
+            <a:r>
+              <a:rPr lang="en-US" sz="1200" dirty="0">
+                <a:solidFill>
+                  <a:srgbClr val="1C2833"/>
+                </a:solidFill>
+                <a:latin typeface="Arial" pitchFamily="34" charset="0"/>
+                <a:ea typeface="Arial" pitchFamily="34" charset="-122"/>
+                <a:cs typeface="Arial" pitchFamily="34" charset="-120"/>
+              </a:rPr>
+              <a:t> · Centred on </a:t>
+            </a:r>
+            <a:pPr algn="l" indent="0" marL="0">
+              <a:lnSpc>
+                <a:spcPts val="1620"/>
+              </a:lnSpc>
+              <a:spcAft>
+                <a:spcPts val="300"/>
+              </a:spcAft>
+              <a:buNone/>
+            </a:pPr>
+            <a:r>
+              <a:rPr lang="en-US" sz="1200" i="1" dirty="0">
+                <a:solidFill>
+                  <a:srgbClr val="1C2833"/>
+                </a:solidFill>
+                <a:latin typeface="Arial" pitchFamily="34" charset="0"/>
+                <a:ea typeface="Arial" pitchFamily="34" charset="-122"/>
+                <a:cs typeface="Arial" pitchFamily="34" charset="-120"/>
+              </a:rPr>
+              <a:t>sal</a:t>
+            </a:r>
+            <a:pPr algn="l" indent="0" marL="0">
+              <a:lnSpc>
+                <a:spcPts val="1620"/>
+              </a:lnSpc>
+              <a:spcAft>
+                <a:spcPts val="300"/>
+              </a:spcAft>
+              <a:buNone/>
+            </a:pPr>
+            <a:r>
+              <a:rPr lang="en-US" sz="1200" dirty="0">
+                <a:solidFill>
+                  <a:srgbClr val="1C2833"/>
+                </a:solidFill>
+                <a:latin typeface="Arial" pitchFamily="34" charset="0"/>
+                <a:ea typeface="Arial" pitchFamily="34" charset="-122"/>
+                <a:cs typeface="Arial" pitchFamily="34" charset="-120"/>
+              </a:rPr>
+              <a:t> (</a:t>
+            </a:r>
+            <a:pPr algn="l" indent="0" marL="0">
+              <a:lnSpc>
+                <a:spcPts val="1620"/>
+              </a:lnSpc>
+              <a:spcAft>
+                <a:spcPts val="300"/>
+              </a:spcAft>
+              <a:buNone/>
+            </a:pPr>
+            <a:r>
+              <a:rPr lang="en-US" sz="1200" i="1" dirty="0">
+                <a:solidFill>
+                  <a:srgbClr val="1C2833"/>
+                </a:solidFill>
+                <a:latin typeface="Arial" pitchFamily="34" charset="0"/>
+                <a:ea typeface="Arial" pitchFamily="34" charset="-122"/>
+                <a:cs typeface="Arial" pitchFamily="34" charset="-120"/>
+              </a:rPr>
+              <a:t>Shorea robusta</a:t>
+            </a:r>
+            <a:pPr algn="l" indent="0" marL="0">
+              <a:lnSpc>
+                <a:spcPts val="1620"/>
+              </a:lnSpc>
+              <a:spcAft>
+                <a:spcPts val="300"/>
+              </a:spcAft>
+              <a:buNone/>
+            </a:pPr>
+            <a:r>
+              <a:rPr lang="en-US" sz="1200" dirty="0">
+                <a:solidFill>
+                  <a:srgbClr val="1C2833"/>
+                </a:solidFill>
+                <a:latin typeface="Arial" pitchFamily="34" charset="0"/>
+                <a:ea typeface="Arial" pitchFamily="34" charset="-122"/>
+                <a:cs typeface="Arial" pitchFamily="34" charset="-120"/>
+              </a:rPr>
+              <a:t>); tied to Adivasi worship.</a:t>
+            </a:r>
+            <a:endParaRPr lang="en-US" sz="1200" dirty="0"/>
+          </a:p>
+          <a:p>
+            <a:pPr algn="l" marL="342900" indent="-342900">
+              <a:lnSpc>
+                <a:spcPts val="1620"/>
+              </a:lnSpc>
+              <a:spcAft>
+                <a:spcPts val="300"/>
+              </a:spcAft>
+              <a:buSzPct val="100000"/>
+              <a:buChar char="•"/>
+            </a:pPr>
+            <a:r>
+              <a:rPr lang="en-US" sz="1200" b="1" dirty="0">
+                <a:solidFill>
+                  <a:srgbClr val="1C2833"/>
+                </a:solidFill>
+                <a:latin typeface="Arial" pitchFamily="34" charset="0"/>
+                <a:ea typeface="Arial" pitchFamily="34" charset="-122"/>
+                <a:cs typeface="Arial" pitchFamily="34" charset="-120"/>
+              </a:rPr>
+              <a:t>Rajasthan</a:t>
+            </a:r>
+            <a:pPr algn="l" indent="0" marL="0">
+              <a:lnSpc>
+                <a:spcPts val="1620"/>
+              </a:lnSpc>
+              <a:spcAft>
+                <a:spcPts val="300"/>
+              </a:spcAft>
+              <a:buNone/>
+            </a:pPr>
+            <a:r>
+              <a:rPr lang="en-US" sz="1200" dirty="0">
+                <a:solidFill>
+                  <a:srgbClr val="1C2833"/>
+                </a:solidFill>
+                <a:latin typeface="Arial" pitchFamily="34" charset="0"/>
+                <a:ea typeface="Arial" pitchFamily="34" charset="-122"/>
+                <a:cs typeface="Arial" pitchFamily="34" charset="-120"/>
+              </a:rPr>
+              <a:t> — </a:t>
+            </a:r>
+            <a:pPr algn="l" indent="0" marL="0">
+              <a:lnSpc>
+                <a:spcPts val="1620"/>
+              </a:lnSpc>
+              <a:spcAft>
+                <a:spcPts val="300"/>
+              </a:spcAft>
+              <a:buNone/>
+            </a:pPr>
+            <a:r>
+              <a:rPr lang="en-US" sz="1200" i="1" dirty="0">
+                <a:solidFill>
+                  <a:srgbClr val="1C2833"/>
+                </a:solidFill>
+                <a:latin typeface="Arial" pitchFamily="34" charset="0"/>
+                <a:ea typeface="Arial" pitchFamily="34" charset="-122"/>
+                <a:cs typeface="Arial" pitchFamily="34" charset="-120"/>
+              </a:rPr>
+              <a:t>orans</a:t>
+            </a:r>
+            <a:pPr algn="l" indent="0" marL="0">
+              <a:lnSpc>
+                <a:spcPts val="1620"/>
+              </a:lnSpc>
+              <a:spcAft>
+                <a:spcPts val="300"/>
+              </a:spcAft>
+              <a:buNone/>
+            </a:pPr>
+            <a:r>
+              <a:rPr lang="en-US" sz="1200" dirty="0">
+                <a:solidFill>
+                  <a:srgbClr val="1C2833"/>
+                </a:solidFill>
+                <a:latin typeface="Arial" pitchFamily="34" charset="0"/>
+                <a:ea typeface="Arial" pitchFamily="34" charset="-122"/>
+                <a:cs typeface="Arial" pitchFamily="34" charset="-120"/>
+              </a:rPr>
+              <a:t> · Often combined with grazing land for community livestock.</a:t>
+            </a:r>
+            <a:endParaRPr lang="en-US" sz="1200" dirty="0"/>
+          </a:p>
+          <a:p>
+            <a:pPr algn="l" marL="342900" indent="-342900">
+              <a:lnSpc>
+                <a:spcPts val="1620"/>
+              </a:lnSpc>
+              <a:spcAft>
+                <a:spcPts val="300"/>
+              </a:spcAft>
+              <a:buSzPct val="100000"/>
+              <a:buChar char="•"/>
+            </a:pPr>
+            <a:r>
+              <a:rPr lang="en-US" sz="1200" b="1" dirty="0">
+                <a:solidFill>
+                  <a:srgbClr val="1C2833"/>
+                </a:solidFill>
+                <a:latin typeface="Arial" pitchFamily="34" charset="0"/>
+                <a:ea typeface="Arial" pitchFamily="34" charset="-122"/>
+                <a:cs typeface="Arial" pitchFamily="34" charset="-120"/>
+              </a:rPr>
+              <a:t>Meghalaya (Khasi Hills)</a:t>
+            </a:r>
+            <a:pPr algn="l" indent="0" marL="0">
+              <a:lnSpc>
+                <a:spcPts val="1620"/>
+              </a:lnSpc>
+              <a:spcAft>
+                <a:spcPts val="300"/>
+              </a:spcAft>
+              <a:buNone/>
+            </a:pPr>
+            <a:r>
+              <a:rPr lang="en-US" sz="1200" dirty="0">
+                <a:solidFill>
+                  <a:srgbClr val="1C2833"/>
+                </a:solidFill>
+                <a:latin typeface="Arial" pitchFamily="34" charset="0"/>
+                <a:ea typeface="Arial" pitchFamily="34" charset="-122"/>
+                <a:cs typeface="Arial" pitchFamily="34" charset="-120"/>
+              </a:rPr>
+              <a:t> — </a:t>
+            </a:r>
+            <a:pPr algn="l" indent="0" marL="0">
+              <a:lnSpc>
+                <a:spcPts val="1620"/>
+              </a:lnSpc>
+              <a:spcAft>
+                <a:spcPts val="300"/>
+              </a:spcAft>
+              <a:buNone/>
+            </a:pPr>
+            <a:r>
+              <a:rPr lang="en-US" sz="1200" i="1" dirty="0">
+                <a:solidFill>
+                  <a:srgbClr val="1C2833"/>
+                </a:solidFill>
+                <a:latin typeface="Arial" pitchFamily="34" charset="0"/>
+                <a:ea typeface="Arial" pitchFamily="34" charset="-122"/>
+                <a:cs typeface="Arial" pitchFamily="34" charset="-120"/>
+              </a:rPr>
+              <a:t>law kyntang</a:t>
+            </a:r>
+            <a:pPr algn="l" indent="0" marL="0">
+              <a:lnSpc>
+                <a:spcPts val="1620"/>
+              </a:lnSpc>
+              <a:spcAft>
+                <a:spcPts val="300"/>
+              </a:spcAft>
+              <a:buNone/>
+            </a:pPr>
+            <a:r>
+              <a:rPr lang="en-US" sz="1200" dirty="0">
+                <a:solidFill>
+                  <a:srgbClr val="1C2833"/>
+                </a:solidFill>
+                <a:latin typeface="Arial" pitchFamily="34" charset="0"/>
+                <a:ea typeface="Arial" pitchFamily="34" charset="-122"/>
+                <a:cs typeface="Arial" pitchFamily="34" charset="-120"/>
+              </a:rPr>
+              <a:t> · Some of the largest and best-protected groves in India.</a:t>
+            </a:r>
+            <a:endParaRPr lang="en-US" sz="1200" dirty="0"/>
+          </a:p>
         </p:txBody>
       </p:sp>
       <p:sp>
         <p:nvSpPr>
           <p:cNvPr id="5" name="Text 3"/>
-          <p:cNvSpPr/>
-          <p:nvPr/>
-        </p:nvSpPr>
-        <p:spPr>
-          <a:xfrm>
-            <a:off x="406301" y="1665684"/>
-            <a:ext cx="8498026" cy="213271"/>
-          </a:xfrm>
-          <a:prstGeom prst="rect">
-            <a:avLst/>
-          </a:prstGeom>
-          <a:noFill/>
-          <a:ln/>
-        </p:spPr>
-        <p:txBody>
-          <a:bodyPr wrap="square" lIns="0" tIns="0" rIns="0" bIns="0" rtlCol="0" anchor="t"/>
-          <a:lstStyle/>
-          <a:p>
-            <a:pPr algn="l" indent="0" marL="0">
-              <a:lnSpc>
-                <a:spcPts val="1680"/>
-              </a:lnSpc>
-              <a:spcBef>
-                <a:spcPts val="300"/>
-              </a:spcBef>
-              <a:spcAft>
-                <a:spcPts val="300"/>
-              </a:spcAft>
-              <a:buNone/>
-            </a:pPr>
-            <a:r>
-              <a:rPr lang="en-US" sz="1200" dirty="0">
-                <a:solidFill>
-                  <a:srgbClr val="1C2833"/>
-                </a:solidFill>
-                <a:latin typeface="Arial" pitchFamily="34" charset="0"/>
-                <a:ea typeface="Arial" pitchFamily="34" charset="-122"/>
-                <a:cs typeface="Arial" pitchFamily="34" charset="-120"/>
-              </a:rPr>
-              <a:t>– Preview Day 5: </a:t>
-            </a:r>
-            <a:pPr algn="l" indent="0" marL="0">
-              <a:lnSpc>
-                <a:spcPts val="1680"/>
-              </a:lnSpc>
-              <a:spcBef>
-                <a:spcPts val="300"/>
-              </a:spcBef>
-              <a:spcAft>
-                <a:spcPts val="300"/>
-              </a:spcAft>
-              <a:buNone/>
-            </a:pPr>
-            <a:r>
-              <a:rPr lang="en-US" sz="1200" i="1" dirty="0">
-                <a:solidFill>
-                  <a:srgbClr val="1C2833"/>
-                </a:solidFill>
-                <a:latin typeface="Arial" pitchFamily="34" charset="0"/>
-                <a:ea typeface="Arial" pitchFamily="34" charset="-122"/>
-                <a:cs typeface="Arial" pitchFamily="34" charset="-120"/>
-              </a:rPr>
-              <a:t>"Tomorrow we read the Bhagavad Gītā on why giving back is built into the ecological cycle."</a:t>
-            </a:r>
-            <a:endParaRPr lang="en-US" sz="1200" dirty="0"/>
-          </a:p>
-        </p:txBody>
-      </p:sp>
-      <p:sp>
-        <p:nvSpPr>
-          <p:cNvPr id="6" name="Text 4"/>
           <p:cNvSpPr/>
           <p:nvPr/>
         </p:nvSpPr>
@@ -6953,7 +9968,7 @@
                 <a:ea typeface="Georgia" pitchFamily="34" charset="-122"/>
                 <a:cs typeface="Georgia" pitchFamily="34" charset="-120"/>
               </a:rPr>
-              <a:t>Homework</a:t>
+              <a:t>Core (20 min) (cont.)</a:t>
             </a:r>
             <a:endParaRPr lang="en-US" sz="1800" dirty="0"/>
           </a:p>
@@ -6967,8 +9982,8 @@
         </p:nvSpPr>
         <p:spPr>
           <a:xfrm>
-            <a:off x="406301" y="870942"/>
-            <a:ext cx="8498026" cy="426541"/>
+            <a:off x="634901" y="883593"/>
+            <a:ext cx="8102798" cy="281880"/>
           </a:xfrm>
           <a:prstGeom prst="rect">
             <a:avLst/>
@@ -6980,9 +9995,128 @@
           <a:bodyPr wrap="square" lIns="0" tIns="0" rIns="0" bIns="0" rtlCol="0" anchor="t"/>
           <a:lstStyle/>
           <a:p>
-            <a:pPr algn="l" indent="0" marL="0">
-              <a:lnSpc>
-                <a:spcPts val="1680"/>
+            <a:pPr algn="l" marL="342900" indent="-342900">
+              <a:lnSpc>
+                <a:spcPts val="1620"/>
+              </a:lnSpc>
+              <a:spcAft>
+                <a:spcPts val="300"/>
+              </a:spcAft>
+              <a:buSzPct val="100000"/>
+              <a:buChar char="•"/>
+            </a:pPr>
+            <a:r>
+              <a:rPr lang="en-US" sz="1200" b="1" dirty="0">
+                <a:solidFill>
+                  <a:srgbClr val="1C2833"/>
+                </a:solidFill>
+                <a:latin typeface="Arial" pitchFamily="34" charset="0"/>
+                <a:ea typeface="Arial" pitchFamily="34" charset="-122"/>
+                <a:cs typeface="Arial" pitchFamily="34" charset="-120"/>
+              </a:rPr>
+              <a:t>Why they matter ecologically.</a:t>
+            </a:r>
+            <a:pPr algn="l" indent="0" marL="0">
+              <a:lnSpc>
+                <a:spcPts val="1620"/>
+              </a:lnSpc>
+              <a:spcAft>
+                <a:spcPts val="300"/>
+              </a:spcAft>
+              <a:buNone/>
+            </a:pPr>
+            <a:r>
+              <a:rPr lang="en-US" sz="1200" dirty="0">
+                <a:solidFill>
+                  <a:srgbClr val="1C2833"/>
+                </a:solidFill>
+                <a:latin typeface="Arial" pitchFamily="34" charset="0"/>
+                <a:ea typeface="Arial" pitchFamily="34" charset="-122"/>
+                <a:cs typeface="Arial" pitchFamily="34" charset="-120"/>
+              </a:rPr>
+              <a:t> Read the handout extract:</a:t>
+            </a:r>
+            <a:endParaRPr lang="en-US" sz="1200" dirty="0"/>
+          </a:p>
+        </p:txBody>
+      </p:sp>
+      <p:sp>
+        <p:nvSpPr>
+          <p:cNvPr id="5" name="Text 3"/>
+          <p:cNvSpPr/>
+          <p:nvPr/>
+        </p:nvSpPr>
+        <p:spPr>
+          <a:xfrm>
+            <a:off x="406301" y="1266974"/>
+            <a:ext cx="8331398" cy="1535906"/>
+          </a:xfrm>
+          <a:prstGeom prst="rect">
+            <a:avLst/>
+          </a:prstGeom>
+          <a:solidFill>
+            <a:srgbClr val="F4F8F9"/>
+          </a:solidFill>
+          <a:ln/>
+        </p:spPr>
+        <p:txBody>
+          <a:bodyPr wrap="square" rtlCol="0" anchor="ctr"/>
+          <a:lstStyle/>
+          <a:p>
+            <a:pPr indent="0" marL="0">
+              <a:buNone/>
+            </a:pPr>
+            <a:endParaRPr lang="en-US" dirty="0"/>
+          </a:p>
+        </p:txBody>
+      </p:sp>
+      <p:sp>
+        <p:nvSpPr>
+          <p:cNvPr id="6" name="Shape 4"/>
+          <p:cNvSpPr/>
+          <p:nvPr/>
+        </p:nvSpPr>
+        <p:spPr>
+          <a:xfrm>
+            <a:off x="434876" y="1266974"/>
+            <a:ext cx="0" cy="1535906"/>
+          </a:xfrm>
+          <a:prstGeom prst="line">
+            <a:avLst/>
+          </a:prstGeom>
+          <a:noFill/>
+          <a:ln w="57150">
+            <a:solidFill>
+              <a:srgbClr val="FE4447"/>
+            </a:solidFill>
+            <a:prstDash val="solid"/>
+          </a:ln>
+        </p:spPr>
+      </p:sp>
+      <p:sp>
+        <p:nvSpPr>
+          <p:cNvPr id="7" name="Text 5"/>
+          <p:cNvSpPr/>
+          <p:nvPr/>
+        </p:nvSpPr>
+        <p:spPr>
+          <a:xfrm>
+            <a:off x="692051" y="1457474"/>
+            <a:ext cx="7973389" cy="1154906"/>
+          </a:xfrm>
+          <a:prstGeom prst="rect">
+            <a:avLst/>
+          </a:prstGeom>
+          <a:noFill/>
+          <a:ln/>
+        </p:spPr>
+        <p:txBody>
+          <a:bodyPr wrap="square" lIns="0" tIns="0" rIns="0" bIns="0" rtlCol="0" anchor="t"/>
+          <a:lstStyle/>
+          <a:p>
+            <a:pPr algn="l" indent="0" marL="0">
+              <a:lnSpc>
+                <a:spcPts val="1820"/>
               </a:lnSpc>
               <a:spcBef>
                 <a:spcPts val="300"/>
@@ -6993,19 +10127,19 @@
               <a:buNone/>
             </a:pPr>
             <a:r>
-              <a:rPr lang="en-US" sz="1200" dirty="0">
-                <a:solidFill>
-                  <a:srgbClr val="1C2833"/>
-                </a:solidFill>
-                <a:latin typeface="Arial" pitchFamily="34" charset="0"/>
-                <a:ea typeface="Arial" pitchFamily="34" charset="-122"/>
-                <a:cs typeface="Arial" pitchFamily="34" charset="-120"/>
-              </a:rPr>
-              <a:t>– Ask one elder in your family or neighbourhood: </a:t>
-            </a:r>
-            <a:pPr algn="l" indent="0" marL="0">
-              <a:lnSpc>
-                <a:spcPts val="1680"/>
+              <a:rPr lang="en-US" sz="1300" dirty="0">
+                <a:solidFill>
+                  <a:srgbClr val="1C2833"/>
+                </a:solidFill>
+                <a:latin typeface="Georgia" pitchFamily="34" charset="0"/>
+                <a:ea typeface="Georgia" pitchFamily="34" charset="-122"/>
+                <a:cs typeface="Georgia" pitchFamily="34" charset="-120"/>
+              </a:rPr>
+              <a:t>"Sacred groves are relict patches of original vegetation conserved through cultural-religious tradition. They function as in-situ refuges for plant species lost from surrounding areas, including medicinal plants and old-growth trees of high genetic value. In the Western Ghats, sacred groves harbour species not found in nearby agricultural or even reserve-forest landscapes." — paraphrased from Gadgil, M. &amp; Vartak, V. D. (1976), "The Sacred Groves of Western Ghats in India," </a:t>
+            </a:r>
+            <a:pPr algn="l" indent="0" marL="0">
+              <a:lnSpc>
+                <a:spcPts val="1820"/>
               </a:lnSpc>
               <a:spcBef>
                 <a:spcPts val="300"/>
@@ -7016,19 +10150,19 @@
               <a:buNone/>
             </a:pPr>
             <a:r>
-              <a:rPr lang="en-US" sz="1200" i="1" dirty="0">
-                <a:solidFill>
-                  <a:srgbClr val="1C2833"/>
-                </a:solidFill>
-                <a:latin typeface="Arial" pitchFamily="34" charset="0"/>
-                <a:ea typeface="Arial" pitchFamily="34" charset="-122"/>
-                <a:cs typeface="Arial" pitchFamily="34" charset="-120"/>
-              </a:rPr>
-              <a:t>"Was there any tree, grove, pond, or piece of land that was 'not to be touched' when you were a child? What happened to it?"</a:t>
-            </a:r>
-            <a:pPr algn="l" indent="0" marL="0">
-              <a:lnSpc>
-                <a:spcPts val="1680"/>
+              <a:rPr lang="en-US" sz="1300" i="1" dirty="0">
+                <a:solidFill>
+                  <a:srgbClr val="1C2833"/>
+                </a:solidFill>
+                <a:latin typeface="Georgia" pitchFamily="34" charset="0"/>
+                <a:ea typeface="Georgia" pitchFamily="34" charset="-122"/>
+                <a:cs typeface="Georgia" pitchFamily="34" charset="-120"/>
+              </a:rPr>
+              <a:t>Economic Botany</a:t>
+            </a:r>
+            <a:pPr algn="l" indent="0" marL="0">
+              <a:lnSpc>
+                <a:spcPts val="1820"/>
               </a:lnSpc>
               <a:spcBef>
                 <a:spcPts val="300"/>
@@ -7039,23 +10173,23 @@
               <a:buNone/>
             </a:pPr>
             <a:r>
-              <a:rPr lang="en-US" sz="1200" dirty="0">
-                <a:solidFill>
-                  <a:srgbClr val="1C2833"/>
-                </a:solidFill>
-                <a:latin typeface="Arial" pitchFamily="34" charset="0"/>
-                <a:ea typeface="Arial" pitchFamily="34" charset="-122"/>
-                <a:cs typeface="Arial" pitchFamily="34" charset="-120"/>
-              </a:rPr>
-              <a:t> Write what they said in 5 sentences. Bring tomorrow.</a:t>
-            </a:r>
-            <a:endParaRPr lang="en-US" sz="1200" dirty="0"/>
-          </a:p>
-        </p:txBody>
-      </p:sp>
-      <p:sp>
-        <p:nvSpPr>
-          <p:cNvPr id="5" name="Text 3"/>
+              <a:rPr lang="en-US" sz="1300" dirty="0">
+                <a:solidFill>
+                  <a:srgbClr val="1C2833"/>
+                </a:solidFill>
+                <a:latin typeface="Georgia" pitchFamily="34" charset="0"/>
+                <a:ea typeface="Georgia" pitchFamily="34" charset="-122"/>
+                <a:cs typeface="Georgia" pitchFamily="34" charset="-120"/>
+              </a:rPr>
+              <a:t> 30(2): 152–160.</a:t>
+            </a:r>
+            <a:endParaRPr lang="en-US" sz="1300" dirty="0"/>
+          </a:p>
+        </p:txBody>
+      </p:sp>
+      <p:sp>
+        <p:nvSpPr>
+          <p:cNvPr id="8" name="Text 6"/>
           <p:cNvSpPr/>
           <p:nvPr/>
         </p:nvSpPr>
